--- a/Master Thesis Updates.pptx
+++ b/Master Thesis Updates.pptx
@@ -5,12 +5,20 @@
     <p:sldMasterId id="2147483648" r:id="rId1"/>
   </p:sldMasterIdLst>
   <p:notesMasterIdLst>
-    <p:notesMasterId r:id="rId5"/>
+    <p:notesMasterId r:id="rId13"/>
   </p:notesMasterIdLst>
   <p:sldIdLst>
     <p:sldId id="256" r:id="rId2"/>
-    <p:sldId id="257" r:id="rId3"/>
-    <p:sldId id="258" r:id="rId4"/>
+    <p:sldId id="263" r:id="rId3"/>
+    <p:sldId id="257" r:id="rId4"/>
+    <p:sldId id="266" r:id="rId5"/>
+    <p:sldId id="265" r:id="rId6"/>
+    <p:sldId id="264" r:id="rId7"/>
+    <p:sldId id="260" r:id="rId8"/>
+    <p:sldId id="259" r:id="rId9"/>
+    <p:sldId id="261" r:id="rId10"/>
+    <p:sldId id="262" r:id="rId11"/>
+    <p:sldId id="258" r:id="rId12"/>
   </p:sldIdLst>
   <p:sldSz cx="12192000" cy="6858000"/>
   <p:notesSz cx="6858000" cy="9144000"/>
@@ -532,7 +540,7 @@
           <a:p>
             <a:fld id="{8BFF5565-A286-40EC-9626-D8188B2D2F64}" type="slidenum">
               <a:rPr lang="LID4096" smtClean="0"/>
-              <a:t>2</a:t>
+              <a:t>3</a:t>
             </a:fld>
             <a:endParaRPr lang="LID4096"/>
           </a:p>
@@ -542,6 +550,762 @@
     <p:extLst>
       <p:ext uri="{BB962C8B-B14F-4D97-AF65-F5344CB8AC3E}">
         <p14:creationId xmlns:p14="http://schemas.microsoft.com/office/powerpoint/2010/main" val="3998017895"/>
+      </p:ext>
+    </p:extLst>
+  </p:cSld>
+  <p:clrMapOvr>
+    <a:masterClrMapping/>
+  </p:clrMapOvr>
+</p:notes>
+</file>
+
+<file path=ppt/notesSlides/notesSlide2.xml><?xml version="1.0" encoding="utf-8"?>
+<p:notes xmlns:a="http://schemas.openxmlformats.org/drawingml/2006/main" xmlns:r="http://schemas.openxmlformats.org/officeDocument/2006/relationships" xmlns:p="http://schemas.openxmlformats.org/presentationml/2006/main">
+  <p:cSld>
+    <p:spTree>
+      <p:nvGrpSpPr>
+        <p:cNvPr id="1" name="">
+          <a:extLst>
+            <a:ext uri="{FF2B5EF4-FFF2-40B4-BE49-F238E27FC236}">
+              <a16:creationId xmlns:a16="http://schemas.microsoft.com/office/drawing/2014/main" id="{7533F342-0DD9-B59A-C330-9CF9C535793B}"/>
+            </a:ext>
+          </a:extLst>
+        </p:cNvPr>
+        <p:cNvGrpSpPr/>
+        <p:nvPr/>
+      </p:nvGrpSpPr>
+      <p:grpSpPr>
+        <a:xfrm>
+          <a:off x="0" y="0"/>
+          <a:ext cx="0" cy="0"/>
+          <a:chOff x="0" y="0"/>
+          <a:chExt cx="0" cy="0"/>
+        </a:xfrm>
+      </p:grpSpPr>
+      <p:sp>
+        <p:nvSpPr>
+          <p:cNvPr id="2" name="Slide Image Placeholder 1">
+            <a:extLst>
+              <a:ext uri="{FF2B5EF4-FFF2-40B4-BE49-F238E27FC236}">
+                <a16:creationId xmlns:a16="http://schemas.microsoft.com/office/drawing/2014/main" id="{81740758-F515-78FF-141D-7CFB4F647111}"/>
+              </a:ext>
+            </a:extLst>
+          </p:cNvPr>
+          <p:cNvSpPr>
+            <a:spLocks noGrp="1" noRot="1" noChangeAspect="1"/>
+          </p:cNvSpPr>
+          <p:nvPr>
+            <p:ph type="sldImg"/>
+          </p:nvPr>
+        </p:nvSpPr>
+        <p:spPr/>
+      </p:sp>
+      <p:sp>
+        <p:nvSpPr>
+          <p:cNvPr id="3" name="Notes Placeholder 2">
+            <a:extLst>
+              <a:ext uri="{FF2B5EF4-FFF2-40B4-BE49-F238E27FC236}">
+                <a16:creationId xmlns:a16="http://schemas.microsoft.com/office/drawing/2014/main" id="{B1489EE5-0CCF-DEA9-4BF1-61A47C4D7E01}"/>
+              </a:ext>
+            </a:extLst>
+          </p:cNvPr>
+          <p:cNvSpPr>
+            <a:spLocks noGrp="1"/>
+          </p:cNvSpPr>
+          <p:nvPr>
+            <p:ph type="body" idx="1"/>
+          </p:nvPr>
+        </p:nvSpPr>
+        <p:spPr/>
+        <p:txBody>
+          <a:bodyPr/>
+          <a:lstStyle/>
+          <a:p>
+            <a:endParaRPr lang="LID4096" dirty="0"/>
+          </a:p>
+        </p:txBody>
+      </p:sp>
+      <p:sp>
+        <p:nvSpPr>
+          <p:cNvPr id="4" name="Slide Number Placeholder 3">
+            <a:extLst>
+              <a:ext uri="{FF2B5EF4-FFF2-40B4-BE49-F238E27FC236}">
+                <a16:creationId xmlns:a16="http://schemas.microsoft.com/office/drawing/2014/main" id="{A8550CF4-35BA-7A9F-C4B3-EBC858D5E25A}"/>
+              </a:ext>
+            </a:extLst>
+          </p:cNvPr>
+          <p:cNvSpPr>
+            <a:spLocks noGrp="1"/>
+          </p:cNvSpPr>
+          <p:nvPr>
+            <p:ph type="sldNum" sz="quarter" idx="5"/>
+          </p:nvPr>
+        </p:nvSpPr>
+        <p:spPr/>
+        <p:txBody>
+          <a:bodyPr/>
+          <a:lstStyle/>
+          <a:p>
+            <a:fld id="{8BFF5565-A286-40EC-9626-D8188B2D2F64}" type="slidenum">
+              <a:rPr lang="LID4096" smtClean="0"/>
+              <a:t>4</a:t>
+            </a:fld>
+            <a:endParaRPr lang="LID4096"/>
+          </a:p>
+        </p:txBody>
+      </p:sp>
+    </p:spTree>
+    <p:extLst>
+      <p:ext uri="{BB962C8B-B14F-4D97-AF65-F5344CB8AC3E}">
+        <p14:creationId xmlns:p14="http://schemas.microsoft.com/office/powerpoint/2010/main" val="2759705259"/>
+      </p:ext>
+    </p:extLst>
+  </p:cSld>
+  <p:clrMapOvr>
+    <a:masterClrMapping/>
+  </p:clrMapOvr>
+</p:notes>
+</file>
+
+<file path=ppt/notesSlides/notesSlide3.xml><?xml version="1.0" encoding="utf-8"?>
+<p:notes xmlns:a="http://schemas.openxmlformats.org/drawingml/2006/main" xmlns:r="http://schemas.openxmlformats.org/officeDocument/2006/relationships" xmlns:p="http://schemas.openxmlformats.org/presentationml/2006/main">
+  <p:cSld>
+    <p:spTree>
+      <p:nvGrpSpPr>
+        <p:cNvPr id="1" name="">
+          <a:extLst>
+            <a:ext uri="{FF2B5EF4-FFF2-40B4-BE49-F238E27FC236}">
+              <a16:creationId xmlns:a16="http://schemas.microsoft.com/office/drawing/2014/main" id="{E085CB1A-9D5E-612D-ECA4-3D4D5D4C2FD5}"/>
+            </a:ext>
+          </a:extLst>
+        </p:cNvPr>
+        <p:cNvGrpSpPr/>
+        <p:nvPr/>
+      </p:nvGrpSpPr>
+      <p:grpSpPr>
+        <a:xfrm>
+          <a:off x="0" y="0"/>
+          <a:ext cx="0" cy="0"/>
+          <a:chOff x="0" y="0"/>
+          <a:chExt cx="0" cy="0"/>
+        </a:xfrm>
+      </p:grpSpPr>
+      <p:sp>
+        <p:nvSpPr>
+          <p:cNvPr id="2" name="Slide Image Placeholder 1">
+            <a:extLst>
+              <a:ext uri="{FF2B5EF4-FFF2-40B4-BE49-F238E27FC236}">
+                <a16:creationId xmlns:a16="http://schemas.microsoft.com/office/drawing/2014/main" id="{F0CD76BE-290E-3EF2-61FD-66E758D4D0C7}"/>
+              </a:ext>
+            </a:extLst>
+          </p:cNvPr>
+          <p:cNvSpPr>
+            <a:spLocks noGrp="1" noRot="1" noChangeAspect="1"/>
+          </p:cNvSpPr>
+          <p:nvPr>
+            <p:ph type="sldImg"/>
+          </p:nvPr>
+        </p:nvSpPr>
+        <p:spPr/>
+      </p:sp>
+      <p:sp>
+        <p:nvSpPr>
+          <p:cNvPr id="3" name="Notes Placeholder 2">
+            <a:extLst>
+              <a:ext uri="{FF2B5EF4-FFF2-40B4-BE49-F238E27FC236}">
+                <a16:creationId xmlns:a16="http://schemas.microsoft.com/office/drawing/2014/main" id="{E9822D2E-4336-C2DE-03CE-A5BF0BE24C0F}"/>
+              </a:ext>
+            </a:extLst>
+          </p:cNvPr>
+          <p:cNvSpPr>
+            <a:spLocks noGrp="1"/>
+          </p:cNvSpPr>
+          <p:nvPr>
+            <p:ph type="body" idx="1"/>
+          </p:nvPr>
+        </p:nvSpPr>
+        <p:spPr/>
+        <p:txBody>
+          <a:bodyPr/>
+          <a:lstStyle/>
+          <a:p>
+            <a:endParaRPr lang="LID4096" dirty="0"/>
+          </a:p>
+        </p:txBody>
+      </p:sp>
+      <p:sp>
+        <p:nvSpPr>
+          <p:cNvPr id="4" name="Slide Number Placeholder 3">
+            <a:extLst>
+              <a:ext uri="{FF2B5EF4-FFF2-40B4-BE49-F238E27FC236}">
+                <a16:creationId xmlns:a16="http://schemas.microsoft.com/office/drawing/2014/main" id="{BF005C1B-B2F1-65F9-8229-06A05C5C0D5E}"/>
+              </a:ext>
+            </a:extLst>
+          </p:cNvPr>
+          <p:cNvSpPr>
+            <a:spLocks noGrp="1"/>
+          </p:cNvSpPr>
+          <p:nvPr>
+            <p:ph type="sldNum" sz="quarter" idx="5"/>
+          </p:nvPr>
+        </p:nvSpPr>
+        <p:spPr/>
+        <p:txBody>
+          <a:bodyPr/>
+          <a:lstStyle/>
+          <a:p>
+            <a:fld id="{8BFF5565-A286-40EC-9626-D8188B2D2F64}" type="slidenum">
+              <a:rPr lang="LID4096" smtClean="0"/>
+              <a:t>5</a:t>
+            </a:fld>
+            <a:endParaRPr lang="LID4096"/>
+          </a:p>
+        </p:txBody>
+      </p:sp>
+    </p:spTree>
+    <p:extLst>
+      <p:ext uri="{BB962C8B-B14F-4D97-AF65-F5344CB8AC3E}">
+        <p14:creationId xmlns:p14="http://schemas.microsoft.com/office/powerpoint/2010/main" val="1262692733"/>
+      </p:ext>
+    </p:extLst>
+  </p:cSld>
+  <p:clrMapOvr>
+    <a:masterClrMapping/>
+  </p:clrMapOvr>
+</p:notes>
+</file>
+
+<file path=ppt/notesSlides/notesSlide4.xml><?xml version="1.0" encoding="utf-8"?>
+<p:notes xmlns:a="http://schemas.openxmlformats.org/drawingml/2006/main" xmlns:r="http://schemas.openxmlformats.org/officeDocument/2006/relationships" xmlns:p="http://schemas.openxmlformats.org/presentationml/2006/main">
+  <p:cSld>
+    <p:spTree>
+      <p:nvGrpSpPr>
+        <p:cNvPr id="1" name="">
+          <a:extLst>
+            <a:ext uri="{FF2B5EF4-FFF2-40B4-BE49-F238E27FC236}">
+              <a16:creationId xmlns:a16="http://schemas.microsoft.com/office/drawing/2014/main" id="{B858C58F-BE2E-0E9B-6533-CAF2C57BC961}"/>
+            </a:ext>
+          </a:extLst>
+        </p:cNvPr>
+        <p:cNvGrpSpPr/>
+        <p:nvPr/>
+      </p:nvGrpSpPr>
+      <p:grpSpPr>
+        <a:xfrm>
+          <a:off x="0" y="0"/>
+          <a:ext cx="0" cy="0"/>
+          <a:chOff x="0" y="0"/>
+          <a:chExt cx="0" cy="0"/>
+        </a:xfrm>
+      </p:grpSpPr>
+      <p:sp>
+        <p:nvSpPr>
+          <p:cNvPr id="2" name="Slide Image Placeholder 1">
+            <a:extLst>
+              <a:ext uri="{FF2B5EF4-FFF2-40B4-BE49-F238E27FC236}">
+                <a16:creationId xmlns:a16="http://schemas.microsoft.com/office/drawing/2014/main" id="{861430B3-C55F-F9DA-7AAC-C56CAB603E36}"/>
+              </a:ext>
+            </a:extLst>
+          </p:cNvPr>
+          <p:cNvSpPr>
+            <a:spLocks noGrp="1" noRot="1" noChangeAspect="1"/>
+          </p:cNvSpPr>
+          <p:nvPr>
+            <p:ph type="sldImg"/>
+          </p:nvPr>
+        </p:nvSpPr>
+        <p:spPr/>
+      </p:sp>
+      <p:sp>
+        <p:nvSpPr>
+          <p:cNvPr id="3" name="Notes Placeholder 2">
+            <a:extLst>
+              <a:ext uri="{FF2B5EF4-FFF2-40B4-BE49-F238E27FC236}">
+                <a16:creationId xmlns:a16="http://schemas.microsoft.com/office/drawing/2014/main" id="{DCA12C89-C1EE-0514-82AA-56A79F1680A4}"/>
+              </a:ext>
+            </a:extLst>
+          </p:cNvPr>
+          <p:cNvSpPr>
+            <a:spLocks noGrp="1"/>
+          </p:cNvSpPr>
+          <p:nvPr>
+            <p:ph type="body" idx="1"/>
+          </p:nvPr>
+        </p:nvSpPr>
+        <p:spPr/>
+        <p:txBody>
+          <a:bodyPr/>
+          <a:lstStyle/>
+          <a:p>
+            <a:endParaRPr lang="LID4096" dirty="0"/>
+          </a:p>
+        </p:txBody>
+      </p:sp>
+      <p:sp>
+        <p:nvSpPr>
+          <p:cNvPr id="4" name="Slide Number Placeholder 3">
+            <a:extLst>
+              <a:ext uri="{FF2B5EF4-FFF2-40B4-BE49-F238E27FC236}">
+                <a16:creationId xmlns:a16="http://schemas.microsoft.com/office/drawing/2014/main" id="{1A8922C3-73A6-1127-6AC1-D613CF41FC6E}"/>
+              </a:ext>
+            </a:extLst>
+          </p:cNvPr>
+          <p:cNvSpPr>
+            <a:spLocks noGrp="1"/>
+          </p:cNvSpPr>
+          <p:nvPr>
+            <p:ph type="sldNum" sz="quarter" idx="5"/>
+          </p:nvPr>
+        </p:nvSpPr>
+        <p:spPr/>
+        <p:txBody>
+          <a:bodyPr/>
+          <a:lstStyle/>
+          <a:p>
+            <a:fld id="{8BFF5565-A286-40EC-9626-D8188B2D2F64}" type="slidenum">
+              <a:rPr lang="LID4096" smtClean="0"/>
+              <a:t>6</a:t>
+            </a:fld>
+            <a:endParaRPr lang="LID4096"/>
+          </a:p>
+        </p:txBody>
+      </p:sp>
+    </p:spTree>
+    <p:extLst>
+      <p:ext uri="{BB962C8B-B14F-4D97-AF65-F5344CB8AC3E}">
+        <p14:creationId xmlns:p14="http://schemas.microsoft.com/office/powerpoint/2010/main" val="1802585424"/>
+      </p:ext>
+    </p:extLst>
+  </p:cSld>
+  <p:clrMapOvr>
+    <a:masterClrMapping/>
+  </p:clrMapOvr>
+</p:notes>
+</file>
+
+<file path=ppt/notesSlides/notesSlide5.xml><?xml version="1.0" encoding="utf-8"?>
+<p:notes xmlns:a="http://schemas.openxmlformats.org/drawingml/2006/main" xmlns:r="http://schemas.openxmlformats.org/officeDocument/2006/relationships" xmlns:p="http://schemas.openxmlformats.org/presentationml/2006/main">
+  <p:cSld>
+    <p:spTree>
+      <p:nvGrpSpPr>
+        <p:cNvPr id="1" name="">
+          <a:extLst>
+            <a:ext uri="{FF2B5EF4-FFF2-40B4-BE49-F238E27FC236}">
+              <a16:creationId xmlns:a16="http://schemas.microsoft.com/office/drawing/2014/main" id="{8C99F67F-4728-9560-B035-6FEAAFE38BB9}"/>
+            </a:ext>
+          </a:extLst>
+        </p:cNvPr>
+        <p:cNvGrpSpPr/>
+        <p:nvPr/>
+      </p:nvGrpSpPr>
+      <p:grpSpPr>
+        <a:xfrm>
+          <a:off x="0" y="0"/>
+          <a:ext cx="0" cy="0"/>
+          <a:chOff x="0" y="0"/>
+          <a:chExt cx="0" cy="0"/>
+        </a:xfrm>
+      </p:grpSpPr>
+      <p:sp>
+        <p:nvSpPr>
+          <p:cNvPr id="2" name="Slide Image Placeholder 1">
+            <a:extLst>
+              <a:ext uri="{FF2B5EF4-FFF2-40B4-BE49-F238E27FC236}">
+                <a16:creationId xmlns:a16="http://schemas.microsoft.com/office/drawing/2014/main" id="{B028811D-A368-91FF-7812-322218CBEC20}"/>
+              </a:ext>
+            </a:extLst>
+          </p:cNvPr>
+          <p:cNvSpPr>
+            <a:spLocks noGrp="1" noRot="1" noChangeAspect="1"/>
+          </p:cNvSpPr>
+          <p:nvPr>
+            <p:ph type="sldImg"/>
+          </p:nvPr>
+        </p:nvSpPr>
+        <p:spPr/>
+      </p:sp>
+      <p:sp>
+        <p:nvSpPr>
+          <p:cNvPr id="3" name="Notes Placeholder 2">
+            <a:extLst>
+              <a:ext uri="{FF2B5EF4-FFF2-40B4-BE49-F238E27FC236}">
+                <a16:creationId xmlns:a16="http://schemas.microsoft.com/office/drawing/2014/main" id="{2397EA00-7A30-0219-29EC-416D97BC0E27}"/>
+              </a:ext>
+            </a:extLst>
+          </p:cNvPr>
+          <p:cNvSpPr>
+            <a:spLocks noGrp="1"/>
+          </p:cNvSpPr>
+          <p:nvPr>
+            <p:ph type="body" idx="1"/>
+          </p:nvPr>
+        </p:nvSpPr>
+        <p:spPr/>
+        <p:txBody>
+          <a:bodyPr/>
+          <a:lstStyle/>
+          <a:p>
+            <a:endParaRPr lang="LID4096" dirty="0"/>
+          </a:p>
+        </p:txBody>
+      </p:sp>
+      <p:sp>
+        <p:nvSpPr>
+          <p:cNvPr id="4" name="Slide Number Placeholder 3">
+            <a:extLst>
+              <a:ext uri="{FF2B5EF4-FFF2-40B4-BE49-F238E27FC236}">
+                <a16:creationId xmlns:a16="http://schemas.microsoft.com/office/drawing/2014/main" id="{7F5E25E5-BAB1-E212-85C3-38A9C8B921A9}"/>
+              </a:ext>
+            </a:extLst>
+          </p:cNvPr>
+          <p:cNvSpPr>
+            <a:spLocks noGrp="1"/>
+          </p:cNvSpPr>
+          <p:nvPr>
+            <p:ph type="sldNum" sz="quarter" idx="5"/>
+          </p:nvPr>
+        </p:nvSpPr>
+        <p:spPr/>
+        <p:txBody>
+          <a:bodyPr/>
+          <a:lstStyle/>
+          <a:p>
+            <a:fld id="{8BFF5565-A286-40EC-9626-D8188B2D2F64}" type="slidenum">
+              <a:rPr lang="LID4096" smtClean="0"/>
+              <a:t>7</a:t>
+            </a:fld>
+            <a:endParaRPr lang="LID4096"/>
+          </a:p>
+        </p:txBody>
+      </p:sp>
+    </p:spTree>
+    <p:extLst>
+      <p:ext uri="{BB962C8B-B14F-4D97-AF65-F5344CB8AC3E}">
+        <p14:creationId xmlns:p14="http://schemas.microsoft.com/office/powerpoint/2010/main" val="194025491"/>
+      </p:ext>
+    </p:extLst>
+  </p:cSld>
+  <p:clrMapOvr>
+    <a:masterClrMapping/>
+  </p:clrMapOvr>
+</p:notes>
+</file>
+
+<file path=ppt/notesSlides/notesSlide6.xml><?xml version="1.0" encoding="utf-8"?>
+<p:notes xmlns:a="http://schemas.openxmlformats.org/drawingml/2006/main" xmlns:r="http://schemas.openxmlformats.org/officeDocument/2006/relationships" xmlns:p="http://schemas.openxmlformats.org/presentationml/2006/main">
+  <p:cSld>
+    <p:spTree>
+      <p:nvGrpSpPr>
+        <p:cNvPr id="1" name="">
+          <a:extLst>
+            <a:ext uri="{FF2B5EF4-FFF2-40B4-BE49-F238E27FC236}">
+              <a16:creationId xmlns:a16="http://schemas.microsoft.com/office/drawing/2014/main" id="{E0A4559C-A58F-F6D6-7BAE-069CC3C914CA}"/>
+            </a:ext>
+          </a:extLst>
+        </p:cNvPr>
+        <p:cNvGrpSpPr/>
+        <p:nvPr/>
+      </p:nvGrpSpPr>
+      <p:grpSpPr>
+        <a:xfrm>
+          <a:off x="0" y="0"/>
+          <a:ext cx="0" cy="0"/>
+          <a:chOff x="0" y="0"/>
+          <a:chExt cx="0" cy="0"/>
+        </a:xfrm>
+      </p:grpSpPr>
+      <p:sp>
+        <p:nvSpPr>
+          <p:cNvPr id="2" name="Slide Image Placeholder 1">
+            <a:extLst>
+              <a:ext uri="{FF2B5EF4-FFF2-40B4-BE49-F238E27FC236}">
+                <a16:creationId xmlns:a16="http://schemas.microsoft.com/office/drawing/2014/main" id="{5373811E-6D3F-EF6A-9370-56C0540D4804}"/>
+              </a:ext>
+            </a:extLst>
+          </p:cNvPr>
+          <p:cNvSpPr>
+            <a:spLocks noGrp="1" noRot="1" noChangeAspect="1"/>
+          </p:cNvSpPr>
+          <p:nvPr>
+            <p:ph type="sldImg"/>
+          </p:nvPr>
+        </p:nvSpPr>
+        <p:spPr/>
+      </p:sp>
+      <p:sp>
+        <p:nvSpPr>
+          <p:cNvPr id="3" name="Notes Placeholder 2">
+            <a:extLst>
+              <a:ext uri="{FF2B5EF4-FFF2-40B4-BE49-F238E27FC236}">
+                <a16:creationId xmlns:a16="http://schemas.microsoft.com/office/drawing/2014/main" id="{15E39EAB-C54D-D070-7CF9-41D9BFA83840}"/>
+              </a:ext>
+            </a:extLst>
+          </p:cNvPr>
+          <p:cNvSpPr>
+            <a:spLocks noGrp="1"/>
+          </p:cNvSpPr>
+          <p:nvPr>
+            <p:ph type="body" idx="1"/>
+          </p:nvPr>
+        </p:nvSpPr>
+        <p:spPr/>
+        <p:txBody>
+          <a:bodyPr/>
+          <a:lstStyle/>
+          <a:p>
+            <a:endParaRPr lang="LID4096" dirty="0"/>
+          </a:p>
+        </p:txBody>
+      </p:sp>
+      <p:sp>
+        <p:nvSpPr>
+          <p:cNvPr id="4" name="Slide Number Placeholder 3">
+            <a:extLst>
+              <a:ext uri="{FF2B5EF4-FFF2-40B4-BE49-F238E27FC236}">
+                <a16:creationId xmlns:a16="http://schemas.microsoft.com/office/drawing/2014/main" id="{E9D4CCBB-E48D-D7A5-1925-78A342D81AF9}"/>
+              </a:ext>
+            </a:extLst>
+          </p:cNvPr>
+          <p:cNvSpPr>
+            <a:spLocks noGrp="1"/>
+          </p:cNvSpPr>
+          <p:nvPr>
+            <p:ph type="sldNum" sz="quarter" idx="5"/>
+          </p:nvPr>
+        </p:nvSpPr>
+        <p:spPr/>
+        <p:txBody>
+          <a:bodyPr/>
+          <a:lstStyle/>
+          <a:p>
+            <a:fld id="{8BFF5565-A286-40EC-9626-D8188B2D2F64}" type="slidenum">
+              <a:rPr lang="LID4096" smtClean="0"/>
+              <a:t>8</a:t>
+            </a:fld>
+            <a:endParaRPr lang="LID4096"/>
+          </a:p>
+        </p:txBody>
+      </p:sp>
+    </p:spTree>
+    <p:extLst>
+      <p:ext uri="{BB962C8B-B14F-4D97-AF65-F5344CB8AC3E}">
+        <p14:creationId xmlns:p14="http://schemas.microsoft.com/office/powerpoint/2010/main" val="858137791"/>
+      </p:ext>
+    </p:extLst>
+  </p:cSld>
+  <p:clrMapOvr>
+    <a:masterClrMapping/>
+  </p:clrMapOvr>
+</p:notes>
+</file>
+
+<file path=ppt/notesSlides/notesSlide7.xml><?xml version="1.0" encoding="utf-8"?>
+<p:notes xmlns:a="http://schemas.openxmlformats.org/drawingml/2006/main" xmlns:r="http://schemas.openxmlformats.org/officeDocument/2006/relationships" xmlns:p="http://schemas.openxmlformats.org/presentationml/2006/main">
+  <p:cSld>
+    <p:spTree>
+      <p:nvGrpSpPr>
+        <p:cNvPr id="1" name="">
+          <a:extLst>
+            <a:ext uri="{FF2B5EF4-FFF2-40B4-BE49-F238E27FC236}">
+              <a16:creationId xmlns:a16="http://schemas.microsoft.com/office/drawing/2014/main" id="{BA3FA11C-31C6-17C4-BC85-03ADC6EA5EFC}"/>
+            </a:ext>
+          </a:extLst>
+        </p:cNvPr>
+        <p:cNvGrpSpPr/>
+        <p:nvPr/>
+      </p:nvGrpSpPr>
+      <p:grpSpPr>
+        <a:xfrm>
+          <a:off x="0" y="0"/>
+          <a:ext cx="0" cy="0"/>
+          <a:chOff x="0" y="0"/>
+          <a:chExt cx="0" cy="0"/>
+        </a:xfrm>
+      </p:grpSpPr>
+      <p:sp>
+        <p:nvSpPr>
+          <p:cNvPr id="2" name="Slide Image Placeholder 1">
+            <a:extLst>
+              <a:ext uri="{FF2B5EF4-FFF2-40B4-BE49-F238E27FC236}">
+                <a16:creationId xmlns:a16="http://schemas.microsoft.com/office/drawing/2014/main" id="{94BF9A76-3485-B7B2-B618-BBA81F2EB9BB}"/>
+              </a:ext>
+            </a:extLst>
+          </p:cNvPr>
+          <p:cNvSpPr>
+            <a:spLocks noGrp="1" noRot="1" noChangeAspect="1"/>
+          </p:cNvSpPr>
+          <p:nvPr>
+            <p:ph type="sldImg"/>
+          </p:nvPr>
+        </p:nvSpPr>
+        <p:spPr/>
+      </p:sp>
+      <p:sp>
+        <p:nvSpPr>
+          <p:cNvPr id="3" name="Notes Placeholder 2">
+            <a:extLst>
+              <a:ext uri="{FF2B5EF4-FFF2-40B4-BE49-F238E27FC236}">
+                <a16:creationId xmlns:a16="http://schemas.microsoft.com/office/drawing/2014/main" id="{CEB771AB-0957-586E-61F8-B41A2A089374}"/>
+              </a:ext>
+            </a:extLst>
+          </p:cNvPr>
+          <p:cNvSpPr>
+            <a:spLocks noGrp="1"/>
+          </p:cNvSpPr>
+          <p:nvPr>
+            <p:ph type="body" idx="1"/>
+          </p:nvPr>
+        </p:nvSpPr>
+        <p:spPr/>
+        <p:txBody>
+          <a:bodyPr/>
+          <a:lstStyle/>
+          <a:p>
+            <a:endParaRPr lang="LID4096" dirty="0"/>
+          </a:p>
+        </p:txBody>
+      </p:sp>
+      <p:sp>
+        <p:nvSpPr>
+          <p:cNvPr id="4" name="Slide Number Placeholder 3">
+            <a:extLst>
+              <a:ext uri="{FF2B5EF4-FFF2-40B4-BE49-F238E27FC236}">
+                <a16:creationId xmlns:a16="http://schemas.microsoft.com/office/drawing/2014/main" id="{60161F13-F33C-7C07-9459-6E01DC6857F7}"/>
+              </a:ext>
+            </a:extLst>
+          </p:cNvPr>
+          <p:cNvSpPr>
+            <a:spLocks noGrp="1"/>
+          </p:cNvSpPr>
+          <p:nvPr>
+            <p:ph type="sldNum" sz="quarter" idx="5"/>
+          </p:nvPr>
+        </p:nvSpPr>
+        <p:spPr/>
+        <p:txBody>
+          <a:bodyPr/>
+          <a:lstStyle/>
+          <a:p>
+            <a:fld id="{8BFF5565-A286-40EC-9626-D8188B2D2F64}" type="slidenum">
+              <a:rPr lang="LID4096" smtClean="0"/>
+              <a:t>9</a:t>
+            </a:fld>
+            <a:endParaRPr lang="LID4096"/>
+          </a:p>
+        </p:txBody>
+      </p:sp>
+    </p:spTree>
+    <p:extLst>
+      <p:ext uri="{BB962C8B-B14F-4D97-AF65-F5344CB8AC3E}">
+        <p14:creationId xmlns:p14="http://schemas.microsoft.com/office/powerpoint/2010/main" val="2771817627"/>
+      </p:ext>
+    </p:extLst>
+  </p:cSld>
+  <p:clrMapOvr>
+    <a:masterClrMapping/>
+  </p:clrMapOvr>
+</p:notes>
+</file>
+
+<file path=ppt/notesSlides/notesSlide8.xml><?xml version="1.0" encoding="utf-8"?>
+<p:notes xmlns:a="http://schemas.openxmlformats.org/drawingml/2006/main" xmlns:r="http://schemas.openxmlformats.org/officeDocument/2006/relationships" xmlns:p="http://schemas.openxmlformats.org/presentationml/2006/main">
+  <p:cSld>
+    <p:spTree>
+      <p:nvGrpSpPr>
+        <p:cNvPr id="1" name="">
+          <a:extLst>
+            <a:ext uri="{FF2B5EF4-FFF2-40B4-BE49-F238E27FC236}">
+              <a16:creationId xmlns:a16="http://schemas.microsoft.com/office/drawing/2014/main" id="{EDFBD24B-0E63-42AC-A3C1-EA909DC5E62C}"/>
+            </a:ext>
+          </a:extLst>
+        </p:cNvPr>
+        <p:cNvGrpSpPr/>
+        <p:nvPr/>
+      </p:nvGrpSpPr>
+      <p:grpSpPr>
+        <a:xfrm>
+          <a:off x="0" y="0"/>
+          <a:ext cx="0" cy="0"/>
+          <a:chOff x="0" y="0"/>
+          <a:chExt cx="0" cy="0"/>
+        </a:xfrm>
+      </p:grpSpPr>
+      <p:sp>
+        <p:nvSpPr>
+          <p:cNvPr id="2" name="Slide Image Placeholder 1">
+            <a:extLst>
+              <a:ext uri="{FF2B5EF4-FFF2-40B4-BE49-F238E27FC236}">
+                <a16:creationId xmlns:a16="http://schemas.microsoft.com/office/drawing/2014/main" id="{93CA5F04-12A1-9E17-2606-D05EADC50843}"/>
+              </a:ext>
+            </a:extLst>
+          </p:cNvPr>
+          <p:cNvSpPr>
+            <a:spLocks noGrp="1" noRot="1" noChangeAspect="1"/>
+          </p:cNvSpPr>
+          <p:nvPr>
+            <p:ph type="sldImg"/>
+          </p:nvPr>
+        </p:nvSpPr>
+        <p:spPr/>
+      </p:sp>
+      <p:sp>
+        <p:nvSpPr>
+          <p:cNvPr id="3" name="Notes Placeholder 2">
+            <a:extLst>
+              <a:ext uri="{FF2B5EF4-FFF2-40B4-BE49-F238E27FC236}">
+                <a16:creationId xmlns:a16="http://schemas.microsoft.com/office/drawing/2014/main" id="{1274346E-C4AC-D2C7-1FFB-62EFA8BA4D05}"/>
+              </a:ext>
+            </a:extLst>
+          </p:cNvPr>
+          <p:cNvSpPr>
+            <a:spLocks noGrp="1"/>
+          </p:cNvSpPr>
+          <p:nvPr>
+            <p:ph type="body" idx="1"/>
+          </p:nvPr>
+        </p:nvSpPr>
+        <p:spPr/>
+        <p:txBody>
+          <a:bodyPr/>
+          <a:lstStyle/>
+          <a:p>
+            <a:endParaRPr lang="LID4096" dirty="0"/>
+          </a:p>
+        </p:txBody>
+      </p:sp>
+      <p:sp>
+        <p:nvSpPr>
+          <p:cNvPr id="4" name="Slide Number Placeholder 3">
+            <a:extLst>
+              <a:ext uri="{FF2B5EF4-FFF2-40B4-BE49-F238E27FC236}">
+                <a16:creationId xmlns:a16="http://schemas.microsoft.com/office/drawing/2014/main" id="{516681CE-1853-A83E-BAF5-FE8F02147285}"/>
+              </a:ext>
+            </a:extLst>
+          </p:cNvPr>
+          <p:cNvSpPr>
+            <a:spLocks noGrp="1"/>
+          </p:cNvSpPr>
+          <p:nvPr>
+            <p:ph type="sldNum" sz="quarter" idx="5"/>
+          </p:nvPr>
+        </p:nvSpPr>
+        <p:spPr/>
+        <p:txBody>
+          <a:bodyPr/>
+          <a:lstStyle/>
+          <a:p>
+            <a:fld id="{8BFF5565-A286-40EC-9626-D8188B2D2F64}" type="slidenum">
+              <a:rPr lang="LID4096" smtClean="0"/>
+              <a:t>10</a:t>
+            </a:fld>
+            <a:endParaRPr lang="LID4096"/>
+          </a:p>
+        </p:txBody>
+      </p:sp>
+    </p:spTree>
+    <p:extLst>
+      <p:ext uri="{BB962C8B-B14F-4D97-AF65-F5344CB8AC3E}">
+        <p14:creationId xmlns:p14="http://schemas.microsoft.com/office/powerpoint/2010/main" val="4128246927"/>
       </p:ext>
     </p:extLst>
   </p:cSld>
@@ -3802,7 +4566,12 @@
             <p:ph type="ctrTitle"/>
           </p:nvPr>
         </p:nvSpPr>
-        <p:spPr/>
+        <p:spPr>
+          <a:xfrm>
+            <a:off x="1524000" y="576263"/>
+            <a:ext cx="9144000" cy="2387600"/>
+          </a:xfrm>
+        </p:spPr>
         <p:txBody>
           <a:bodyPr/>
           <a:lstStyle/>
@@ -3831,7 +4600,12 @@
             <p:ph type="subTitle" idx="1"/>
           </p:nvPr>
         </p:nvSpPr>
-        <p:spPr/>
+        <p:spPr>
+          <a:xfrm>
+            <a:off x="1524000" y="3055938"/>
+            <a:ext cx="9144000" cy="1655762"/>
+          </a:xfrm>
+        </p:spPr>
         <p:txBody>
           <a:bodyPr/>
           <a:lstStyle/>
@@ -3841,6 +4615,50 @@
               <a:t>Moritz Sölderer</a:t>
             </a:r>
             <a:endParaRPr lang="LID4096" dirty="0"/>
+          </a:p>
+        </p:txBody>
+      </p:sp>
+      <p:sp>
+        <p:nvSpPr>
+          <p:cNvPr id="4" name="Rectangle 3">
+            <a:extLst>
+              <a:ext uri="{FF2B5EF4-FFF2-40B4-BE49-F238E27FC236}">
+                <a16:creationId xmlns:a16="http://schemas.microsoft.com/office/drawing/2014/main" id="{50981B88-C074-CC12-B560-6A09772431D5}"/>
+              </a:ext>
+            </a:extLst>
+          </p:cNvPr>
+          <p:cNvSpPr/>
+          <p:nvPr/>
+        </p:nvSpPr>
+        <p:spPr>
+          <a:xfrm>
+            <a:off x="-292608" y="4187952"/>
+            <a:ext cx="12691872" cy="2852928"/>
+          </a:xfrm>
+          <a:prstGeom prst="rect">
+            <a:avLst/>
+          </a:prstGeom>
+        </p:spPr>
+        <p:style>
+          <a:lnRef idx="3">
+            <a:schemeClr val="lt1"/>
+          </a:lnRef>
+          <a:fillRef idx="1">
+            <a:schemeClr val="accent4"/>
+          </a:fillRef>
+          <a:effectRef idx="1">
+            <a:schemeClr val="accent4"/>
+          </a:effectRef>
+          <a:fontRef idx="minor">
+            <a:schemeClr val="lt1"/>
+          </a:fontRef>
+        </p:style>
+        <p:txBody>
+          <a:bodyPr rtlCol="0" anchor="ctr"/>
+          <a:lstStyle/>
+          <a:p>
+            <a:pPr algn="ctr"/>
+            <a:endParaRPr lang="en-US"/>
           </a:p>
         </p:txBody>
       </p:sp>
@@ -3857,12 +4675,18 @@
 </p:sld>
 </file>
 
-<file path=ppt/slides/slide2.xml><?xml version="1.0" encoding="utf-8"?>
+<file path=ppt/slides/slide10.xml><?xml version="1.0" encoding="utf-8"?>
 <p:sld xmlns:a="http://schemas.openxmlformats.org/drawingml/2006/main" xmlns:r="http://schemas.openxmlformats.org/officeDocument/2006/relationships" xmlns:p="http://schemas.openxmlformats.org/presentationml/2006/main">
   <p:cSld>
     <p:spTree>
       <p:nvGrpSpPr>
-        <p:cNvPr id="1" name=""/>
+        <p:cNvPr id="1" name="">
+          <a:extLst>
+            <a:ext uri="{FF2B5EF4-FFF2-40B4-BE49-F238E27FC236}">
+              <a16:creationId xmlns:a16="http://schemas.microsoft.com/office/drawing/2014/main" id="{EF3F55F3-6348-CF65-7A92-0222902A0EAD}"/>
+            </a:ext>
+          </a:extLst>
+        </p:cNvPr>
         <p:cNvGrpSpPr/>
         <p:nvPr/>
       </p:nvGrpSpPr>
@@ -3874,74 +4698,12 @@
           <a:chExt cx="0" cy="0"/>
         </a:xfrm>
       </p:grpSpPr>
-      <p:pic>
-        <p:nvPicPr>
-          <p:cNvPr id="3" name="Picture 2">
-            <a:extLst>
-              <a:ext uri="{FF2B5EF4-FFF2-40B4-BE49-F238E27FC236}">
-                <a16:creationId xmlns:a16="http://schemas.microsoft.com/office/drawing/2014/main" id="{0F85EAA0-63CC-BC3F-4CE3-D4ABBCF7234C}"/>
-              </a:ext>
-            </a:extLst>
-          </p:cNvPr>
-          <p:cNvPicPr>
-            <a:picLocks noChangeAspect="1"/>
-          </p:cNvPicPr>
-          <p:nvPr/>
-        </p:nvPicPr>
-        <p:blipFill>
-          <a:blip r:embed="rId3"/>
-          <a:srcRect t="728" b="50000"/>
-          <a:stretch>
-            <a:fillRect/>
-          </a:stretch>
-        </p:blipFill>
-        <p:spPr>
-          <a:xfrm>
-            <a:off x="472696" y="1550783"/>
-            <a:ext cx="5552790" cy="4377520"/>
-          </a:xfrm>
-          <a:prstGeom prst="rect">
-            <a:avLst/>
-          </a:prstGeom>
-        </p:spPr>
-      </p:pic>
-      <p:pic>
-        <p:nvPicPr>
-          <p:cNvPr id="5" name="Picture 4">
-            <a:extLst>
-              <a:ext uri="{FF2B5EF4-FFF2-40B4-BE49-F238E27FC236}">
-                <a16:creationId xmlns:a16="http://schemas.microsoft.com/office/drawing/2014/main" id="{AA2A3569-7D69-E849-0CCA-AE6B5E727FC0}"/>
-              </a:ext>
-            </a:extLst>
-          </p:cNvPr>
-          <p:cNvPicPr>
-            <a:picLocks noChangeAspect="1"/>
-          </p:cNvPicPr>
-          <p:nvPr/>
-        </p:nvPicPr>
-        <p:blipFill>
-          <a:blip r:embed="rId3"/>
-          <a:srcRect t="50000"/>
-          <a:stretch>
-            <a:fillRect/>
-          </a:stretch>
-        </p:blipFill>
-        <p:spPr>
-          <a:xfrm>
-            <a:off x="6096000" y="1518427"/>
-            <a:ext cx="5552790" cy="4442233"/>
-          </a:xfrm>
-          <a:prstGeom prst="rect">
-            <a:avLst/>
-          </a:prstGeom>
-        </p:spPr>
-      </p:pic>
-      <p:sp>
-        <p:nvSpPr>
-          <p:cNvPr id="6" name="Title 1">
-            <a:extLst>
-              <a:ext uri="{FF2B5EF4-FFF2-40B4-BE49-F238E27FC236}">
-                <a16:creationId xmlns:a16="http://schemas.microsoft.com/office/drawing/2014/main" id="{40AB8EFA-0B47-B1CF-3B5F-4152BF5C50C0}"/>
+      <p:sp>
+        <p:nvSpPr>
+          <p:cNvPr id="9" name="Title 1">
+            <a:extLst>
+              <a:ext uri="{FF2B5EF4-FFF2-40B4-BE49-F238E27FC236}">
+                <a16:creationId xmlns:a16="http://schemas.microsoft.com/office/drawing/2014/main" id="{C2FD9D67-FD31-851C-DA00-C9B59EB00D45}"/>
               </a:ext>
             </a:extLst>
           </p:cNvPr>
@@ -3952,8 +4714,8 @@
         </p:nvSpPr>
         <p:spPr>
           <a:xfrm>
-            <a:off x="838200" y="365125"/>
-            <a:ext cx="10515600" cy="1325563"/>
+            <a:off x="472696" y="266915"/>
+            <a:ext cx="10515600" cy="535803"/>
           </a:xfrm>
           <a:prstGeom prst="rect">
             <a:avLst/>
@@ -3982,25 +4744,465 @@
           </a:lstStyle>
           <a:p>
             <a:r>
+              <a:rPr lang="de-DE" sz="3200" dirty="0"/>
+              <a:t>Response Misreporting</a:t>
+            </a:r>
+            <a:endParaRPr lang="LID4096" sz="3200" dirty="0"/>
+          </a:p>
+        </p:txBody>
+      </p:sp>
+      <p:sp>
+        <p:nvSpPr>
+          <p:cNvPr id="10" name="TextBox 9">
+            <a:extLst>
+              <a:ext uri="{FF2B5EF4-FFF2-40B4-BE49-F238E27FC236}">
+                <a16:creationId xmlns:a16="http://schemas.microsoft.com/office/drawing/2014/main" id="{D9762FA6-367F-A70D-E6D3-C4AABE2FFDCE}"/>
+              </a:ext>
+            </a:extLst>
+          </p:cNvPr>
+          <p:cNvSpPr txBox="1"/>
+          <p:nvPr/>
+        </p:nvSpPr>
+        <p:spPr>
+          <a:xfrm>
+            <a:off x="472696" y="5611175"/>
+            <a:ext cx="4078364" cy="369332"/>
+          </a:xfrm>
+          <a:prstGeom prst="rect">
+            <a:avLst/>
+          </a:prstGeom>
+          <a:noFill/>
+        </p:spPr>
+        <p:txBody>
+          <a:bodyPr wrap="square" rtlCol="0">
+            <a:spAutoFit/>
+          </a:bodyPr>
+          <a:lstStyle/>
+          <a:p>
+            <a:pPr marL="285750" indent="-285750">
+              <a:buFont typeface="Arial" panose="020B0604020202020204" pitchFamily="34" charset="0"/>
+              <a:buChar char="•"/>
+            </a:pPr>
+            <a:r>
               <a:rPr lang="de-DE" dirty="0"/>
-              <a:t>Communication </a:t>
-            </a:r>
-            <a:r>
-              <a:rPr lang="de-DE" dirty="0" err="1"/>
-              <a:t>Failure</a:t>
-            </a:r>
+              <a:t>IDP: very strange results for DRIVE</a:t>
+            </a:r>
+            <a:endParaRPr lang="en-US" dirty="0"/>
+          </a:p>
+        </p:txBody>
+      </p:sp>
+      <p:sp>
+        <p:nvSpPr>
+          <p:cNvPr id="11" name="TextBox 10">
+            <a:extLst>
+              <a:ext uri="{FF2B5EF4-FFF2-40B4-BE49-F238E27FC236}">
+                <a16:creationId xmlns:a16="http://schemas.microsoft.com/office/drawing/2014/main" id="{EBC62919-2E23-A8F6-469A-25BBCDD80E10}"/>
+              </a:ext>
+            </a:extLst>
+          </p:cNvPr>
+          <p:cNvSpPr txBox="1"/>
+          <p:nvPr/>
+        </p:nvSpPr>
+        <p:spPr>
+          <a:xfrm>
+            <a:off x="6325973" y="5611175"/>
+            <a:ext cx="5393331" cy="369332"/>
+          </a:xfrm>
+          <a:prstGeom prst="rect">
+            <a:avLst/>
+          </a:prstGeom>
+          <a:noFill/>
+        </p:spPr>
+        <p:txBody>
+          <a:bodyPr wrap="square" rtlCol="0">
+            <a:spAutoFit/>
+          </a:bodyPr>
+          <a:lstStyle/>
+          <a:p>
+            <a:pPr marL="285750" indent="-285750">
+              <a:buFont typeface="Arial" panose="020B0604020202020204" pitchFamily="34" charset="0"/>
+              <a:buChar char="•"/>
+            </a:pPr>
             <a:r>
               <a:rPr lang="de-DE" dirty="0"/>
-              <a:t> (10% Prob.)</a:t>
-            </a:r>
-            <a:endParaRPr lang="LID4096" dirty="0"/>
-          </a:p>
-        </p:txBody>
-      </p:sp>
+              <a:t>Harvest: takes very long</a:t>
+            </a:r>
+            <a:endParaRPr lang="en-US" dirty="0"/>
+          </a:p>
+        </p:txBody>
+      </p:sp>
+      <p:pic>
+        <p:nvPicPr>
+          <p:cNvPr id="3" name="Picture 2">
+            <a:extLst>
+              <a:ext uri="{FF2B5EF4-FFF2-40B4-BE49-F238E27FC236}">
+                <a16:creationId xmlns:a16="http://schemas.microsoft.com/office/drawing/2014/main" id="{FE546D98-0380-0251-C65E-E25A4AC575E9}"/>
+              </a:ext>
+            </a:extLst>
+          </p:cNvPr>
+          <p:cNvPicPr>
+            <a:picLocks noChangeAspect="1"/>
+          </p:cNvPicPr>
+          <p:nvPr/>
+        </p:nvPicPr>
+        <p:blipFill>
+          <a:blip r:embed="rId3"/>
+          <a:srcRect t="5577"/>
+          <a:stretch>
+            <a:fillRect/>
+          </a:stretch>
+        </p:blipFill>
+        <p:spPr>
+          <a:xfrm>
+            <a:off x="129594" y="1544123"/>
+            <a:ext cx="5841492" cy="3677137"/>
+          </a:xfrm>
+          <a:prstGeom prst="rect">
+            <a:avLst/>
+          </a:prstGeom>
+        </p:spPr>
+      </p:pic>
+      <p:pic>
+        <p:nvPicPr>
+          <p:cNvPr id="5" name="Picture 4">
+            <a:extLst>
+              <a:ext uri="{FF2B5EF4-FFF2-40B4-BE49-F238E27FC236}">
+                <a16:creationId xmlns:a16="http://schemas.microsoft.com/office/drawing/2014/main" id="{C03D986C-21B2-E27C-7702-5C479CA14E07}"/>
+              </a:ext>
+            </a:extLst>
+          </p:cNvPr>
+          <p:cNvPicPr>
+            <a:picLocks noChangeAspect="1"/>
+          </p:cNvPicPr>
+          <p:nvPr/>
+        </p:nvPicPr>
+        <p:blipFill>
+          <a:blip r:embed="rId4"/>
+          <a:srcRect t="51296"/>
+          <a:stretch>
+            <a:fillRect/>
+          </a:stretch>
+        </p:blipFill>
+        <p:spPr>
+          <a:xfrm>
+            <a:off x="5971086" y="1544122"/>
+            <a:ext cx="5662511" cy="3677137"/>
+          </a:xfrm>
+          <a:prstGeom prst="rect">
+            <a:avLst/>
+          </a:prstGeom>
+        </p:spPr>
+      </p:pic>
     </p:spTree>
     <p:extLst>
       <p:ext uri="{BB962C8B-B14F-4D97-AF65-F5344CB8AC3E}">
-        <p14:creationId xmlns:p14="http://schemas.microsoft.com/office/powerpoint/2010/main" val="2004776518"/>
+        <p14:creationId xmlns:p14="http://schemas.microsoft.com/office/powerpoint/2010/main" val="4255632995"/>
+      </p:ext>
+    </p:extLst>
+  </p:cSld>
+  <p:clrMapOvr>
+    <a:masterClrMapping/>
+  </p:clrMapOvr>
+</p:sld>
+</file>
+
+<file path=ppt/slides/slide11.xml><?xml version="1.0" encoding="utf-8"?>
+<p:sld xmlns:a="http://schemas.openxmlformats.org/drawingml/2006/main" xmlns:r="http://schemas.openxmlformats.org/officeDocument/2006/relationships" xmlns:p="http://schemas.openxmlformats.org/presentationml/2006/main">
+  <p:cSld>
+    <p:spTree>
+      <p:nvGrpSpPr>
+        <p:cNvPr id="1" name=""/>
+        <p:cNvGrpSpPr/>
+        <p:nvPr/>
+      </p:nvGrpSpPr>
+      <p:grpSpPr>
+        <a:xfrm>
+          <a:off x="0" y="0"/>
+          <a:ext cx="0" cy="0"/>
+          <a:chOff x="0" y="0"/>
+          <a:chExt cx="0" cy="0"/>
+        </a:xfrm>
+      </p:grpSpPr>
+      <p:sp>
+        <p:nvSpPr>
+          <p:cNvPr id="2" name="Title 1">
+            <a:extLst>
+              <a:ext uri="{FF2B5EF4-FFF2-40B4-BE49-F238E27FC236}">
+                <a16:creationId xmlns:a16="http://schemas.microsoft.com/office/drawing/2014/main" id="{721D0668-2854-5F9B-ACD7-7D18664055C6}"/>
+              </a:ext>
+            </a:extLst>
+          </p:cNvPr>
+          <p:cNvSpPr>
+            <a:spLocks noGrp="1"/>
+          </p:cNvSpPr>
+          <p:nvPr>
+            <p:ph type="title"/>
+          </p:nvPr>
+        </p:nvSpPr>
+        <p:spPr/>
+        <p:txBody>
+          <a:bodyPr/>
+          <a:lstStyle/>
+          <a:p>
+            <a:r>
+              <a:rPr lang="de-DE" dirty="0"/>
+              <a:t>Additional Environments (</a:t>
+            </a:r>
+            <a:r>
+              <a:rPr lang="de-DE" dirty="0" err="1"/>
+              <a:t>Thoughts</a:t>
+            </a:r>
+            <a:r>
+              <a:rPr lang="de-DE" dirty="0"/>
+              <a:t>):</a:t>
+            </a:r>
+            <a:endParaRPr lang="LID4096" dirty="0"/>
+          </a:p>
+        </p:txBody>
+      </p:sp>
+      <p:sp>
+        <p:nvSpPr>
+          <p:cNvPr id="4" name="TextBox 3">
+            <a:extLst>
+              <a:ext uri="{FF2B5EF4-FFF2-40B4-BE49-F238E27FC236}">
+                <a16:creationId xmlns:a16="http://schemas.microsoft.com/office/drawing/2014/main" id="{EB821E0E-FEE5-332B-64CF-E86EFCAFDE99}"/>
+              </a:ext>
+            </a:extLst>
+          </p:cNvPr>
+          <p:cNvSpPr txBox="1"/>
+          <p:nvPr/>
+        </p:nvSpPr>
+        <p:spPr>
+          <a:xfrm>
+            <a:off x="838200" y="2028597"/>
+            <a:ext cx="6096866" cy="923330"/>
+          </a:xfrm>
+          <a:prstGeom prst="rect">
+            <a:avLst/>
+          </a:prstGeom>
+          <a:noFill/>
+        </p:spPr>
+        <p:txBody>
+          <a:bodyPr wrap="square">
+            <a:spAutoFit/>
+          </a:bodyPr>
+          <a:lstStyle/>
+          <a:p>
+            <a:pPr marL="285750" indent="-285750">
+              <a:buFont typeface="Arial" panose="020B0604020202020204" pitchFamily="34" charset="0"/>
+              <a:buChar char="•"/>
+            </a:pPr>
+            <a:r>
+              <a:rPr lang="en-GB" dirty="0"/>
+              <a:t>Hanabi (2 or 3 players)</a:t>
+            </a:r>
+            <a:br>
+              <a:rPr lang="en-GB" dirty="0"/>
+            </a:br>
+            <a:r>
+              <a:rPr lang="en-GB" dirty="0"/>
+              <a:t>used by Google </a:t>
+            </a:r>
+            <a:r>
+              <a:rPr lang="en-GB" dirty="0" err="1"/>
+              <a:t>Deepmind</a:t>
+            </a:r>
+            <a:r>
+              <a:rPr lang="en-GB" dirty="0"/>
+              <a:t> [</a:t>
+            </a:r>
+            <a:r>
+              <a:rPr lang="en-GB" dirty="0">
+                <a:hlinkClick r:id="rId2"/>
+              </a:rPr>
+              <a:t>Google </a:t>
+            </a:r>
+            <a:r>
+              <a:rPr lang="en-GB" dirty="0" err="1">
+                <a:hlinkClick r:id="rId2"/>
+              </a:rPr>
+              <a:t>Deepmind|Hanabi</a:t>
+            </a:r>
+            <a:r>
+              <a:rPr lang="en-GB" dirty="0"/>
+              <a:t>]</a:t>
+            </a:r>
+          </a:p>
+          <a:p>
+            <a:pPr marL="285750" indent="-285750">
+              <a:buFont typeface="Arial" panose="020B0604020202020204" pitchFamily="34" charset="0"/>
+              <a:buChar char="•"/>
+            </a:pPr>
+            <a:endParaRPr lang="LID4096" dirty="0"/>
+          </a:p>
+        </p:txBody>
+      </p:sp>
+      <p:pic>
+        <p:nvPicPr>
+          <p:cNvPr id="1026" name="Picture 2">
+            <a:extLst>
+              <a:ext uri="{FF2B5EF4-FFF2-40B4-BE49-F238E27FC236}">
+                <a16:creationId xmlns:a16="http://schemas.microsoft.com/office/drawing/2014/main" id="{2BF6F1C7-B38C-6C48-2495-0FCAEDD69DA2}"/>
+              </a:ext>
+            </a:extLst>
+          </p:cNvPr>
+          <p:cNvPicPr>
+            <a:picLocks noChangeAspect="1" noChangeArrowheads="1"/>
+          </p:cNvPicPr>
+          <p:nvPr/>
+        </p:nvPicPr>
+        <p:blipFill>
+          <a:blip r:embed="rId3">
+            <a:extLst>
+              <a:ext uri="{28A0092B-C50C-407E-A947-70E740481C1C}">
+                <a14:useLocalDpi xmlns:a14="http://schemas.microsoft.com/office/drawing/2010/main" val="0"/>
+              </a:ext>
+            </a:extLst>
+          </a:blip>
+          <a:srcRect/>
+          <a:stretch>
+            <a:fillRect/>
+          </a:stretch>
+        </p:blipFill>
+        <p:spPr bwMode="auto">
+          <a:xfrm>
+            <a:off x="7743825" y="1690688"/>
+            <a:ext cx="3609975" cy="2700261"/>
+          </a:xfrm>
+          <a:prstGeom prst="rect">
+            <a:avLst/>
+          </a:prstGeom>
+          <a:noFill/>
+          <a:extLst>
+            <a:ext uri="{909E8E84-426E-40DD-AFC4-6F175D3DCCD1}">
+              <a14:hiddenFill xmlns:a14="http://schemas.microsoft.com/office/drawing/2010/main">
+                <a:solidFill>
+                  <a:srgbClr val="FFFFFF"/>
+                </a:solidFill>
+              </a14:hiddenFill>
+            </a:ext>
+          </a:extLst>
+        </p:spPr>
+      </p:pic>
+    </p:spTree>
+    <p:extLst>
+      <p:ext uri="{BB962C8B-B14F-4D97-AF65-F5344CB8AC3E}">
+        <p14:creationId xmlns:p14="http://schemas.microsoft.com/office/powerpoint/2010/main" val="282873177"/>
+      </p:ext>
+    </p:extLst>
+  </p:cSld>
+  <p:clrMapOvr>
+    <a:masterClrMapping/>
+  </p:clrMapOvr>
+</p:sld>
+</file>
+
+<file path=ppt/slides/slide2.xml><?xml version="1.0" encoding="utf-8"?>
+<p:sld xmlns:a="http://schemas.openxmlformats.org/drawingml/2006/main" xmlns:r="http://schemas.openxmlformats.org/officeDocument/2006/relationships" xmlns:p="http://schemas.openxmlformats.org/presentationml/2006/main">
+  <p:cSld>
+    <p:spTree>
+      <p:nvGrpSpPr>
+        <p:cNvPr id="1" name="">
+          <a:extLst>
+            <a:ext uri="{FF2B5EF4-FFF2-40B4-BE49-F238E27FC236}">
+              <a16:creationId xmlns:a16="http://schemas.microsoft.com/office/drawing/2014/main" id="{CEFA1A63-CA62-928A-2FA3-EF845BBC8EE3}"/>
+            </a:ext>
+          </a:extLst>
+        </p:cNvPr>
+        <p:cNvGrpSpPr/>
+        <p:nvPr/>
+      </p:nvGrpSpPr>
+      <p:grpSpPr>
+        <a:xfrm>
+          <a:off x="0" y="0"/>
+          <a:ext cx="0" cy="0"/>
+          <a:chOff x="0" y="0"/>
+          <a:chExt cx="0" cy="0"/>
+        </a:xfrm>
+      </p:grpSpPr>
+      <p:sp>
+        <p:nvSpPr>
+          <p:cNvPr id="3" name="Subtitle 2">
+            <a:extLst>
+              <a:ext uri="{FF2B5EF4-FFF2-40B4-BE49-F238E27FC236}">
+                <a16:creationId xmlns:a16="http://schemas.microsoft.com/office/drawing/2014/main" id="{875DF9E6-B28D-5015-1A39-DCB5B5B237D2}"/>
+              </a:ext>
+            </a:extLst>
+          </p:cNvPr>
+          <p:cNvSpPr>
+            <a:spLocks noGrp="1"/>
+          </p:cNvSpPr>
+          <p:nvPr>
+            <p:ph type="subTitle" idx="1"/>
+          </p:nvPr>
+        </p:nvSpPr>
+        <p:spPr>
+          <a:xfrm>
+            <a:off x="0" y="3741738"/>
+            <a:ext cx="9144000" cy="446214"/>
+          </a:xfrm>
+        </p:spPr>
+        <p:txBody>
+          <a:bodyPr/>
+          <a:lstStyle/>
+          <a:p>
+            <a:pPr algn="l"/>
+            <a:r>
+              <a:rPr lang="de-DE" dirty="0"/>
+              <a:t>17.04.2026</a:t>
+            </a:r>
+            <a:endParaRPr lang="LID4096" dirty="0"/>
+          </a:p>
+        </p:txBody>
+      </p:sp>
+      <p:sp>
+        <p:nvSpPr>
+          <p:cNvPr id="4" name="Rectangle 3">
+            <a:extLst>
+              <a:ext uri="{FF2B5EF4-FFF2-40B4-BE49-F238E27FC236}">
+                <a16:creationId xmlns:a16="http://schemas.microsoft.com/office/drawing/2014/main" id="{7EA0A81D-5689-2068-0EA6-D46ABE9F558B}"/>
+              </a:ext>
+            </a:extLst>
+          </p:cNvPr>
+          <p:cNvSpPr/>
+          <p:nvPr/>
+        </p:nvSpPr>
+        <p:spPr>
+          <a:xfrm>
+            <a:off x="-292608" y="4187952"/>
+            <a:ext cx="12691872" cy="2852928"/>
+          </a:xfrm>
+          <a:prstGeom prst="rect">
+            <a:avLst/>
+          </a:prstGeom>
+        </p:spPr>
+        <p:style>
+          <a:lnRef idx="3">
+            <a:schemeClr val="lt1"/>
+          </a:lnRef>
+          <a:fillRef idx="1">
+            <a:schemeClr val="accent4"/>
+          </a:fillRef>
+          <a:effectRef idx="1">
+            <a:schemeClr val="accent4"/>
+          </a:effectRef>
+          <a:fontRef idx="minor">
+            <a:schemeClr val="lt1"/>
+          </a:fontRef>
+        </p:style>
+        <p:txBody>
+          <a:bodyPr rtlCol="0" anchor="ctr"/>
+          <a:lstStyle/>
+          <a:p>
+            <a:pPr algn="ctr"/>
+            <a:endParaRPr lang="en-US"/>
+          </a:p>
+        </p:txBody>
+      </p:sp>
+    </p:spTree>
+    <p:extLst>
+      <p:ext uri="{BB962C8B-B14F-4D97-AF65-F5344CB8AC3E}">
+        <p14:creationId xmlns:p14="http://schemas.microsoft.com/office/powerpoint/2010/main" val="3158784198"/>
       </p:ext>
     </p:extLst>
   </p:cSld>
@@ -4029,47 +5231,63 @@
       </p:grpSpPr>
       <p:sp>
         <p:nvSpPr>
-          <p:cNvPr id="2" name="Title 1">
-            <a:extLst>
-              <a:ext uri="{FF2B5EF4-FFF2-40B4-BE49-F238E27FC236}">
-                <a16:creationId xmlns:a16="http://schemas.microsoft.com/office/drawing/2014/main" id="{721D0668-2854-5F9B-ACD7-7D18664055C6}"/>
-              </a:ext>
-            </a:extLst>
-          </p:cNvPr>
-          <p:cNvSpPr>
-            <a:spLocks noGrp="1"/>
-          </p:cNvSpPr>
-          <p:nvPr>
-            <p:ph type="title"/>
-          </p:nvPr>
-        </p:nvSpPr>
-        <p:spPr/>
+          <p:cNvPr id="6" name="Title 1">
+            <a:extLst>
+              <a:ext uri="{FF2B5EF4-FFF2-40B4-BE49-F238E27FC236}">
+                <a16:creationId xmlns:a16="http://schemas.microsoft.com/office/drawing/2014/main" id="{40AB8EFA-0B47-B1CF-3B5F-4152BF5C50C0}"/>
+              </a:ext>
+            </a:extLst>
+          </p:cNvPr>
+          <p:cNvSpPr txBox="1">
+            <a:spLocks/>
+          </p:cNvSpPr>
+          <p:nvPr/>
+        </p:nvSpPr>
+        <p:spPr>
+          <a:xfrm>
+            <a:off x="472696" y="266915"/>
+            <a:ext cx="10515600" cy="535803"/>
+          </a:xfrm>
+          <a:prstGeom prst="rect">
+            <a:avLst/>
+          </a:prstGeom>
+        </p:spPr>
         <p:txBody>
           <a:bodyPr/>
-          <a:lstStyle/>
-          <a:p>
-            <a:r>
-              <a:rPr lang="de-DE" dirty="0"/>
-              <a:t>Additional Environments (</a:t>
-            </a:r>
-            <a:r>
-              <a:rPr lang="de-DE" dirty="0" err="1"/>
-              <a:t>Thoughts</a:t>
-            </a:r>
-            <a:r>
-              <a:rPr lang="de-DE" dirty="0"/>
-              <a:t>):</a:t>
-            </a:r>
-            <a:endParaRPr lang="LID4096" dirty="0"/>
-          </a:p>
-        </p:txBody>
-      </p:sp>
-      <p:sp>
-        <p:nvSpPr>
-          <p:cNvPr id="4" name="TextBox 3">
-            <a:extLst>
-              <a:ext uri="{FF2B5EF4-FFF2-40B4-BE49-F238E27FC236}">
-                <a16:creationId xmlns:a16="http://schemas.microsoft.com/office/drawing/2014/main" id="{EB821E0E-FEE5-332B-64CF-E86EFCAFDE99}"/>
+          <a:lstStyle>
+            <a:lvl1pPr algn="l" defTabSz="914400" rtl="0" eaLnBrk="1" latinLnBrk="0" hangingPunct="1">
+              <a:lnSpc>
+                <a:spcPct val="90000"/>
+              </a:lnSpc>
+              <a:spcBef>
+                <a:spcPct val="0"/>
+              </a:spcBef>
+              <a:buNone/>
+              <a:defRPr sz="4400" kern="1200">
+                <a:solidFill>
+                  <a:schemeClr val="tx1"/>
+                </a:solidFill>
+                <a:latin typeface="+mj-lt"/>
+                <a:ea typeface="+mj-ea"/>
+                <a:cs typeface="+mj-cs"/>
+              </a:defRPr>
+            </a:lvl1pPr>
+          </a:lstStyle>
+          <a:p>
+            <a:r>
+              <a:rPr lang="de-DE" sz="3200" dirty="0"/>
+              <a:t>Background on Peer Incentivation</a:t>
+            </a:r>
+            <a:endParaRPr lang="LID4096" sz="3200" dirty="0"/>
+          </a:p>
+        </p:txBody>
+      </p:sp>
+      <p:sp>
+        <p:nvSpPr>
+          <p:cNvPr id="7" name="TextBox 6">
+            <a:extLst>
+              <a:ext uri="{FF2B5EF4-FFF2-40B4-BE49-F238E27FC236}">
+                <a16:creationId xmlns:a16="http://schemas.microsoft.com/office/drawing/2014/main" id="{00E446DC-6AEC-3BB1-6210-3AE81906222D}"/>
               </a:ext>
             </a:extLst>
           </p:cNvPr>
@@ -4078,8 +5296,8 @@
         </p:nvSpPr>
         <p:spPr>
           <a:xfrm>
-            <a:off x="838200" y="2028597"/>
-            <a:ext cx="6096866" cy="923330"/>
+            <a:off x="472696" y="1159223"/>
+            <a:ext cx="9860968" cy="2129878"/>
           </a:xfrm>
           <a:prstGeom prst="rect">
             <a:avLst/>
@@ -4087,111 +5305,2892 @@
           <a:noFill/>
         </p:spPr>
         <p:txBody>
-          <a:bodyPr wrap="square">
+          <a:bodyPr wrap="square" rtlCol="0">
             <a:spAutoFit/>
           </a:bodyPr>
           <a:lstStyle/>
           <a:p>
             <a:pPr marL="285750" indent="-285750">
+              <a:lnSpc>
+                <a:spcPct val="150000"/>
+              </a:lnSpc>
               <a:buFont typeface="Arial" panose="020B0604020202020204" pitchFamily="34" charset="0"/>
               <a:buChar char="•"/>
             </a:pPr>
             <a:r>
-              <a:rPr lang="en-GB" dirty="0"/>
-              <a:t>Hanabi (2 or 3 players)</a:t>
-            </a:r>
-            <a:br>
-              <a:rPr lang="en-GB" dirty="0"/>
-            </a:br>
-            <a:r>
-              <a:rPr lang="en-GB" dirty="0"/>
-              <a:t>used by Google </a:t>
-            </a:r>
-            <a:r>
-              <a:rPr lang="en-GB" dirty="0" err="1"/>
-              <a:t>Deepmind</a:t>
-            </a:r>
-            <a:r>
-              <a:rPr lang="en-GB" dirty="0"/>
-              <a:t> [</a:t>
-            </a:r>
-            <a:r>
-              <a:rPr lang="en-GB" dirty="0">
-                <a:hlinkClick r:id="rId2"/>
-              </a:rPr>
-              <a:t>Google </a:t>
-            </a:r>
-            <a:r>
-              <a:rPr lang="en-GB" dirty="0" err="1">
-                <a:hlinkClick r:id="rId2"/>
-              </a:rPr>
-              <a:t>Deepmind|Hanabi</a:t>
-            </a:r>
-            <a:r>
-              <a:rPr lang="en-GB" dirty="0"/>
-              <a:t>]</a:t>
+              <a:rPr lang="de-DE" b="1" dirty="0"/>
+              <a:t>How to achieve Cooperation between Agents?</a:t>
             </a:r>
           </a:p>
           <a:p>
             <a:pPr marL="285750" indent="-285750">
+              <a:lnSpc>
+                <a:spcPct val="150000"/>
+              </a:lnSpc>
               <a:buFont typeface="Arial" panose="020B0604020202020204" pitchFamily="34" charset="0"/>
               <a:buChar char="•"/>
             </a:pPr>
-            <a:endParaRPr lang="LID4096" dirty="0"/>
-          </a:p>
-        </p:txBody>
-      </p:sp>
+            <a:r>
+              <a:rPr lang="de-DE" dirty="0"/>
+              <a:t>Joint Objective (Centralized)</a:t>
+            </a:r>
+          </a:p>
+          <a:p>
+            <a:pPr marL="285750" indent="-285750">
+              <a:lnSpc>
+                <a:spcPct val="150000"/>
+              </a:lnSpc>
+              <a:buFont typeface="Arial" panose="020B0604020202020204" pitchFamily="34" charset="0"/>
+              <a:buChar char="•"/>
+            </a:pPr>
+            <a:r>
+              <a:rPr lang="de-DE" dirty="0"/>
+              <a:t>Peer Incentivation (Decentralized)</a:t>
+            </a:r>
+          </a:p>
+          <a:p>
+            <a:pPr marL="285750" indent="-285750">
+              <a:lnSpc>
+                <a:spcPct val="150000"/>
+              </a:lnSpc>
+              <a:buFont typeface="Arial" panose="020B0604020202020204" pitchFamily="34" charset="0"/>
+              <a:buChar char="•"/>
+            </a:pPr>
+            <a:r>
+              <a:rPr lang="de-DE" dirty="0"/>
+              <a:t>MATE: fixed Token</a:t>
+            </a:r>
+          </a:p>
+          <a:p>
+            <a:pPr marL="285750" indent="-285750">
+              <a:lnSpc>
+                <a:spcPct val="150000"/>
+              </a:lnSpc>
+              <a:buFont typeface="Arial" panose="020B0604020202020204" pitchFamily="34" charset="0"/>
+              <a:buChar char="•"/>
+            </a:pPr>
+            <a:r>
+              <a:rPr lang="de-DE" dirty="0"/>
+              <a:t>DRIVE: Token dependent on Epoch-Average Rewards</a:t>
+            </a:r>
+            <a:endParaRPr lang="en-US" dirty="0"/>
+          </a:p>
+        </p:txBody>
+      </p:sp>
+      <p:grpSp>
+        <p:nvGrpSpPr>
+          <p:cNvPr id="30" name="Group 29">
+            <a:extLst>
+              <a:ext uri="{FF2B5EF4-FFF2-40B4-BE49-F238E27FC236}">
+                <a16:creationId xmlns:a16="http://schemas.microsoft.com/office/drawing/2014/main" id="{40258256-CEC9-4241-0BEE-E4AB5D0EC2EB}"/>
+              </a:ext>
+            </a:extLst>
+          </p:cNvPr>
+          <p:cNvGrpSpPr/>
+          <p:nvPr/>
+        </p:nvGrpSpPr>
+        <p:grpSpPr>
+          <a:xfrm>
+            <a:off x="863600" y="5241577"/>
+            <a:ext cx="3581400" cy="914400"/>
+            <a:chOff x="1028700" y="4394200"/>
+            <a:chExt cx="3581400" cy="914400"/>
+          </a:xfrm>
+        </p:grpSpPr>
+        <p:pic>
+          <p:nvPicPr>
+            <p:cNvPr id="26" name="Graphic 25" descr="User with solid fill">
+              <a:extLst>
+                <a:ext uri="{FF2B5EF4-FFF2-40B4-BE49-F238E27FC236}">
+                  <a16:creationId xmlns:a16="http://schemas.microsoft.com/office/drawing/2014/main" id="{9A4D661C-8D19-306A-3954-06D609A921D4}"/>
+                </a:ext>
+              </a:extLst>
+            </p:cNvPr>
+            <p:cNvPicPr>
+              <a:picLocks noChangeAspect="1"/>
+            </p:cNvPicPr>
+            <p:nvPr/>
+          </p:nvPicPr>
+          <p:blipFill>
+            <a:blip r:embed="rId3">
+              <a:extLst>
+                <a:ext uri="{96DAC541-7B7A-43D3-8B79-37D633B846F1}">
+                  <asvg:svgBlip xmlns:asvg="http://schemas.microsoft.com/office/drawing/2016/SVG/main" r:embed="rId4"/>
+                </a:ext>
+              </a:extLst>
+            </a:blip>
+            <a:stretch>
+              <a:fillRect/>
+            </a:stretch>
+          </p:blipFill>
+          <p:spPr>
+            <a:xfrm>
+              <a:off x="1028700" y="4394200"/>
+              <a:ext cx="914400" cy="914400"/>
+            </a:xfrm>
+            <a:prstGeom prst="rect">
+              <a:avLst/>
+            </a:prstGeom>
+          </p:spPr>
+        </p:pic>
+        <p:pic>
+          <p:nvPicPr>
+            <p:cNvPr id="27" name="Graphic 26" descr="User with solid fill">
+              <a:extLst>
+                <a:ext uri="{FF2B5EF4-FFF2-40B4-BE49-F238E27FC236}">
+                  <a16:creationId xmlns:a16="http://schemas.microsoft.com/office/drawing/2014/main" id="{A4EB28FF-51A8-DD48-9B2E-452DFC686A15}"/>
+                </a:ext>
+              </a:extLst>
+            </p:cNvPr>
+            <p:cNvPicPr>
+              <a:picLocks noChangeAspect="1"/>
+            </p:cNvPicPr>
+            <p:nvPr/>
+          </p:nvPicPr>
+          <p:blipFill>
+            <a:blip r:embed="rId3">
+              <a:extLst>
+                <a:ext uri="{96DAC541-7B7A-43D3-8B79-37D633B846F1}">
+                  <asvg:svgBlip xmlns:asvg="http://schemas.microsoft.com/office/drawing/2016/SVG/main" r:embed="rId4"/>
+                </a:ext>
+              </a:extLst>
+            </a:blip>
+            <a:stretch>
+              <a:fillRect/>
+            </a:stretch>
+          </p:blipFill>
+          <p:spPr>
+            <a:xfrm>
+              <a:off x="1905000" y="4394200"/>
+              <a:ext cx="914400" cy="914400"/>
+            </a:xfrm>
+            <a:prstGeom prst="rect">
+              <a:avLst/>
+            </a:prstGeom>
+          </p:spPr>
+        </p:pic>
+        <p:pic>
+          <p:nvPicPr>
+            <p:cNvPr id="28" name="Graphic 27" descr="User with solid fill">
+              <a:extLst>
+                <a:ext uri="{FF2B5EF4-FFF2-40B4-BE49-F238E27FC236}">
+                  <a16:creationId xmlns:a16="http://schemas.microsoft.com/office/drawing/2014/main" id="{C187F615-A9A7-DD4C-0E56-9903BCB01D78}"/>
+                </a:ext>
+              </a:extLst>
+            </p:cNvPr>
+            <p:cNvPicPr>
+              <a:picLocks noChangeAspect="1"/>
+            </p:cNvPicPr>
+            <p:nvPr/>
+          </p:nvPicPr>
+          <p:blipFill>
+            <a:blip r:embed="rId3">
+              <a:extLst>
+                <a:ext uri="{96DAC541-7B7A-43D3-8B79-37D633B846F1}">
+                  <asvg:svgBlip xmlns:asvg="http://schemas.microsoft.com/office/drawing/2016/SVG/main" r:embed="rId4"/>
+                </a:ext>
+              </a:extLst>
+            </a:blip>
+            <a:stretch>
+              <a:fillRect/>
+            </a:stretch>
+          </p:blipFill>
+          <p:spPr>
+            <a:xfrm>
+              <a:off x="2819400" y="4394200"/>
+              <a:ext cx="914400" cy="914400"/>
+            </a:xfrm>
+            <a:prstGeom prst="rect">
+              <a:avLst/>
+            </a:prstGeom>
+          </p:spPr>
+        </p:pic>
+        <p:pic>
+          <p:nvPicPr>
+            <p:cNvPr id="29" name="Graphic 28" descr="User with solid fill">
+              <a:extLst>
+                <a:ext uri="{FF2B5EF4-FFF2-40B4-BE49-F238E27FC236}">
+                  <a16:creationId xmlns:a16="http://schemas.microsoft.com/office/drawing/2014/main" id="{E9F8EEA6-B4FA-EBBB-04A6-EA66EC24CA23}"/>
+                </a:ext>
+              </a:extLst>
+            </p:cNvPr>
+            <p:cNvPicPr>
+              <a:picLocks noChangeAspect="1"/>
+            </p:cNvPicPr>
+            <p:nvPr/>
+          </p:nvPicPr>
+          <p:blipFill>
+            <a:blip r:embed="rId3">
+              <a:extLst>
+                <a:ext uri="{96DAC541-7B7A-43D3-8B79-37D633B846F1}">
+                  <asvg:svgBlip xmlns:asvg="http://schemas.microsoft.com/office/drawing/2016/SVG/main" r:embed="rId4"/>
+                </a:ext>
+              </a:extLst>
+            </a:blip>
+            <a:stretch>
+              <a:fillRect/>
+            </a:stretch>
+          </p:blipFill>
+          <p:spPr>
+            <a:xfrm>
+              <a:off x="3695700" y="4394200"/>
+              <a:ext cx="914400" cy="914400"/>
+            </a:xfrm>
+            <a:prstGeom prst="rect">
+              <a:avLst/>
+            </a:prstGeom>
+          </p:spPr>
+        </p:pic>
+      </p:grpSp>
       <p:pic>
         <p:nvPicPr>
-          <p:cNvPr id="1026" name="Picture 2">
-            <a:extLst>
-              <a:ext uri="{FF2B5EF4-FFF2-40B4-BE49-F238E27FC236}">
-                <a16:creationId xmlns:a16="http://schemas.microsoft.com/office/drawing/2014/main" id="{2BF6F1C7-B38C-6C48-2495-0FCAEDD69DA2}"/>
+          <p:cNvPr id="31" name="Graphic 30" descr="User with solid fill">
+            <a:extLst>
+              <a:ext uri="{FF2B5EF4-FFF2-40B4-BE49-F238E27FC236}">
+                <a16:creationId xmlns:a16="http://schemas.microsoft.com/office/drawing/2014/main" id="{9FF722CB-568D-01C6-C492-95B7FDAE03CB}"/>
               </a:ext>
             </a:extLst>
           </p:cNvPr>
           <p:cNvPicPr>
-            <a:picLocks noChangeAspect="1" noChangeArrowheads="1"/>
+            <a:picLocks noChangeAspect="1"/>
           </p:cNvPicPr>
           <p:nvPr/>
         </p:nvPicPr>
         <p:blipFill>
           <a:blip r:embed="rId3">
             <a:extLst>
-              <a:ext uri="{28A0092B-C50C-407E-A947-70E740481C1C}">
-                <a14:useLocalDpi xmlns:a14="http://schemas.microsoft.com/office/drawing/2010/main" val="0"/>
+              <a:ext uri="{96DAC541-7B7A-43D3-8B79-37D633B846F1}">
+                <asvg:svgBlip xmlns:asvg="http://schemas.microsoft.com/office/drawing/2016/SVG/main" r:embed="rId4"/>
               </a:ext>
             </a:extLst>
           </a:blip>
-          <a:srcRect/>
           <a:stretch>
             <a:fillRect/>
           </a:stretch>
         </p:blipFill>
-        <p:spPr bwMode="auto">
+        <p:spPr>
           <a:xfrm>
-            <a:off x="7743825" y="1690688"/>
-            <a:ext cx="3609975" cy="2700261"/>
+            <a:off x="6705600" y="5241577"/>
+            <a:ext cx="914400" cy="914400"/>
+          </a:xfrm>
+          <a:prstGeom prst="rect">
+            <a:avLst/>
+          </a:prstGeom>
+        </p:spPr>
+      </p:pic>
+      <mc:AlternateContent xmlns:mc="http://schemas.openxmlformats.org/markup-compatibility/2006">
+        <mc:Choice xmlns:a14="http://schemas.microsoft.com/office/drawing/2010/main" Requires="a14">
+          <p:sp>
+            <p:nvSpPr>
+              <p:cNvPr id="32" name="TextBox 31">
+                <a:extLst>
+                  <a:ext uri="{FF2B5EF4-FFF2-40B4-BE49-F238E27FC236}">
+                    <a16:creationId xmlns:a16="http://schemas.microsoft.com/office/drawing/2014/main" id="{772108CE-40FB-F28C-1E8B-99EC6E4A5324}"/>
+                  </a:ext>
+                </a:extLst>
+              </p:cNvPr>
+              <p:cNvSpPr txBox="1"/>
+              <p:nvPr/>
+            </p:nvSpPr>
+            <p:spPr>
+              <a:xfrm>
+                <a:off x="2334629" y="4077037"/>
+                <a:ext cx="639341" cy="1015663"/>
+              </a:xfrm>
+              <a:prstGeom prst="rect">
+                <a:avLst/>
+              </a:prstGeom>
+              <a:noFill/>
+            </p:spPr>
+            <p:txBody>
+              <a:bodyPr wrap="none" lIns="0" tIns="0" rIns="0" bIns="0" rtlCol="0">
+                <a:spAutoFit/>
+              </a:bodyPr>
+              <a:lstStyle/>
+              <a:p>
+                <a14:m>
+                  <m:oMathPara xmlns:m="http://schemas.openxmlformats.org/officeDocument/2006/math">
+                    <m:oMathParaPr>
+                      <m:jc m:val="centerGroup"/>
+                    </m:oMathParaPr>
+                    <m:oMath xmlns:m="http://schemas.openxmlformats.org/officeDocument/2006/math">
+                      <m:r>
+                        <a:rPr lang="de-DE" sz="6600" b="0" i="1" smtClean="0">
+                          <a:latin typeface="Cambria Math" panose="02040503050406030204" pitchFamily="18" charset="0"/>
+                        </a:rPr>
+                        <m:t>𝐿</m:t>
+                      </m:r>
+                    </m:oMath>
+                  </m:oMathPara>
+                </a14:m>
+                <a:endParaRPr lang="en-US" dirty="0"/>
+              </a:p>
+            </p:txBody>
+          </p:sp>
+        </mc:Choice>
+        <mc:Fallback>
+          <p:sp>
+            <p:nvSpPr>
+              <p:cNvPr id="32" name="TextBox 31">
+                <a:extLst>
+                  <a:ext uri="{FF2B5EF4-FFF2-40B4-BE49-F238E27FC236}">
+                    <a16:creationId xmlns:a16="http://schemas.microsoft.com/office/drawing/2014/main" id="{772108CE-40FB-F28C-1E8B-99EC6E4A5324}"/>
+                  </a:ext>
+                </a:extLst>
+              </p:cNvPr>
+              <p:cNvSpPr txBox="1">
+                <a:spLocks noRot="1" noChangeAspect="1" noMove="1" noResize="1" noEditPoints="1" noAdjustHandles="1" noChangeArrowheads="1" noChangeShapeType="1" noTextEdit="1"/>
+              </p:cNvSpPr>
+              <p:nvPr/>
+            </p:nvSpPr>
+            <p:spPr>
+              <a:xfrm>
+                <a:off x="2334629" y="4077037"/>
+                <a:ext cx="639341" cy="1015663"/>
+              </a:xfrm>
+              <a:prstGeom prst="rect">
+                <a:avLst/>
+              </a:prstGeom>
+              <a:blipFill>
+                <a:blip r:embed="rId5"/>
+                <a:stretch>
+                  <a:fillRect/>
+                </a:stretch>
+              </a:blipFill>
+            </p:spPr>
+            <p:txBody>
+              <a:bodyPr/>
+              <a:lstStyle/>
+              <a:p>
+                <a:r>
+                  <a:rPr lang="en-US">
+                    <a:noFill/>
+                  </a:rPr>
+                  <a:t> </a:t>
+                </a:r>
+              </a:p>
+            </p:txBody>
+          </p:sp>
+        </mc:Fallback>
+      </mc:AlternateContent>
+      <p:cxnSp>
+        <p:nvCxnSpPr>
+          <p:cNvPr id="34" name="Straight Arrow Connector 33">
+            <a:extLst>
+              <a:ext uri="{FF2B5EF4-FFF2-40B4-BE49-F238E27FC236}">
+                <a16:creationId xmlns:a16="http://schemas.microsoft.com/office/drawing/2014/main" id="{BDAA281A-C001-AC22-66D9-5A3A591AA79B}"/>
+              </a:ext>
+            </a:extLst>
+          </p:cNvPr>
+          <p:cNvCxnSpPr>
+            <a:endCxn id="32" idx="1"/>
+          </p:cNvCxnSpPr>
+          <p:nvPr/>
+        </p:nvCxnSpPr>
+        <p:spPr>
+          <a:xfrm flipV="1">
+            <a:off x="1320800" y="4584869"/>
+            <a:ext cx="1013829" cy="656708"/>
+          </a:xfrm>
+          <a:prstGeom prst="straightConnector1">
+            <a:avLst/>
+          </a:prstGeom>
+          <a:ln>
+            <a:tailEnd type="triangle"/>
+          </a:ln>
+        </p:spPr>
+        <p:style>
+          <a:lnRef idx="2">
+            <a:schemeClr val="accent1"/>
+          </a:lnRef>
+          <a:fillRef idx="0">
+            <a:schemeClr val="accent1"/>
+          </a:fillRef>
+          <a:effectRef idx="1">
+            <a:schemeClr val="accent1"/>
+          </a:effectRef>
+          <a:fontRef idx="minor">
+            <a:schemeClr val="tx1"/>
+          </a:fontRef>
+        </p:style>
+      </p:cxnSp>
+      <p:cxnSp>
+        <p:nvCxnSpPr>
+          <p:cNvPr id="36" name="Straight Arrow Connector 35">
+            <a:extLst>
+              <a:ext uri="{FF2B5EF4-FFF2-40B4-BE49-F238E27FC236}">
+                <a16:creationId xmlns:a16="http://schemas.microsoft.com/office/drawing/2014/main" id="{4D9A2642-2306-FC48-BF4C-FD504A82C183}"/>
+              </a:ext>
+            </a:extLst>
+          </p:cNvPr>
+          <p:cNvCxnSpPr/>
+          <p:nvPr/>
+        </p:nvCxnSpPr>
+        <p:spPr>
+          <a:xfrm flipV="1">
+            <a:off x="2197100" y="4927600"/>
+            <a:ext cx="241300" cy="313977"/>
+          </a:xfrm>
+          <a:prstGeom prst="straightConnector1">
+            <a:avLst/>
+          </a:prstGeom>
+          <a:ln>
+            <a:tailEnd type="triangle"/>
+          </a:ln>
+        </p:spPr>
+        <p:style>
+          <a:lnRef idx="2">
+            <a:schemeClr val="accent1"/>
+          </a:lnRef>
+          <a:fillRef idx="0">
+            <a:schemeClr val="accent1"/>
+          </a:fillRef>
+          <a:effectRef idx="1">
+            <a:schemeClr val="accent1"/>
+          </a:effectRef>
+          <a:fontRef idx="minor">
+            <a:schemeClr val="tx1"/>
+          </a:fontRef>
+        </p:style>
+      </p:cxnSp>
+      <p:cxnSp>
+        <p:nvCxnSpPr>
+          <p:cNvPr id="38" name="Straight Arrow Connector 37">
+            <a:extLst>
+              <a:ext uri="{FF2B5EF4-FFF2-40B4-BE49-F238E27FC236}">
+                <a16:creationId xmlns:a16="http://schemas.microsoft.com/office/drawing/2014/main" id="{7DFAF08D-D97C-12D1-2B8F-895949D6014B}"/>
+              </a:ext>
+            </a:extLst>
+          </p:cNvPr>
+          <p:cNvCxnSpPr/>
+          <p:nvPr/>
+        </p:nvCxnSpPr>
+        <p:spPr>
+          <a:xfrm flipH="1" flipV="1">
+            <a:off x="2844800" y="4913223"/>
+            <a:ext cx="266700" cy="328354"/>
+          </a:xfrm>
+          <a:prstGeom prst="straightConnector1">
+            <a:avLst/>
+          </a:prstGeom>
+          <a:ln>
+            <a:tailEnd type="triangle"/>
+          </a:ln>
+        </p:spPr>
+        <p:style>
+          <a:lnRef idx="2">
+            <a:schemeClr val="accent1"/>
+          </a:lnRef>
+          <a:fillRef idx="0">
+            <a:schemeClr val="accent1"/>
+          </a:fillRef>
+          <a:effectRef idx="1">
+            <a:schemeClr val="accent1"/>
+          </a:effectRef>
+          <a:fontRef idx="minor">
+            <a:schemeClr val="tx1"/>
+          </a:fontRef>
+        </p:style>
+      </p:cxnSp>
+      <p:cxnSp>
+        <p:nvCxnSpPr>
+          <p:cNvPr id="40" name="Straight Arrow Connector 39">
+            <a:extLst>
+              <a:ext uri="{FF2B5EF4-FFF2-40B4-BE49-F238E27FC236}">
+                <a16:creationId xmlns:a16="http://schemas.microsoft.com/office/drawing/2014/main" id="{BDD005BD-B8E1-6D50-E371-D1C775B9A814}"/>
+              </a:ext>
+            </a:extLst>
+          </p:cNvPr>
+          <p:cNvCxnSpPr/>
+          <p:nvPr/>
+        </p:nvCxnSpPr>
+        <p:spPr>
+          <a:xfrm flipH="1" flipV="1">
+            <a:off x="3111500" y="4584868"/>
+            <a:ext cx="876300" cy="656709"/>
+          </a:xfrm>
+          <a:prstGeom prst="straightConnector1">
+            <a:avLst/>
+          </a:prstGeom>
+          <a:ln>
+            <a:tailEnd type="triangle"/>
+          </a:ln>
+        </p:spPr>
+        <p:style>
+          <a:lnRef idx="2">
+            <a:schemeClr val="accent1"/>
+          </a:lnRef>
+          <a:fillRef idx="0">
+            <a:schemeClr val="accent1"/>
+          </a:fillRef>
+          <a:effectRef idx="1">
+            <a:schemeClr val="accent1"/>
+          </a:effectRef>
+          <a:fontRef idx="minor">
+            <a:schemeClr val="tx1"/>
+          </a:fontRef>
+        </p:style>
+      </p:cxnSp>
+      <p:pic>
+        <p:nvPicPr>
+          <p:cNvPr id="41" name="Graphic 40" descr="User with solid fill">
+            <a:extLst>
+              <a:ext uri="{FF2B5EF4-FFF2-40B4-BE49-F238E27FC236}">
+                <a16:creationId xmlns:a16="http://schemas.microsoft.com/office/drawing/2014/main" id="{7F664D65-E4B8-88D9-C726-B496D078FB82}"/>
+              </a:ext>
+            </a:extLst>
+          </p:cNvPr>
+          <p:cNvPicPr>
+            <a:picLocks noChangeAspect="1"/>
+          </p:cNvPicPr>
+          <p:nvPr/>
+        </p:nvPicPr>
+        <p:blipFill>
+          <a:blip r:embed="rId3">
+            <a:extLst>
+              <a:ext uri="{96DAC541-7B7A-43D3-8B79-37D633B846F1}">
+                <asvg:svgBlip xmlns:asvg="http://schemas.microsoft.com/office/drawing/2016/SVG/main" r:embed="rId4"/>
+              </a:ext>
+            </a:extLst>
+          </a:blip>
+          <a:stretch>
+            <a:fillRect/>
+          </a:stretch>
+        </p:blipFill>
+        <p:spPr>
+          <a:xfrm>
+            <a:off x="8255000" y="5241577"/>
+            <a:ext cx="914400" cy="914400"/>
+          </a:xfrm>
+          <a:prstGeom prst="rect">
+            <a:avLst/>
+          </a:prstGeom>
+        </p:spPr>
+      </p:pic>
+      <p:pic>
+        <p:nvPicPr>
+          <p:cNvPr id="42" name="Graphic 41" descr="User with solid fill">
+            <a:extLst>
+              <a:ext uri="{FF2B5EF4-FFF2-40B4-BE49-F238E27FC236}">
+                <a16:creationId xmlns:a16="http://schemas.microsoft.com/office/drawing/2014/main" id="{D8FFB9B9-D58B-D44C-2A3F-F7EC6C898DD3}"/>
+              </a:ext>
+            </a:extLst>
+          </p:cNvPr>
+          <p:cNvPicPr>
+            <a:picLocks noChangeAspect="1"/>
+          </p:cNvPicPr>
+          <p:nvPr/>
+        </p:nvPicPr>
+        <p:blipFill>
+          <a:blip r:embed="rId3">
+            <a:extLst>
+              <a:ext uri="{96DAC541-7B7A-43D3-8B79-37D633B846F1}">
+                <asvg:svgBlip xmlns:asvg="http://schemas.microsoft.com/office/drawing/2016/SVG/main" r:embed="rId4"/>
+              </a:ext>
+            </a:extLst>
+          </a:blip>
+          <a:stretch>
+            <a:fillRect/>
+          </a:stretch>
+        </p:blipFill>
+        <p:spPr>
+          <a:xfrm>
+            <a:off x="8964030" y="4178300"/>
+            <a:ext cx="914400" cy="914400"/>
+          </a:xfrm>
+          <a:prstGeom prst="rect">
+            <a:avLst/>
+          </a:prstGeom>
+        </p:spPr>
+      </p:pic>
+      <p:pic>
+        <p:nvPicPr>
+          <p:cNvPr id="43" name="Graphic 42" descr="User with solid fill">
+            <a:extLst>
+              <a:ext uri="{FF2B5EF4-FFF2-40B4-BE49-F238E27FC236}">
+                <a16:creationId xmlns:a16="http://schemas.microsoft.com/office/drawing/2014/main" id="{0B8D36BD-5170-0B8C-08C8-17F8B3F8F12A}"/>
+              </a:ext>
+            </a:extLst>
+          </p:cNvPr>
+          <p:cNvPicPr>
+            <a:picLocks noChangeAspect="1"/>
+          </p:cNvPicPr>
+          <p:nvPr/>
+        </p:nvPicPr>
+        <p:blipFill>
+          <a:blip r:embed="rId3">
+            <a:extLst>
+              <a:ext uri="{96DAC541-7B7A-43D3-8B79-37D633B846F1}">
+                <asvg:svgBlip xmlns:asvg="http://schemas.microsoft.com/office/drawing/2016/SVG/main" r:embed="rId4"/>
+              </a:ext>
+            </a:extLst>
+          </a:blip>
+          <a:stretch>
+            <a:fillRect/>
+          </a:stretch>
+        </p:blipFill>
+        <p:spPr>
+          <a:xfrm>
+            <a:off x="6096000" y="4163000"/>
+            <a:ext cx="914400" cy="914400"/>
+          </a:xfrm>
+          <a:prstGeom prst="rect">
+            <a:avLst/>
+          </a:prstGeom>
+        </p:spPr>
+      </p:pic>
+      <p:pic>
+        <p:nvPicPr>
+          <p:cNvPr id="44" name="Graphic 43" descr="User with solid fill">
+            <a:extLst>
+              <a:ext uri="{FF2B5EF4-FFF2-40B4-BE49-F238E27FC236}">
+                <a16:creationId xmlns:a16="http://schemas.microsoft.com/office/drawing/2014/main" id="{D8D61594-BFEA-094C-230A-0E289CE6CF42}"/>
+              </a:ext>
+            </a:extLst>
+          </p:cNvPr>
+          <p:cNvPicPr>
+            <a:picLocks noChangeAspect="1"/>
+          </p:cNvPicPr>
+          <p:nvPr/>
+        </p:nvPicPr>
+        <p:blipFill>
+          <a:blip r:embed="rId3">
+            <a:extLst>
+              <a:ext uri="{96DAC541-7B7A-43D3-8B79-37D633B846F1}">
+                <asvg:svgBlip xmlns:asvg="http://schemas.microsoft.com/office/drawing/2016/SVG/main" r:embed="rId4"/>
+              </a:ext>
+            </a:extLst>
+          </a:blip>
+          <a:stretch>
+            <a:fillRect/>
+          </a:stretch>
+        </p:blipFill>
+        <p:spPr>
+          <a:xfrm>
+            <a:off x="6896100" y="3225869"/>
+            <a:ext cx="914400" cy="914400"/>
+          </a:xfrm>
+          <a:prstGeom prst="rect">
+            <a:avLst/>
+          </a:prstGeom>
+        </p:spPr>
+      </p:pic>
+      <p:pic>
+        <p:nvPicPr>
+          <p:cNvPr id="45" name="Graphic 44" descr="User with solid fill">
+            <a:extLst>
+              <a:ext uri="{FF2B5EF4-FFF2-40B4-BE49-F238E27FC236}">
+                <a16:creationId xmlns:a16="http://schemas.microsoft.com/office/drawing/2014/main" id="{62F1B484-6767-026B-823C-EA7466B2C209}"/>
+              </a:ext>
+            </a:extLst>
+          </p:cNvPr>
+          <p:cNvPicPr>
+            <a:picLocks noChangeAspect="1"/>
+          </p:cNvPicPr>
+          <p:nvPr/>
+        </p:nvPicPr>
+        <p:blipFill>
+          <a:blip r:embed="rId3">
+            <a:extLst>
+              <a:ext uri="{96DAC541-7B7A-43D3-8B79-37D633B846F1}">
+                <asvg:svgBlip xmlns:asvg="http://schemas.microsoft.com/office/drawing/2016/SVG/main" r:embed="rId4"/>
+              </a:ext>
+            </a:extLst>
+          </a:blip>
+          <a:stretch>
+            <a:fillRect/>
+          </a:stretch>
+        </p:blipFill>
+        <p:spPr>
+          <a:xfrm>
+            <a:off x="8056082" y="3225869"/>
+            <a:ext cx="914400" cy="914400"/>
+          </a:xfrm>
+          <a:prstGeom prst="rect">
+            <a:avLst/>
+          </a:prstGeom>
+        </p:spPr>
+      </p:pic>
+      <p:cxnSp>
+        <p:nvCxnSpPr>
+          <p:cNvPr id="47" name="Straight Connector 46">
+            <a:extLst>
+              <a:ext uri="{FF2B5EF4-FFF2-40B4-BE49-F238E27FC236}">
+                <a16:creationId xmlns:a16="http://schemas.microsoft.com/office/drawing/2014/main" id="{C4FCCFE0-6E57-4167-C640-71925AEEB1CF}"/>
+              </a:ext>
+            </a:extLst>
+          </p:cNvPr>
+          <p:cNvCxnSpPr/>
+          <p:nvPr/>
+        </p:nvCxnSpPr>
+        <p:spPr>
+          <a:xfrm>
+            <a:off x="6553200" y="5092700"/>
+            <a:ext cx="342900" cy="342900"/>
+          </a:xfrm>
+          <a:prstGeom prst="line">
+            <a:avLst/>
+          </a:prstGeom>
+        </p:spPr>
+        <p:style>
+          <a:lnRef idx="2">
+            <a:schemeClr val="accent1"/>
+          </a:lnRef>
+          <a:fillRef idx="0">
+            <a:schemeClr val="accent1"/>
+          </a:fillRef>
+          <a:effectRef idx="1">
+            <a:schemeClr val="accent1"/>
+          </a:effectRef>
+          <a:fontRef idx="minor">
+            <a:schemeClr val="tx1"/>
+          </a:fontRef>
+        </p:style>
+      </p:cxnSp>
+      <p:cxnSp>
+        <p:nvCxnSpPr>
+          <p:cNvPr id="49" name="Straight Connector 48">
+            <a:extLst>
+              <a:ext uri="{FF2B5EF4-FFF2-40B4-BE49-F238E27FC236}">
+                <a16:creationId xmlns:a16="http://schemas.microsoft.com/office/drawing/2014/main" id="{7004FB71-6676-B8EE-1E9C-C3780829E722}"/>
+              </a:ext>
+            </a:extLst>
+          </p:cNvPr>
+          <p:cNvCxnSpPr/>
+          <p:nvPr/>
+        </p:nvCxnSpPr>
+        <p:spPr>
+          <a:xfrm flipV="1">
+            <a:off x="6553200" y="3835400"/>
+            <a:ext cx="342900" cy="304869"/>
+          </a:xfrm>
+          <a:prstGeom prst="line">
+            <a:avLst/>
+          </a:prstGeom>
+        </p:spPr>
+        <p:style>
+          <a:lnRef idx="2">
+            <a:schemeClr val="accent1"/>
+          </a:lnRef>
+          <a:fillRef idx="0">
+            <a:schemeClr val="accent1"/>
+          </a:fillRef>
+          <a:effectRef idx="1">
+            <a:schemeClr val="accent1"/>
+          </a:effectRef>
+          <a:fontRef idx="minor">
+            <a:schemeClr val="tx1"/>
+          </a:fontRef>
+        </p:style>
+      </p:cxnSp>
+      <p:cxnSp>
+        <p:nvCxnSpPr>
+          <p:cNvPr id="51" name="Straight Connector 50">
+            <a:extLst>
+              <a:ext uri="{FF2B5EF4-FFF2-40B4-BE49-F238E27FC236}">
+                <a16:creationId xmlns:a16="http://schemas.microsoft.com/office/drawing/2014/main" id="{30C9B77F-658A-F104-D93D-409820D0192D}"/>
+              </a:ext>
+            </a:extLst>
+          </p:cNvPr>
+          <p:cNvCxnSpPr/>
+          <p:nvPr/>
+        </p:nvCxnSpPr>
+        <p:spPr>
+          <a:xfrm>
+            <a:off x="7620000" y="3683069"/>
+            <a:ext cx="546100" cy="0"/>
+          </a:xfrm>
+          <a:prstGeom prst="line">
+            <a:avLst/>
+          </a:prstGeom>
+        </p:spPr>
+        <p:style>
+          <a:lnRef idx="2">
+            <a:schemeClr val="accent1"/>
+          </a:lnRef>
+          <a:fillRef idx="0">
+            <a:schemeClr val="accent1"/>
+          </a:fillRef>
+          <a:effectRef idx="1">
+            <a:schemeClr val="accent1"/>
+          </a:effectRef>
+          <a:fontRef idx="minor">
+            <a:schemeClr val="tx1"/>
+          </a:fontRef>
+        </p:style>
+      </p:cxnSp>
+      <p:cxnSp>
+        <p:nvCxnSpPr>
+          <p:cNvPr id="53" name="Straight Connector 52">
+            <a:extLst>
+              <a:ext uri="{FF2B5EF4-FFF2-40B4-BE49-F238E27FC236}">
+                <a16:creationId xmlns:a16="http://schemas.microsoft.com/office/drawing/2014/main" id="{4E25B25B-6E20-61E0-9242-5B5D9858085D}"/>
+              </a:ext>
+            </a:extLst>
+          </p:cNvPr>
+          <p:cNvCxnSpPr>
+            <a:cxnSpLocks/>
+          </p:cNvCxnSpPr>
+          <p:nvPr/>
+        </p:nvCxnSpPr>
+        <p:spPr>
+          <a:xfrm>
+            <a:off x="8964030" y="4077037"/>
+            <a:ext cx="205370" cy="253663"/>
+          </a:xfrm>
+          <a:prstGeom prst="line">
+            <a:avLst/>
+          </a:prstGeom>
+        </p:spPr>
+        <p:style>
+          <a:lnRef idx="2">
+            <a:schemeClr val="accent1"/>
+          </a:lnRef>
+          <a:fillRef idx="0">
+            <a:schemeClr val="accent1"/>
+          </a:fillRef>
+          <a:effectRef idx="1">
+            <a:schemeClr val="accent1"/>
+          </a:effectRef>
+          <a:fontRef idx="minor">
+            <a:schemeClr val="tx1"/>
+          </a:fontRef>
+        </p:style>
+      </p:cxnSp>
+      <p:cxnSp>
+        <p:nvCxnSpPr>
+          <p:cNvPr id="57" name="Straight Connector 56">
+            <a:extLst>
+              <a:ext uri="{FF2B5EF4-FFF2-40B4-BE49-F238E27FC236}">
+                <a16:creationId xmlns:a16="http://schemas.microsoft.com/office/drawing/2014/main" id="{E5E9374E-4075-CA26-D092-2600596395C5}"/>
+              </a:ext>
+            </a:extLst>
+          </p:cNvPr>
+          <p:cNvCxnSpPr/>
+          <p:nvPr/>
+        </p:nvCxnSpPr>
+        <p:spPr>
+          <a:xfrm>
+            <a:off x="7620000" y="5698777"/>
+            <a:ext cx="635000" cy="0"/>
+          </a:xfrm>
+          <a:prstGeom prst="line">
+            <a:avLst/>
+          </a:prstGeom>
+        </p:spPr>
+        <p:style>
+          <a:lnRef idx="2">
+            <a:schemeClr val="accent1"/>
+          </a:lnRef>
+          <a:fillRef idx="0">
+            <a:schemeClr val="accent1"/>
+          </a:fillRef>
+          <a:effectRef idx="1">
+            <a:schemeClr val="accent1"/>
+          </a:effectRef>
+          <a:fontRef idx="minor">
+            <a:schemeClr val="tx1"/>
+          </a:fontRef>
+        </p:style>
+      </p:cxnSp>
+      <p:cxnSp>
+        <p:nvCxnSpPr>
+          <p:cNvPr id="59" name="Straight Connector 58">
+            <a:extLst>
+              <a:ext uri="{FF2B5EF4-FFF2-40B4-BE49-F238E27FC236}">
+                <a16:creationId xmlns:a16="http://schemas.microsoft.com/office/drawing/2014/main" id="{9919E3AD-FF38-2CD1-E313-E5F249217812}"/>
+              </a:ext>
+            </a:extLst>
+          </p:cNvPr>
+          <p:cNvCxnSpPr/>
+          <p:nvPr/>
+        </p:nvCxnSpPr>
+        <p:spPr>
+          <a:xfrm flipV="1">
+            <a:off x="8964030" y="5092700"/>
+            <a:ext cx="457200" cy="457200"/>
+          </a:xfrm>
+          <a:prstGeom prst="line">
+            <a:avLst/>
+          </a:prstGeom>
+        </p:spPr>
+        <p:style>
+          <a:lnRef idx="2">
+            <a:schemeClr val="accent1"/>
+          </a:lnRef>
+          <a:fillRef idx="0">
+            <a:schemeClr val="accent1"/>
+          </a:fillRef>
+          <a:effectRef idx="1">
+            <a:schemeClr val="accent1"/>
+          </a:effectRef>
+          <a:fontRef idx="minor">
+            <a:schemeClr val="tx1"/>
+          </a:fontRef>
+        </p:style>
+      </p:cxnSp>
+      <p:cxnSp>
+        <p:nvCxnSpPr>
+          <p:cNvPr id="61" name="Straight Connector 60">
+            <a:extLst>
+              <a:ext uri="{FF2B5EF4-FFF2-40B4-BE49-F238E27FC236}">
+                <a16:creationId xmlns:a16="http://schemas.microsoft.com/office/drawing/2014/main" id="{43BEA83A-2A8E-BE25-E4F3-09E9584E83DE}"/>
+              </a:ext>
+            </a:extLst>
+          </p:cNvPr>
+          <p:cNvCxnSpPr/>
+          <p:nvPr/>
+        </p:nvCxnSpPr>
+        <p:spPr>
+          <a:xfrm flipV="1">
+            <a:off x="7010400" y="4620200"/>
+            <a:ext cx="1960082" cy="15300"/>
+          </a:xfrm>
+          <a:prstGeom prst="line">
+            <a:avLst/>
+          </a:prstGeom>
+        </p:spPr>
+        <p:style>
+          <a:lnRef idx="2">
+            <a:schemeClr val="accent1"/>
+          </a:lnRef>
+          <a:fillRef idx="0">
+            <a:schemeClr val="accent1"/>
+          </a:fillRef>
+          <a:effectRef idx="1">
+            <a:schemeClr val="accent1"/>
+          </a:effectRef>
+          <a:fontRef idx="minor">
+            <a:schemeClr val="tx1"/>
+          </a:fontRef>
+        </p:style>
+      </p:cxnSp>
+      <p:cxnSp>
+        <p:nvCxnSpPr>
+          <p:cNvPr id="63" name="Straight Connector 62">
+            <a:extLst>
+              <a:ext uri="{FF2B5EF4-FFF2-40B4-BE49-F238E27FC236}">
+                <a16:creationId xmlns:a16="http://schemas.microsoft.com/office/drawing/2014/main" id="{4F6A3862-9618-78FF-E568-4B89D8344370}"/>
+              </a:ext>
+            </a:extLst>
+          </p:cNvPr>
+          <p:cNvCxnSpPr>
+            <a:endCxn id="31" idx="0"/>
+          </p:cNvCxnSpPr>
+          <p:nvPr/>
+        </p:nvCxnSpPr>
+        <p:spPr>
+          <a:xfrm flipH="1">
+            <a:off x="7162800" y="4140269"/>
+            <a:ext cx="190500" cy="1101308"/>
+          </a:xfrm>
+          <a:prstGeom prst="line">
+            <a:avLst/>
+          </a:prstGeom>
+        </p:spPr>
+        <p:style>
+          <a:lnRef idx="2">
+            <a:schemeClr val="accent1"/>
+          </a:lnRef>
+          <a:fillRef idx="0">
+            <a:schemeClr val="accent1"/>
+          </a:fillRef>
+          <a:effectRef idx="1">
+            <a:schemeClr val="accent1"/>
+          </a:effectRef>
+          <a:fontRef idx="minor">
+            <a:schemeClr val="tx1"/>
+          </a:fontRef>
+        </p:style>
+      </p:cxnSp>
+      <p:cxnSp>
+        <p:nvCxnSpPr>
+          <p:cNvPr id="65" name="Straight Connector 64">
+            <a:extLst>
+              <a:ext uri="{FF2B5EF4-FFF2-40B4-BE49-F238E27FC236}">
+                <a16:creationId xmlns:a16="http://schemas.microsoft.com/office/drawing/2014/main" id="{AF938ED8-D8B6-8183-C0F0-95BF4740B08A}"/>
+              </a:ext>
+            </a:extLst>
+          </p:cNvPr>
+          <p:cNvCxnSpPr>
+            <a:endCxn id="41" idx="0"/>
+          </p:cNvCxnSpPr>
+          <p:nvPr/>
+        </p:nvCxnSpPr>
+        <p:spPr>
+          <a:xfrm>
+            <a:off x="8513282" y="4163000"/>
+            <a:ext cx="198918" cy="1078577"/>
+          </a:xfrm>
+          <a:prstGeom prst="line">
+            <a:avLst/>
+          </a:prstGeom>
+        </p:spPr>
+        <p:style>
+          <a:lnRef idx="2">
+            <a:schemeClr val="accent1"/>
+          </a:lnRef>
+          <a:fillRef idx="0">
+            <a:schemeClr val="accent1"/>
+          </a:fillRef>
+          <a:effectRef idx="1">
+            <a:schemeClr val="accent1"/>
+          </a:effectRef>
+          <a:fontRef idx="minor">
+            <a:schemeClr val="tx1"/>
+          </a:fontRef>
+        </p:style>
+      </p:cxnSp>
+      <p:cxnSp>
+        <p:nvCxnSpPr>
+          <p:cNvPr id="67" name="Straight Connector 66">
+            <a:extLst>
+              <a:ext uri="{FF2B5EF4-FFF2-40B4-BE49-F238E27FC236}">
+                <a16:creationId xmlns:a16="http://schemas.microsoft.com/office/drawing/2014/main" id="{CE89F903-7A65-A880-3C60-706DE8CA61CE}"/>
+              </a:ext>
+            </a:extLst>
+          </p:cNvPr>
+          <p:cNvCxnSpPr/>
+          <p:nvPr/>
+        </p:nvCxnSpPr>
+        <p:spPr>
+          <a:xfrm flipV="1">
+            <a:off x="7162800" y="4203868"/>
+            <a:ext cx="1350482" cy="1037709"/>
+          </a:xfrm>
+          <a:prstGeom prst="line">
+            <a:avLst/>
+          </a:prstGeom>
+        </p:spPr>
+        <p:style>
+          <a:lnRef idx="2">
+            <a:schemeClr val="accent1"/>
+          </a:lnRef>
+          <a:fillRef idx="0">
+            <a:schemeClr val="accent1"/>
+          </a:fillRef>
+          <a:effectRef idx="1">
+            <a:schemeClr val="accent1"/>
+          </a:effectRef>
+          <a:fontRef idx="minor">
+            <a:schemeClr val="tx1"/>
+          </a:fontRef>
+        </p:style>
+      </p:cxnSp>
+      <p:cxnSp>
+        <p:nvCxnSpPr>
+          <p:cNvPr id="69" name="Straight Connector 68">
+            <a:extLst>
+              <a:ext uri="{FF2B5EF4-FFF2-40B4-BE49-F238E27FC236}">
+                <a16:creationId xmlns:a16="http://schemas.microsoft.com/office/drawing/2014/main" id="{991034F7-DB30-5AEA-5FF5-E1BDD1461654}"/>
+              </a:ext>
+            </a:extLst>
+          </p:cNvPr>
+          <p:cNvCxnSpPr/>
+          <p:nvPr/>
+        </p:nvCxnSpPr>
+        <p:spPr>
+          <a:xfrm>
+            <a:off x="7353300" y="4140269"/>
+            <a:ext cx="1358900" cy="1101308"/>
+          </a:xfrm>
+          <a:prstGeom prst="line">
+            <a:avLst/>
+          </a:prstGeom>
+        </p:spPr>
+        <p:style>
+          <a:lnRef idx="2">
+            <a:schemeClr val="accent1"/>
+          </a:lnRef>
+          <a:fillRef idx="0">
+            <a:schemeClr val="accent1"/>
+          </a:fillRef>
+          <a:effectRef idx="1">
+            <a:schemeClr val="accent1"/>
+          </a:effectRef>
+          <a:fontRef idx="minor">
+            <a:schemeClr val="tx1"/>
+          </a:fontRef>
+        </p:style>
+      </p:cxnSp>
+      <p:cxnSp>
+        <p:nvCxnSpPr>
+          <p:cNvPr id="71" name="Straight Connector 70">
+            <a:extLst>
+              <a:ext uri="{FF2B5EF4-FFF2-40B4-BE49-F238E27FC236}">
+                <a16:creationId xmlns:a16="http://schemas.microsoft.com/office/drawing/2014/main" id="{0537732D-EA39-4D07-91EF-7FF4BD7DA88C}"/>
+              </a:ext>
+            </a:extLst>
+          </p:cNvPr>
+          <p:cNvCxnSpPr/>
+          <p:nvPr/>
+        </p:nvCxnSpPr>
+        <p:spPr>
+          <a:xfrm flipV="1">
+            <a:off x="7010400" y="4178300"/>
+            <a:ext cx="1502882" cy="406568"/>
+          </a:xfrm>
+          <a:prstGeom prst="line">
+            <a:avLst/>
+          </a:prstGeom>
+        </p:spPr>
+        <p:style>
+          <a:lnRef idx="2">
+            <a:schemeClr val="accent1"/>
+          </a:lnRef>
+          <a:fillRef idx="0">
+            <a:schemeClr val="accent1"/>
+          </a:fillRef>
+          <a:effectRef idx="1">
+            <a:schemeClr val="accent1"/>
+          </a:effectRef>
+          <a:fontRef idx="minor">
+            <a:schemeClr val="tx1"/>
+          </a:fontRef>
+        </p:style>
+      </p:cxnSp>
+      <p:cxnSp>
+        <p:nvCxnSpPr>
+          <p:cNvPr id="73" name="Straight Connector 72">
+            <a:extLst>
+              <a:ext uri="{FF2B5EF4-FFF2-40B4-BE49-F238E27FC236}">
+                <a16:creationId xmlns:a16="http://schemas.microsoft.com/office/drawing/2014/main" id="{E1F25E61-6595-ACA3-37C1-9C909C316317}"/>
+              </a:ext>
+            </a:extLst>
+          </p:cNvPr>
+          <p:cNvCxnSpPr/>
+          <p:nvPr/>
+        </p:nvCxnSpPr>
+        <p:spPr>
+          <a:xfrm>
+            <a:off x="7353300" y="4140269"/>
+            <a:ext cx="1610730" cy="444599"/>
+          </a:xfrm>
+          <a:prstGeom prst="line">
+            <a:avLst/>
+          </a:prstGeom>
+        </p:spPr>
+        <p:style>
+          <a:lnRef idx="2">
+            <a:schemeClr val="accent1"/>
+          </a:lnRef>
+          <a:fillRef idx="0">
+            <a:schemeClr val="accent1"/>
+          </a:fillRef>
+          <a:effectRef idx="1">
+            <a:schemeClr val="accent1"/>
+          </a:effectRef>
+          <a:fontRef idx="minor">
+            <a:schemeClr val="tx1"/>
+          </a:fontRef>
+        </p:style>
+      </p:cxnSp>
+      <p:cxnSp>
+        <p:nvCxnSpPr>
+          <p:cNvPr id="75" name="Straight Connector 74">
+            <a:extLst>
+              <a:ext uri="{FF2B5EF4-FFF2-40B4-BE49-F238E27FC236}">
+                <a16:creationId xmlns:a16="http://schemas.microsoft.com/office/drawing/2014/main" id="{1511511D-A654-7107-50B0-810C9CFE7440}"/>
+              </a:ext>
+            </a:extLst>
+          </p:cNvPr>
+          <p:cNvCxnSpPr/>
+          <p:nvPr/>
+        </p:nvCxnSpPr>
+        <p:spPr>
+          <a:xfrm flipH="1">
+            <a:off x="7162800" y="4635500"/>
+            <a:ext cx="1801230" cy="606077"/>
+          </a:xfrm>
+          <a:prstGeom prst="line">
+            <a:avLst/>
+          </a:prstGeom>
+        </p:spPr>
+        <p:style>
+          <a:lnRef idx="2">
+            <a:schemeClr val="accent1"/>
+          </a:lnRef>
+          <a:fillRef idx="0">
+            <a:schemeClr val="accent1"/>
+          </a:fillRef>
+          <a:effectRef idx="1">
+            <a:schemeClr val="accent1"/>
+          </a:effectRef>
+          <a:fontRef idx="minor">
+            <a:schemeClr val="tx1"/>
+          </a:fontRef>
+        </p:style>
+      </p:cxnSp>
+      <p:cxnSp>
+        <p:nvCxnSpPr>
+          <p:cNvPr id="77" name="Straight Connector 76">
+            <a:extLst>
+              <a:ext uri="{FF2B5EF4-FFF2-40B4-BE49-F238E27FC236}">
+                <a16:creationId xmlns:a16="http://schemas.microsoft.com/office/drawing/2014/main" id="{25C2D446-BF70-EF84-BCE3-9BD21B8CD0D1}"/>
+              </a:ext>
+            </a:extLst>
+          </p:cNvPr>
+          <p:cNvCxnSpPr/>
+          <p:nvPr/>
+        </p:nvCxnSpPr>
+        <p:spPr>
+          <a:xfrm>
+            <a:off x="7010400" y="4620200"/>
+            <a:ext cx="1701800" cy="621377"/>
+          </a:xfrm>
+          <a:prstGeom prst="line">
+            <a:avLst/>
+          </a:prstGeom>
+        </p:spPr>
+        <p:style>
+          <a:lnRef idx="2">
+            <a:schemeClr val="accent1"/>
+          </a:lnRef>
+          <a:fillRef idx="0">
+            <a:schemeClr val="accent1"/>
+          </a:fillRef>
+          <a:effectRef idx="1">
+            <a:schemeClr val="accent1"/>
+          </a:effectRef>
+          <a:fontRef idx="minor">
+            <a:schemeClr val="tx1"/>
+          </a:fontRef>
+        </p:style>
+      </p:cxnSp>
+    </p:spTree>
+    <p:extLst>
+      <p:ext uri="{BB962C8B-B14F-4D97-AF65-F5344CB8AC3E}">
+        <p14:creationId xmlns:p14="http://schemas.microsoft.com/office/powerpoint/2010/main" val="2004776518"/>
+      </p:ext>
+    </p:extLst>
+  </p:cSld>
+  <p:clrMapOvr>
+    <a:masterClrMapping/>
+  </p:clrMapOvr>
+</p:sld>
+</file>
+
+<file path=ppt/slides/slide4.xml><?xml version="1.0" encoding="utf-8"?>
+<p:sld xmlns:a="http://schemas.openxmlformats.org/drawingml/2006/main" xmlns:r="http://schemas.openxmlformats.org/officeDocument/2006/relationships" xmlns:p="http://schemas.openxmlformats.org/presentationml/2006/main">
+  <p:cSld>
+    <p:spTree>
+      <p:nvGrpSpPr>
+        <p:cNvPr id="1" name="">
+          <a:extLst>
+            <a:ext uri="{FF2B5EF4-FFF2-40B4-BE49-F238E27FC236}">
+              <a16:creationId xmlns:a16="http://schemas.microsoft.com/office/drawing/2014/main" id="{A15DD4B7-389E-7C29-60F5-602DAB082018}"/>
+            </a:ext>
+          </a:extLst>
+        </p:cNvPr>
+        <p:cNvGrpSpPr/>
+        <p:nvPr/>
+      </p:nvGrpSpPr>
+      <p:grpSpPr>
+        <a:xfrm>
+          <a:off x="0" y="0"/>
+          <a:ext cx="0" cy="0"/>
+          <a:chOff x="0" y="0"/>
+          <a:chExt cx="0" cy="0"/>
+        </a:xfrm>
+      </p:grpSpPr>
+      <p:sp>
+        <p:nvSpPr>
+          <p:cNvPr id="6" name="Title 1">
+            <a:extLst>
+              <a:ext uri="{FF2B5EF4-FFF2-40B4-BE49-F238E27FC236}">
+                <a16:creationId xmlns:a16="http://schemas.microsoft.com/office/drawing/2014/main" id="{F9F0656B-97BA-5F8F-51AD-8014BE68E4BA}"/>
+              </a:ext>
+            </a:extLst>
+          </p:cNvPr>
+          <p:cNvSpPr txBox="1">
+            <a:spLocks/>
+          </p:cNvSpPr>
+          <p:nvPr/>
+        </p:nvSpPr>
+        <p:spPr>
+          <a:xfrm>
+            <a:off x="472696" y="266915"/>
+            <a:ext cx="10515600" cy="535803"/>
+          </a:xfrm>
+          <a:prstGeom prst="rect">
+            <a:avLst/>
+          </a:prstGeom>
+        </p:spPr>
+        <p:txBody>
+          <a:bodyPr/>
+          <a:lstStyle>
+            <a:lvl1pPr algn="l" defTabSz="914400" rtl="0" eaLnBrk="1" latinLnBrk="0" hangingPunct="1">
+              <a:lnSpc>
+                <a:spcPct val="90000"/>
+              </a:lnSpc>
+              <a:spcBef>
+                <a:spcPct val="0"/>
+              </a:spcBef>
+              <a:buNone/>
+              <a:defRPr sz="4400" kern="1200">
+                <a:solidFill>
+                  <a:schemeClr val="tx1"/>
+                </a:solidFill>
+                <a:latin typeface="+mj-lt"/>
+                <a:ea typeface="+mj-ea"/>
+                <a:cs typeface="+mj-cs"/>
+              </a:defRPr>
+            </a:lvl1pPr>
+          </a:lstStyle>
+          <a:p>
+            <a:r>
+              <a:rPr lang="de-DE" sz="3200" dirty="0"/>
+              <a:t>DRIVE: </a:t>
+            </a:r>
+            <a:r>
+              <a:rPr lang="en-US" sz="3200" dirty="0"/>
+              <a:t>Dynamic Reward Incentives for Variable Exchange</a:t>
+            </a:r>
+            <a:r>
+              <a:rPr lang="de-DE" sz="3200" dirty="0"/>
+              <a:t> </a:t>
+            </a:r>
+            <a:endParaRPr lang="LID4096" sz="3200" dirty="0"/>
+          </a:p>
+        </p:txBody>
+      </p:sp>
+      <p:sp>
+        <p:nvSpPr>
+          <p:cNvPr id="7" name="TextBox 6">
+            <a:extLst>
+              <a:ext uri="{FF2B5EF4-FFF2-40B4-BE49-F238E27FC236}">
+                <a16:creationId xmlns:a16="http://schemas.microsoft.com/office/drawing/2014/main" id="{A953125D-D09F-A5E1-47BF-46FAC3347A26}"/>
+              </a:ext>
+            </a:extLst>
+          </p:cNvPr>
+          <p:cNvSpPr txBox="1"/>
+          <p:nvPr/>
+        </p:nvSpPr>
+        <p:spPr>
+          <a:xfrm>
+            <a:off x="472696" y="1159223"/>
+            <a:ext cx="9860968" cy="1337354"/>
           </a:xfrm>
           <a:prstGeom prst="rect">
             <a:avLst/>
           </a:prstGeom>
           <a:noFill/>
-          <a:extLst>
-            <a:ext uri="{909E8E84-426E-40DD-AFC4-6F175D3DCCD1}">
-              <a14:hiddenFill xmlns:a14="http://schemas.microsoft.com/office/drawing/2010/main">
-                <a:solidFill>
-                  <a:srgbClr val="FFFFFF"/>
-                </a:solidFill>
-              </a14:hiddenFill>
-            </a:ext>
-          </a:extLst>
+        </p:spPr>
+        <p:txBody>
+          <a:bodyPr wrap="square" numCol="2" rtlCol="0">
+            <a:spAutoFit/>
+          </a:bodyPr>
+          <a:lstStyle/>
+          <a:p>
+            <a:pPr marL="285750" indent="-285750">
+              <a:lnSpc>
+                <a:spcPct val="150000"/>
+              </a:lnSpc>
+              <a:buFont typeface="Arial" panose="020B0604020202020204" pitchFamily="34" charset="0"/>
+              <a:buChar char="•"/>
+            </a:pPr>
+            <a:r>
+              <a:rPr lang="de-DE" dirty="0"/>
+              <a:t>Peer Incentivation via Reward Shaping</a:t>
+            </a:r>
+          </a:p>
+          <a:p>
+            <a:pPr marL="285750" indent="-285750">
+              <a:lnSpc>
+                <a:spcPct val="150000"/>
+              </a:lnSpc>
+              <a:buFont typeface="Arial" panose="020B0604020202020204" pitchFamily="34" charset="0"/>
+              <a:buChar char="•"/>
+            </a:pPr>
+            <a:r>
+              <a:rPr lang="de-DE" dirty="0"/>
+              <a:t>2-step protocol</a:t>
+            </a:r>
+          </a:p>
+          <a:p>
+            <a:pPr marL="285750" indent="-285750">
+              <a:lnSpc>
+                <a:spcPct val="150000"/>
+              </a:lnSpc>
+              <a:buFont typeface="Arial" panose="020B0604020202020204" pitchFamily="34" charset="0"/>
+              <a:buChar char="•"/>
+            </a:pPr>
+            <a:endParaRPr lang="de-DE" dirty="0"/>
+          </a:p>
+          <a:p>
+            <a:pPr marL="285750" indent="-285750">
+              <a:lnSpc>
+                <a:spcPct val="150000"/>
+              </a:lnSpc>
+              <a:buFont typeface="Arial" panose="020B0604020202020204" pitchFamily="34" charset="0"/>
+              <a:buChar char="•"/>
+            </a:pPr>
+            <a:r>
+              <a:rPr lang="de-DE" dirty="0"/>
+              <a:t>Invariant under Reward-Drift</a:t>
+            </a:r>
+          </a:p>
+          <a:p>
+            <a:pPr marL="285750" indent="-285750">
+              <a:lnSpc>
+                <a:spcPct val="150000"/>
+              </a:lnSpc>
+              <a:buFont typeface="Arial" panose="020B0604020202020204" pitchFamily="34" charset="0"/>
+              <a:buChar char="•"/>
+            </a:pPr>
+            <a:endParaRPr lang="en-US" dirty="0"/>
+          </a:p>
+        </p:txBody>
+      </p:sp>
+      <p:pic>
+        <p:nvPicPr>
+          <p:cNvPr id="3" name="Picture 2">
+            <a:extLst>
+              <a:ext uri="{FF2B5EF4-FFF2-40B4-BE49-F238E27FC236}">
+                <a16:creationId xmlns:a16="http://schemas.microsoft.com/office/drawing/2014/main" id="{C769FA3A-4FF5-86A6-DE46-C1D5775ADEB0}"/>
+              </a:ext>
+            </a:extLst>
+          </p:cNvPr>
+          <p:cNvPicPr>
+            <a:picLocks noChangeAspect="1"/>
+          </p:cNvPicPr>
+          <p:nvPr/>
+        </p:nvPicPr>
+        <p:blipFill>
+          <a:blip r:embed="rId3"/>
+          <a:stretch>
+            <a:fillRect/>
+          </a:stretch>
+        </p:blipFill>
+        <p:spPr>
+          <a:xfrm>
+            <a:off x="472696" y="2489867"/>
+            <a:ext cx="8249801" cy="3820058"/>
+          </a:xfrm>
+          <a:prstGeom prst="rect">
+            <a:avLst/>
+          </a:prstGeom>
         </p:spPr>
       </p:pic>
     </p:spTree>
     <p:extLst>
       <p:ext uri="{BB962C8B-B14F-4D97-AF65-F5344CB8AC3E}">
-        <p14:creationId xmlns:p14="http://schemas.microsoft.com/office/powerpoint/2010/main" val="282873177"/>
+        <p14:creationId xmlns:p14="http://schemas.microsoft.com/office/powerpoint/2010/main" val="3053692666"/>
+      </p:ext>
+    </p:extLst>
+  </p:cSld>
+  <p:clrMapOvr>
+    <a:masterClrMapping/>
+  </p:clrMapOvr>
+</p:sld>
+</file>
+
+<file path=ppt/slides/slide5.xml><?xml version="1.0" encoding="utf-8"?>
+<p:sld xmlns:a="http://schemas.openxmlformats.org/drawingml/2006/main" xmlns:r="http://schemas.openxmlformats.org/officeDocument/2006/relationships" xmlns:p="http://schemas.openxmlformats.org/presentationml/2006/main">
+  <p:cSld>
+    <p:spTree>
+      <p:nvGrpSpPr>
+        <p:cNvPr id="1" name="">
+          <a:extLst>
+            <a:ext uri="{FF2B5EF4-FFF2-40B4-BE49-F238E27FC236}">
+              <a16:creationId xmlns:a16="http://schemas.microsoft.com/office/drawing/2014/main" id="{2BFBDC2F-DAFA-CB49-4752-728963EF3B38}"/>
+            </a:ext>
+          </a:extLst>
+        </p:cNvPr>
+        <p:cNvGrpSpPr/>
+        <p:nvPr/>
+      </p:nvGrpSpPr>
+      <p:grpSpPr>
+        <a:xfrm>
+          <a:off x="0" y="0"/>
+          <a:ext cx="0" cy="0"/>
+          <a:chOff x="0" y="0"/>
+          <a:chExt cx="0" cy="0"/>
+        </a:xfrm>
+      </p:grpSpPr>
+      <p:sp>
+        <p:nvSpPr>
+          <p:cNvPr id="6" name="Title 1">
+            <a:extLst>
+              <a:ext uri="{FF2B5EF4-FFF2-40B4-BE49-F238E27FC236}">
+                <a16:creationId xmlns:a16="http://schemas.microsoft.com/office/drawing/2014/main" id="{A777C827-84AF-ACDE-EC92-5EA6355D0164}"/>
+              </a:ext>
+            </a:extLst>
+          </p:cNvPr>
+          <p:cNvSpPr txBox="1">
+            <a:spLocks/>
+          </p:cNvSpPr>
+          <p:nvPr/>
+        </p:nvSpPr>
+        <p:spPr>
+          <a:xfrm>
+            <a:off x="472696" y="266915"/>
+            <a:ext cx="10515600" cy="535803"/>
+          </a:xfrm>
+          <a:prstGeom prst="rect">
+            <a:avLst/>
+          </a:prstGeom>
+        </p:spPr>
+        <p:txBody>
+          <a:bodyPr/>
+          <a:lstStyle>
+            <a:lvl1pPr algn="l" defTabSz="914400" rtl="0" eaLnBrk="1" latinLnBrk="0" hangingPunct="1">
+              <a:lnSpc>
+                <a:spcPct val="90000"/>
+              </a:lnSpc>
+              <a:spcBef>
+                <a:spcPct val="0"/>
+              </a:spcBef>
+              <a:buNone/>
+              <a:defRPr sz="4400" kern="1200">
+                <a:solidFill>
+                  <a:schemeClr val="tx1"/>
+                </a:solidFill>
+                <a:latin typeface="+mj-lt"/>
+                <a:ea typeface="+mj-ea"/>
+                <a:cs typeface="+mj-cs"/>
+              </a:defRPr>
+            </a:lvl1pPr>
+          </a:lstStyle>
+          <a:p>
+            <a:r>
+              <a:rPr lang="de-DE" sz="3200" dirty="0"/>
+              <a:t>Small Changes to DRIVE-Reposority</a:t>
+            </a:r>
+            <a:endParaRPr lang="LID4096" sz="3200" dirty="0"/>
+          </a:p>
+        </p:txBody>
+      </p:sp>
+      <p:sp>
+        <p:nvSpPr>
+          <p:cNvPr id="7" name="TextBox 6">
+            <a:extLst>
+              <a:ext uri="{FF2B5EF4-FFF2-40B4-BE49-F238E27FC236}">
+                <a16:creationId xmlns:a16="http://schemas.microsoft.com/office/drawing/2014/main" id="{562391F8-DE9A-6BE2-BBB3-505ABBEF45B1}"/>
+              </a:ext>
+            </a:extLst>
+          </p:cNvPr>
+          <p:cNvSpPr txBox="1"/>
+          <p:nvPr/>
+        </p:nvSpPr>
+        <p:spPr>
+          <a:xfrm>
+            <a:off x="472696" y="1159223"/>
+            <a:ext cx="9860968" cy="883383"/>
+          </a:xfrm>
+          <a:prstGeom prst="rect">
+            <a:avLst/>
+          </a:prstGeom>
+          <a:noFill/>
+        </p:spPr>
+        <p:txBody>
+          <a:bodyPr wrap="square" rtlCol="0">
+            <a:spAutoFit/>
+          </a:bodyPr>
+          <a:lstStyle/>
+          <a:p>
+            <a:pPr marL="285750" indent="-285750">
+              <a:lnSpc>
+                <a:spcPct val="150000"/>
+              </a:lnSpc>
+              <a:buFont typeface="Arial" panose="020B0604020202020204" pitchFamily="34" charset="0"/>
+              <a:buChar char="•"/>
+            </a:pPr>
+            <a:r>
+              <a:rPr lang="de-DE" dirty="0"/>
+              <a:t>Experiments do not seem to be executable out-of-the-box</a:t>
+            </a:r>
+          </a:p>
+          <a:p>
+            <a:pPr marL="285750" indent="-285750">
+              <a:lnSpc>
+                <a:spcPct val="150000"/>
+              </a:lnSpc>
+              <a:buFont typeface="Arial" panose="020B0604020202020204" pitchFamily="34" charset="0"/>
+              <a:buChar char="•"/>
+            </a:pPr>
+            <a:r>
+              <a:rPr lang="de-DE" dirty="0"/>
+              <a:t>Minor changes I had to make:</a:t>
+            </a:r>
+            <a:endParaRPr lang="en-US" dirty="0"/>
+          </a:p>
+        </p:txBody>
+      </p:sp>
+      <p:pic>
+        <p:nvPicPr>
+          <p:cNvPr id="9" name="Picture 8">
+            <a:extLst>
+              <a:ext uri="{FF2B5EF4-FFF2-40B4-BE49-F238E27FC236}">
+                <a16:creationId xmlns:a16="http://schemas.microsoft.com/office/drawing/2014/main" id="{FAB1F2C5-A175-3125-C4CD-7CC985B6BF95}"/>
+              </a:ext>
+            </a:extLst>
+          </p:cNvPr>
+          <p:cNvPicPr>
+            <a:picLocks noChangeAspect="1"/>
+          </p:cNvPicPr>
+          <p:nvPr/>
+        </p:nvPicPr>
+        <p:blipFill>
+          <a:blip r:embed="rId3"/>
+          <a:srcRect r="75475"/>
+          <a:stretch>
+            <a:fillRect/>
+          </a:stretch>
+        </p:blipFill>
+        <p:spPr>
+          <a:xfrm>
+            <a:off x="749301" y="2763809"/>
+            <a:ext cx="1803399" cy="215957"/>
+          </a:xfrm>
+          <a:prstGeom prst="rect">
+            <a:avLst/>
+          </a:prstGeom>
+        </p:spPr>
+      </p:pic>
+      <p:sp>
+        <p:nvSpPr>
+          <p:cNvPr id="10" name="TextBox 9">
+            <a:extLst>
+              <a:ext uri="{FF2B5EF4-FFF2-40B4-BE49-F238E27FC236}">
+                <a16:creationId xmlns:a16="http://schemas.microsoft.com/office/drawing/2014/main" id="{B2108236-21AD-A286-BF6E-0A1C0B378F69}"/>
+              </a:ext>
+            </a:extLst>
+          </p:cNvPr>
+          <p:cNvSpPr txBox="1"/>
+          <p:nvPr/>
+        </p:nvSpPr>
+        <p:spPr>
+          <a:xfrm>
+            <a:off x="749300" y="3272714"/>
+            <a:ext cx="1955800" cy="369332"/>
+          </a:xfrm>
+          <a:prstGeom prst="rect">
+            <a:avLst/>
+          </a:prstGeom>
+          <a:noFill/>
+        </p:spPr>
+        <p:txBody>
+          <a:bodyPr wrap="square" rtlCol="0">
+            <a:spAutoFit/>
+          </a:bodyPr>
+          <a:lstStyle/>
+          <a:p>
+            <a:r>
+              <a:rPr lang="de-DE" dirty="0"/>
+              <a:t>memory.py</a:t>
+            </a:r>
+            <a:endParaRPr lang="en-US" dirty="0"/>
+          </a:p>
+        </p:txBody>
+      </p:sp>
+      <p:pic>
+        <p:nvPicPr>
+          <p:cNvPr id="12" name="Picture 11">
+            <a:extLst>
+              <a:ext uri="{FF2B5EF4-FFF2-40B4-BE49-F238E27FC236}">
+                <a16:creationId xmlns:a16="http://schemas.microsoft.com/office/drawing/2014/main" id="{F1D817D5-6792-E393-893A-4DEB12E880C6}"/>
+              </a:ext>
+            </a:extLst>
+          </p:cNvPr>
+          <p:cNvPicPr>
+            <a:picLocks noChangeAspect="1"/>
+          </p:cNvPicPr>
+          <p:nvPr/>
+        </p:nvPicPr>
+        <p:blipFill>
+          <a:blip r:embed="rId4"/>
+          <a:stretch>
+            <a:fillRect/>
+          </a:stretch>
+        </p:blipFill>
+        <p:spPr>
+          <a:xfrm>
+            <a:off x="749300" y="3642046"/>
+            <a:ext cx="4496427" cy="1286054"/>
+          </a:xfrm>
+          <a:prstGeom prst="rect">
+            <a:avLst/>
+          </a:prstGeom>
+        </p:spPr>
+      </p:pic>
+      <p:sp>
+        <p:nvSpPr>
+          <p:cNvPr id="13" name="TextBox 12">
+            <a:extLst>
+              <a:ext uri="{FF2B5EF4-FFF2-40B4-BE49-F238E27FC236}">
+                <a16:creationId xmlns:a16="http://schemas.microsoft.com/office/drawing/2014/main" id="{8D3862D7-66B9-C019-36A0-423E609D211B}"/>
+              </a:ext>
+            </a:extLst>
+          </p:cNvPr>
+          <p:cNvSpPr txBox="1"/>
+          <p:nvPr/>
+        </p:nvSpPr>
+        <p:spPr>
+          <a:xfrm>
+            <a:off x="749300" y="2399111"/>
+            <a:ext cx="1955800" cy="369332"/>
+          </a:xfrm>
+          <a:prstGeom prst="rect">
+            <a:avLst/>
+          </a:prstGeom>
+          <a:noFill/>
+        </p:spPr>
+        <p:txBody>
+          <a:bodyPr wrap="square" rtlCol="0">
+            <a:spAutoFit/>
+          </a:bodyPr>
+          <a:lstStyle/>
+          <a:p>
+            <a:r>
+              <a:rPr lang="de-DE" dirty="0"/>
+              <a:t>settings.py</a:t>
+            </a:r>
+            <a:endParaRPr lang="en-US" dirty="0"/>
+          </a:p>
+        </p:txBody>
+      </p:sp>
+      <p:pic>
+        <p:nvPicPr>
+          <p:cNvPr id="14" name="Picture 13">
+            <a:extLst>
+              <a:ext uri="{FF2B5EF4-FFF2-40B4-BE49-F238E27FC236}">
+                <a16:creationId xmlns:a16="http://schemas.microsoft.com/office/drawing/2014/main" id="{F97C69BB-A813-BBA7-444A-9A68C2E36074}"/>
+              </a:ext>
+            </a:extLst>
+          </p:cNvPr>
+          <p:cNvPicPr>
+            <a:picLocks noChangeAspect="1"/>
+          </p:cNvPicPr>
+          <p:nvPr/>
+        </p:nvPicPr>
+        <p:blipFill>
+          <a:blip r:embed="rId3"/>
+          <a:srcRect l="57210"/>
+          <a:stretch>
+            <a:fillRect/>
+          </a:stretch>
+        </p:blipFill>
+        <p:spPr>
+          <a:xfrm>
+            <a:off x="2552700" y="2763809"/>
+            <a:ext cx="3146425" cy="215957"/>
+          </a:xfrm>
+          <a:prstGeom prst="rect">
+            <a:avLst/>
+          </a:prstGeom>
+        </p:spPr>
+      </p:pic>
+      <p:sp>
+        <p:nvSpPr>
+          <p:cNvPr id="15" name="TextBox 14">
+            <a:extLst>
+              <a:ext uri="{FF2B5EF4-FFF2-40B4-BE49-F238E27FC236}">
+                <a16:creationId xmlns:a16="http://schemas.microsoft.com/office/drawing/2014/main" id="{6E168BDF-0E8C-5BBC-21ED-3FA4201B99EE}"/>
+              </a:ext>
+            </a:extLst>
+          </p:cNvPr>
+          <p:cNvSpPr txBox="1"/>
+          <p:nvPr/>
+        </p:nvSpPr>
+        <p:spPr>
+          <a:xfrm>
+            <a:off x="5699124" y="4100407"/>
+            <a:ext cx="3774059" cy="369332"/>
+          </a:xfrm>
+          <a:prstGeom prst="rect">
+            <a:avLst/>
+          </a:prstGeom>
+          <a:noFill/>
+        </p:spPr>
+        <p:txBody>
+          <a:bodyPr wrap="square" rtlCol="0">
+            <a:spAutoFit/>
+          </a:bodyPr>
+          <a:lstStyle/>
+          <a:p>
+            <a:r>
+              <a:rPr lang="de-DE" dirty="0"/>
+              <a:t>(Can‘t call .clear() on np.ndarray)</a:t>
+            </a:r>
+            <a:endParaRPr lang="en-US" dirty="0"/>
+          </a:p>
+        </p:txBody>
+      </p:sp>
+      <p:pic>
+        <p:nvPicPr>
+          <p:cNvPr id="17" name="Picture 16">
+            <a:extLst>
+              <a:ext uri="{FF2B5EF4-FFF2-40B4-BE49-F238E27FC236}">
+                <a16:creationId xmlns:a16="http://schemas.microsoft.com/office/drawing/2014/main" id="{A9590A63-D79D-4EBD-4D40-019901C83352}"/>
+              </a:ext>
+            </a:extLst>
+          </p:cNvPr>
+          <p:cNvPicPr>
+            <a:picLocks noChangeAspect="1"/>
+          </p:cNvPicPr>
+          <p:nvPr/>
+        </p:nvPicPr>
+        <p:blipFill>
+          <a:blip r:embed="rId5"/>
+          <a:srcRect l="61081"/>
+          <a:stretch>
+            <a:fillRect/>
+          </a:stretch>
+        </p:blipFill>
+        <p:spPr>
+          <a:xfrm>
+            <a:off x="749300" y="5698777"/>
+            <a:ext cx="4745036" cy="240876"/>
+          </a:xfrm>
+          <a:prstGeom prst="rect">
+            <a:avLst/>
+          </a:prstGeom>
+        </p:spPr>
+      </p:pic>
+      <p:pic>
+        <p:nvPicPr>
+          <p:cNvPr id="19" name="Picture 18">
+            <a:extLst>
+              <a:ext uri="{FF2B5EF4-FFF2-40B4-BE49-F238E27FC236}">
+                <a16:creationId xmlns:a16="http://schemas.microsoft.com/office/drawing/2014/main" id="{9194409D-1993-C0DD-E237-D34C53D09157}"/>
+              </a:ext>
+            </a:extLst>
+          </p:cNvPr>
+          <p:cNvPicPr>
+            <a:picLocks noChangeAspect="1"/>
+          </p:cNvPicPr>
+          <p:nvPr/>
+        </p:nvPicPr>
+        <p:blipFill>
+          <a:blip r:embed="rId5"/>
+          <a:srcRect r="56974"/>
+          <a:stretch>
+            <a:fillRect/>
+          </a:stretch>
+        </p:blipFill>
+        <p:spPr>
+          <a:xfrm>
+            <a:off x="749300" y="5947671"/>
+            <a:ext cx="5245727" cy="240876"/>
+          </a:xfrm>
+          <a:prstGeom prst="rect">
+            <a:avLst/>
+          </a:prstGeom>
+        </p:spPr>
+      </p:pic>
+      <p:sp>
+        <p:nvSpPr>
+          <p:cNvPr id="20" name="TextBox 19">
+            <a:extLst>
+              <a:ext uri="{FF2B5EF4-FFF2-40B4-BE49-F238E27FC236}">
+                <a16:creationId xmlns:a16="http://schemas.microsoft.com/office/drawing/2014/main" id="{0574E45A-B44C-CCF8-A8E0-7408850B7DE9}"/>
+              </a:ext>
+            </a:extLst>
+          </p:cNvPr>
+          <p:cNvSpPr txBox="1"/>
+          <p:nvPr/>
+        </p:nvSpPr>
+        <p:spPr>
+          <a:xfrm>
+            <a:off x="749300" y="5297432"/>
+            <a:ext cx="1955800" cy="369332"/>
+          </a:xfrm>
+          <a:prstGeom prst="rect">
+            <a:avLst/>
+          </a:prstGeom>
+          <a:noFill/>
+        </p:spPr>
+        <p:txBody>
+          <a:bodyPr wrap="square" rtlCol="0">
+            <a:spAutoFit/>
+          </a:bodyPr>
+          <a:lstStyle/>
+          <a:p>
+            <a:r>
+              <a:rPr lang="de-DE" dirty="0"/>
+              <a:t>environment.py</a:t>
+            </a:r>
+            <a:endParaRPr lang="en-US" dirty="0"/>
+          </a:p>
+        </p:txBody>
+      </p:sp>
+      <p:sp>
+        <p:nvSpPr>
+          <p:cNvPr id="21" name="TextBox 20">
+            <a:extLst>
+              <a:ext uri="{FF2B5EF4-FFF2-40B4-BE49-F238E27FC236}">
+                <a16:creationId xmlns:a16="http://schemas.microsoft.com/office/drawing/2014/main" id="{B24080A7-8E6A-907A-990D-F71A6BE80042}"/>
+              </a:ext>
+            </a:extLst>
+          </p:cNvPr>
+          <p:cNvSpPr txBox="1"/>
+          <p:nvPr/>
+        </p:nvSpPr>
+        <p:spPr>
+          <a:xfrm>
+            <a:off x="6293484" y="5754987"/>
+            <a:ext cx="3774059" cy="369332"/>
+          </a:xfrm>
+          <a:prstGeom prst="rect">
+            <a:avLst/>
+          </a:prstGeom>
+          <a:noFill/>
+        </p:spPr>
+        <p:txBody>
+          <a:bodyPr wrap="square" rtlCol="0">
+            <a:spAutoFit/>
+          </a:bodyPr>
+          <a:lstStyle/>
+          <a:p>
+            <a:r>
+              <a:rPr lang="de-DE" dirty="0"/>
+              <a:t>(numpy.int is deprecated)</a:t>
+            </a:r>
+            <a:endParaRPr lang="en-US" dirty="0"/>
+          </a:p>
+        </p:txBody>
+      </p:sp>
+      <p:sp>
+        <p:nvSpPr>
+          <p:cNvPr id="22" name="TextBox 21">
+            <a:extLst>
+              <a:ext uri="{FF2B5EF4-FFF2-40B4-BE49-F238E27FC236}">
+                <a16:creationId xmlns:a16="http://schemas.microsoft.com/office/drawing/2014/main" id="{90793D47-7BCA-99F4-B1F9-0859C4D3E9C7}"/>
+              </a:ext>
+            </a:extLst>
+          </p:cNvPr>
+          <p:cNvSpPr txBox="1"/>
+          <p:nvPr/>
+        </p:nvSpPr>
+        <p:spPr>
+          <a:xfrm>
+            <a:off x="5995027" y="2687121"/>
+            <a:ext cx="3774059" cy="369332"/>
+          </a:xfrm>
+          <a:prstGeom prst="rect">
+            <a:avLst/>
+          </a:prstGeom>
+          <a:noFill/>
+        </p:spPr>
+        <p:txBody>
+          <a:bodyPr wrap="square" rtlCol="0">
+            <a:spAutoFit/>
+          </a:bodyPr>
+          <a:lstStyle/>
+          <a:p>
+            <a:r>
+              <a:rPr lang="de-DE" dirty="0"/>
+              <a:t>(torch does not recognize „gpu“)</a:t>
+            </a:r>
+            <a:endParaRPr lang="en-US" dirty="0"/>
+          </a:p>
+        </p:txBody>
+      </p:sp>
+    </p:spTree>
+    <p:extLst>
+      <p:ext uri="{BB962C8B-B14F-4D97-AF65-F5344CB8AC3E}">
+        <p14:creationId xmlns:p14="http://schemas.microsoft.com/office/powerpoint/2010/main" val="3380149937"/>
+      </p:ext>
+    </p:extLst>
+  </p:cSld>
+  <p:clrMapOvr>
+    <a:masterClrMapping/>
+  </p:clrMapOvr>
+</p:sld>
+</file>
+
+<file path=ppt/slides/slide6.xml><?xml version="1.0" encoding="utf-8"?>
+<p:sld xmlns:a="http://schemas.openxmlformats.org/drawingml/2006/main" xmlns:r="http://schemas.openxmlformats.org/officeDocument/2006/relationships" xmlns:p="http://schemas.openxmlformats.org/presentationml/2006/main">
+  <p:cSld>
+    <p:spTree>
+      <p:nvGrpSpPr>
+        <p:cNvPr id="1" name="">
+          <a:extLst>
+            <a:ext uri="{FF2B5EF4-FFF2-40B4-BE49-F238E27FC236}">
+              <a16:creationId xmlns:a16="http://schemas.microsoft.com/office/drawing/2014/main" id="{5BBA46AE-DCC6-6520-3AE9-04C8AB04E3EB}"/>
+            </a:ext>
+          </a:extLst>
+        </p:cNvPr>
+        <p:cNvGrpSpPr/>
+        <p:nvPr/>
+      </p:nvGrpSpPr>
+      <p:grpSpPr>
+        <a:xfrm>
+          <a:off x="0" y="0"/>
+          <a:ext cx="0" cy="0"/>
+          <a:chOff x="0" y="0"/>
+          <a:chExt cx="0" cy="0"/>
+        </a:xfrm>
+      </p:grpSpPr>
+      <p:sp>
+        <p:nvSpPr>
+          <p:cNvPr id="6" name="Title 1">
+            <a:extLst>
+              <a:ext uri="{FF2B5EF4-FFF2-40B4-BE49-F238E27FC236}">
+                <a16:creationId xmlns:a16="http://schemas.microsoft.com/office/drawing/2014/main" id="{A72950B5-77BF-9CD0-44EC-473DC3F1F622}"/>
+              </a:ext>
+            </a:extLst>
+          </p:cNvPr>
+          <p:cNvSpPr txBox="1">
+            <a:spLocks/>
+          </p:cNvSpPr>
+          <p:nvPr/>
+        </p:nvSpPr>
+        <p:spPr>
+          <a:xfrm>
+            <a:off x="472696" y="266915"/>
+            <a:ext cx="10515600" cy="535803"/>
+          </a:xfrm>
+          <a:prstGeom prst="rect">
+            <a:avLst/>
+          </a:prstGeom>
+        </p:spPr>
+        <p:txBody>
+          <a:bodyPr/>
+          <a:lstStyle>
+            <a:lvl1pPr algn="l" defTabSz="914400" rtl="0" eaLnBrk="1" latinLnBrk="0" hangingPunct="1">
+              <a:lnSpc>
+                <a:spcPct val="90000"/>
+              </a:lnSpc>
+              <a:spcBef>
+                <a:spcPct val="0"/>
+              </a:spcBef>
+              <a:buNone/>
+              <a:defRPr sz="4400" kern="1200">
+                <a:solidFill>
+                  <a:schemeClr val="tx1"/>
+                </a:solidFill>
+                <a:latin typeface="+mj-lt"/>
+                <a:ea typeface="+mj-ea"/>
+                <a:cs typeface="+mj-cs"/>
+              </a:defRPr>
+            </a:lvl1pPr>
+          </a:lstStyle>
+          <a:p>
+            <a:r>
+              <a:rPr lang="de-DE" sz="3200" dirty="0"/>
+              <a:t>Communication Failure</a:t>
+            </a:r>
+            <a:endParaRPr lang="LID4096" sz="3200" dirty="0"/>
+          </a:p>
+        </p:txBody>
+      </p:sp>
+      <p:pic>
+        <p:nvPicPr>
+          <p:cNvPr id="4" name="Picture 3">
+            <a:extLst>
+              <a:ext uri="{FF2B5EF4-FFF2-40B4-BE49-F238E27FC236}">
+                <a16:creationId xmlns:a16="http://schemas.microsoft.com/office/drawing/2014/main" id="{CA147393-8EB7-A5FC-302D-E48B16809A7A}"/>
+              </a:ext>
+            </a:extLst>
+          </p:cNvPr>
+          <p:cNvPicPr>
+            <a:picLocks noChangeAspect="1"/>
+          </p:cNvPicPr>
+          <p:nvPr/>
+        </p:nvPicPr>
+        <p:blipFill>
+          <a:blip r:embed="rId3"/>
+          <a:stretch>
+            <a:fillRect/>
+          </a:stretch>
+        </p:blipFill>
+        <p:spPr>
+          <a:xfrm>
+            <a:off x="472696" y="3429000"/>
+            <a:ext cx="10306545" cy="2683462"/>
+          </a:xfrm>
+          <a:prstGeom prst="rect">
+            <a:avLst/>
+          </a:prstGeom>
+        </p:spPr>
+      </p:pic>
+      <p:sp>
+        <p:nvSpPr>
+          <p:cNvPr id="7" name="TextBox 6">
+            <a:extLst>
+              <a:ext uri="{FF2B5EF4-FFF2-40B4-BE49-F238E27FC236}">
+                <a16:creationId xmlns:a16="http://schemas.microsoft.com/office/drawing/2014/main" id="{1B881370-EBA7-CFF3-6705-8C5883B674FE}"/>
+              </a:ext>
+            </a:extLst>
+          </p:cNvPr>
+          <p:cNvSpPr txBox="1"/>
+          <p:nvPr/>
+        </p:nvSpPr>
+        <p:spPr>
+          <a:xfrm>
+            <a:off x="472696" y="1159223"/>
+            <a:ext cx="9860968" cy="1714380"/>
+          </a:xfrm>
+          <a:prstGeom prst="rect">
+            <a:avLst/>
+          </a:prstGeom>
+          <a:noFill/>
+        </p:spPr>
+        <p:txBody>
+          <a:bodyPr wrap="square" rtlCol="0">
+            <a:spAutoFit/>
+          </a:bodyPr>
+          <a:lstStyle/>
+          <a:p>
+            <a:pPr marL="285750" indent="-285750">
+              <a:lnSpc>
+                <a:spcPct val="150000"/>
+              </a:lnSpc>
+              <a:buFont typeface="Arial" panose="020B0604020202020204" pitchFamily="34" charset="0"/>
+              <a:buChar char="•"/>
+            </a:pPr>
+            <a:r>
+              <a:rPr lang="de-DE" b="1" dirty="0"/>
+              <a:t>parameters</a:t>
+            </a:r>
+            <a:r>
+              <a:rPr lang="de-DE" dirty="0"/>
+              <a:t>: </a:t>
+            </a:r>
+            <a:r>
+              <a:rPr lang="de-DE" dirty="0">
+                <a:latin typeface="Consolas" panose="020B0609020204030204" pitchFamily="49" charset="0"/>
+              </a:rPr>
+              <a:t>failing_communication_ratio</a:t>
+            </a:r>
+          </a:p>
+          <a:p>
+            <a:pPr marL="285750" indent="-285750">
+              <a:lnSpc>
+                <a:spcPct val="150000"/>
+              </a:lnSpc>
+              <a:buFont typeface="Arial" panose="020B0604020202020204" pitchFamily="34" charset="0"/>
+              <a:buChar char="•"/>
+            </a:pPr>
+            <a:r>
+              <a:rPr lang="en-US" b="1" dirty="0"/>
+              <a:t>Idea</a:t>
+            </a:r>
+            <a:r>
+              <a:rPr lang="en-US" dirty="0"/>
+              <a:t>: each agent has x% chance that its DRIVE-Response gets lost</a:t>
+            </a:r>
+          </a:p>
+          <a:p>
+            <a:pPr marL="285750" indent="-285750">
+              <a:lnSpc>
+                <a:spcPct val="150000"/>
+              </a:lnSpc>
+              <a:buFont typeface="Arial" panose="020B0604020202020204" pitchFamily="34" charset="0"/>
+              <a:buChar char="•"/>
+            </a:pPr>
+            <a:r>
+              <a:rPr lang="en-US" b="1" dirty="0"/>
+              <a:t>Implementation</a:t>
+            </a:r>
+            <a:r>
+              <a:rPr lang="en-US" dirty="0"/>
+              <a:t>: remove agents from neighborhoods with x% chance before DRIVE exchange</a:t>
+            </a:r>
+          </a:p>
+          <a:p>
+            <a:pPr marL="285750" indent="-285750">
+              <a:lnSpc>
+                <a:spcPct val="150000"/>
+              </a:lnSpc>
+              <a:buFont typeface="Arial" panose="020B0604020202020204" pitchFamily="34" charset="0"/>
+              <a:buChar char="•"/>
+            </a:pPr>
+            <a:r>
+              <a:rPr lang="en-US" dirty="0"/>
+              <a:t>Edges of neighborhood graph are removed?</a:t>
+            </a:r>
+          </a:p>
+        </p:txBody>
+      </p:sp>
+    </p:spTree>
+    <p:extLst>
+      <p:ext uri="{BB962C8B-B14F-4D97-AF65-F5344CB8AC3E}">
+        <p14:creationId xmlns:p14="http://schemas.microsoft.com/office/powerpoint/2010/main" val="4244730175"/>
+      </p:ext>
+    </p:extLst>
+  </p:cSld>
+  <p:clrMapOvr>
+    <a:masterClrMapping/>
+  </p:clrMapOvr>
+</p:sld>
+</file>
+
+<file path=ppt/slides/slide7.xml><?xml version="1.0" encoding="utf-8"?>
+<p:sld xmlns:a="http://schemas.openxmlformats.org/drawingml/2006/main" xmlns:r="http://schemas.openxmlformats.org/officeDocument/2006/relationships" xmlns:p="http://schemas.openxmlformats.org/presentationml/2006/main">
+  <p:cSld>
+    <p:spTree>
+      <p:nvGrpSpPr>
+        <p:cNvPr id="1" name="">
+          <a:extLst>
+            <a:ext uri="{FF2B5EF4-FFF2-40B4-BE49-F238E27FC236}">
+              <a16:creationId xmlns:a16="http://schemas.microsoft.com/office/drawing/2014/main" id="{64EC1A74-90B7-4B9E-EF4D-1C455D25508B}"/>
+            </a:ext>
+          </a:extLst>
+        </p:cNvPr>
+        <p:cNvGrpSpPr/>
+        <p:nvPr/>
+      </p:nvGrpSpPr>
+      <p:grpSpPr>
+        <a:xfrm>
+          <a:off x="0" y="0"/>
+          <a:ext cx="0" cy="0"/>
+          <a:chOff x="0" y="0"/>
+          <a:chExt cx="0" cy="0"/>
+        </a:xfrm>
+      </p:grpSpPr>
+      <p:pic>
+        <p:nvPicPr>
+          <p:cNvPr id="3" name="Picture 2">
+            <a:extLst>
+              <a:ext uri="{FF2B5EF4-FFF2-40B4-BE49-F238E27FC236}">
+                <a16:creationId xmlns:a16="http://schemas.microsoft.com/office/drawing/2014/main" id="{A81EA96E-933E-8F15-887F-2CB412EB3123}"/>
+              </a:ext>
+            </a:extLst>
+          </p:cNvPr>
+          <p:cNvPicPr>
+            <a:picLocks noChangeAspect="1"/>
+          </p:cNvPicPr>
+          <p:nvPr/>
+        </p:nvPicPr>
+        <p:blipFill>
+          <a:blip r:embed="rId3"/>
+          <a:srcRect t="728" b="50000"/>
+          <a:stretch>
+            <a:fillRect/>
+          </a:stretch>
+        </p:blipFill>
+        <p:spPr>
+          <a:xfrm>
+            <a:off x="472696" y="1550783"/>
+            <a:ext cx="5552790" cy="4377520"/>
+          </a:xfrm>
+          <a:prstGeom prst="rect">
+            <a:avLst/>
+          </a:prstGeom>
+        </p:spPr>
+      </p:pic>
+      <p:pic>
+        <p:nvPicPr>
+          <p:cNvPr id="5" name="Picture 4">
+            <a:extLst>
+              <a:ext uri="{FF2B5EF4-FFF2-40B4-BE49-F238E27FC236}">
+                <a16:creationId xmlns:a16="http://schemas.microsoft.com/office/drawing/2014/main" id="{B675BB0C-4B0A-5404-B631-6A8B0EEE1BDA}"/>
+              </a:ext>
+            </a:extLst>
+          </p:cNvPr>
+          <p:cNvPicPr>
+            <a:picLocks noChangeAspect="1"/>
+          </p:cNvPicPr>
+          <p:nvPr/>
+        </p:nvPicPr>
+        <p:blipFill>
+          <a:blip r:embed="rId3"/>
+          <a:srcRect t="50000"/>
+          <a:stretch>
+            <a:fillRect/>
+          </a:stretch>
+        </p:blipFill>
+        <p:spPr>
+          <a:xfrm>
+            <a:off x="6096000" y="1518427"/>
+            <a:ext cx="5552790" cy="4442233"/>
+          </a:xfrm>
+          <a:prstGeom prst="rect">
+            <a:avLst/>
+          </a:prstGeom>
+        </p:spPr>
+      </p:pic>
+      <p:sp>
+        <p:nvSpPr>
+          <p:cNvPr id="6" name="Title 1">
+            <a:extLst>
+              <a:ext uri="{FF2B5EF4-FFF2-40B4-BE49-F238E27FC236}">
+                <a16:creationId xmlns:a16="http://schemas.microsoft.com/office/drawing/2014/main" id="{7845A31C-2CA4-998D-370C-A4D43C25CC6F}"/>
+              </a:ext>
+            </a:extLst>
+          </p:cNvPr>
+          <p:cNvSpPr txBox="1">
+            <a:spLocks/>
+          </p:cNvSpPr>
+          <p:nvPr/>
+        </p:nvSpPr>
+        <p:spPr>
+          <a:xfrm>
+            <a:off x="472696" y="266915"/>
+            <a:ext cx="10515600" cy="535803"/>
+          </a:xfrm>
+          <a:prstGeom prst="rect">
+            <a:avLst/>
+          </a:prstGeom>
+        </p:spPr>
+        <p:txBody>
+          <a:bodyPr/>
+          <a:lstStyle>
+            <a:lvl1pPr algn="l" defTabSz="914400" rtl="0" eaLnBrk="1" latinLnBrk="0" hangingPunct="1">
+              <a:lnSpc>
+                <a:spcPct val="90000"/>
+              </a:lnSpc>
+              <a:spcBef>
+                <a:spcPct val="0"/>
+              </a:spcBef>
+              <a:buNone/>
+              <a:defRPr sz="4400" kern="1200">
+                <a:solidFill>
+                  <a:schemeClr val="tx1"/>
+                </a:solidFill>
+                <a:latin typeface="+mj-lt"/>
+                <a:ea typeface="+mj-ea"/>
+                <a:cs typeface="+mj-cs"/>
+              </a:defRPr>
+            </a:lvl1pPr>
+          </a:lstStyle>
+          <a:p>
+            <a:r>
+              <a:rPr lang="de-DE" sz="3200" dirty="0"/>
+              <a:t>Communication </a:t>
+            </a:r>
+            <a:r>
+              <a:rPr lang="de-DE" sz="3200" dirty="0" err="1"/>
+              <a:t>Failure</a:t>
+            </a:r>
+            <a:r>
+              <a:rPr lang="de-DE" sz="3200" dirty="0"/>
+              <a:t> (10% Prob.)</a:t>
+            </a:r>
+            <a:endParaRPr lang="LID4096" sz="3200" dirty="0"/>
+          </a:p>
+        </p:txBody>
+      </p:sp>
+    </p:spTree>
+    <p:extLst>
+      <p:ext uri="{BB962C8B-B14F-4D97-AF65-F5344CB8AC3E}">
+        <p14:creationId xmlns:p14="http://schemas.microsoft.com/office/powerpoint/2010/main" val="4182010478"/>
+      </p:ext>
+    </p:extLst>
+  </p:cSld>
+  <p:clrMapOvr>
+    <a:masterClrMapping/>
+  </p:clrMapOvr>
+</p:sld>
+</file>
+
+<file path=ppt/slides/slide8.xml><?xml version="1.0" encoding="utf-8"?>
+<p:sld xmlns:a="http://schemas.openxmlformats.org/drawingml/2006/main" xmlns:r="http://schemas.openxmlformats.org/officeDocument/2006/relationships" xmlns:p="http://schemas.openxmlformats.org/presentationml/2006/main">
+  <p:cSld>
+    <p:spTree>
+      <p:nvGrpSpPr>
+        <p:cNvPr id="1" name="">
+          <a:extLst>
+            <a:ext uri="{FF2B5EF4-FFF2-40B4-BE49-F238E27FC236}">
+              <a16:creationId xmlns:a16="http://schemas.microsoft.com/office/drawing/2014/main" id="{9702D2D5-6974-BDD4-080D-60E84DD715BF}"/>
+            </a:ext>
+          </a:extLst>
+        </p:cNvPr>
+        <p:cNvGrpSpPr/>
+        <p:nvPr/>
+      </p:nvGrpSpPr>
+      <p:grpSpPr>
+        <a:xfrm>
+          <a:off x="0" y="0"/>
+          <a:ext cx="0" cy="0"/>
+          <a:chOff x="0" y="0"/>
+          <a:chExt cx="0" cy="0"/>
+        </a:xfrm>
+      </p:grpSpPr>
+      <p:sp>
+        <p:nvSpPr>
+          <p:cNvPr id="9" name="Title 1">
+            <a:extLst>
+              <a:ext uri="{FF2B5EF4-FFF2-40B4-BE49-F238E27FC236}">
+                <a16:creationId xmlns:a16="http://schemas.microsoft.com/office/drawing/2014/main" id="{258BA916-B28B-7ED9-333C-C6F621694A93}"/>
+              </a:ext>
+            </a:extLst>
+          </p:cNvPr>
+          <p:cNvSpPr txBox="1">
+            <a:spLocks/>
+          </p:cNvSpPr>
+          <p:nvPr/>
+        </p:nvSpPr>
+        <p:spPr>
+          <a:xfrm>
+            <a:off x="472696" y="266915"/>
+            <a:ext cx="10515600" cy="535803"/>
+          </a:xfrm>
+          <a:prstGeom prst="rect">
+            <a:avLst/>
+          </a:prstGeom>
+        </p:spPr>
+        <p:txBody>
+          <a:bodyPr/>
+          <a:lstStyle>
+            <a:lvl1pPr algn="l" defTabSz="914400" rtl="0" eaLnBrk="1" latinLnBrk="0" hangingPunct="1">
+              <a:lnSpc>
+                <a:spcPct val="90000"/>
+              </a:lnSpc>
+              <a:spcBef>
+                <a:spcPct val="0"/>
+              </a:spcBef>
+              <a:buNone/>
+              <a:defRPr sz="4400" kern="1200">
+                <a:solidFill>
+                  <a:schemeClr val="tx1"/>
+                </a:solidFill>
+                <a:latin typeface="+mj-lt"/>
+                <a:ea typeface="+mj-ea"/>
+                <a:cs typeface="+mj-cs"/>
+              </a:defRPr>
+            </a:lvl1pPr>
+          </a:lstStyle>
+          <a:p>
+            <a:r>
+              <a:rPr lang="de-DE" sz="3200" dirty="0"/>
+              <a:t>Communication Failure</a:t>
+            </a:r>
+            <a:endParaRPr lang="LID4096" sz="3200" dirty="0"/>
+          </a:p>
+        </p:txBody>
+      </p:sp>
+      <p:sp>
+        <p:nvSpPr>
+          <p:cNvPr id="10" name="TextBox 9">
+            <a:extLst>
+              <a:ext uri="{FF2B5EF4-FFF2-40B4-BE49-F238E27FC236}">
+                <a16:creationId xmlns:a16="http://schemas.microsoft.com/office/drawing/2014/main" id="{EDC8B095-71A6-6B49-CB23-ECD565ADBECD}"/>
+              </a:ext>
+            </a:extLst>
+          </p:cNvPr>
+          <p:cNvSpPr txBox="1"/>
+          <p:nvPr/>
+        </p:nvSpPr>
+        <p:spPr>
+          <a:xfrm>
+            <a:off x="472696" y="5611175"/>
+            <a:ext cx="4078364" cy="369332"/>
+          </a:xfrm>
+          <a:prstGeom prst="rect">
+            <a:avLst/>
+          </a:prstGeom>
+          <a:noFill/>
+        </p:spPr>
+        <p:txBody>
+          <a:bodyPr wrap="square" rtlCol="0">
+            <a:spAutoFit/>
+          </a:bodyPr>
+          <a:lstStyle/>
+          <a:p>
+            <a:pPr marL="285750" indent="-285750">
+              <a:buFont typeface="Arial" panose="020B0604020202020204" pitchFamily="34" charset="0"/>
+              <a:buChar char="•"/>
+            </a:pPr>
+            <a:r>
+              <a:rPr lang="de-DE" dirty="0"/>
+              <a:t>IDP: very strange results for DRIVE</a:t>
+            </a:r>
+            <a:endParaRPr lang="en-US" dirty="0"/>
+          </a:p>
+        </p:txBody>
+      </p:sp>
+      <p:sp>
+        <p:nvSpPr>
+          <p:cNvPr id="11" name="TextBox 10">
+            <a:extLst>
+              <a:ext uri="{FF2B5EF4-FFF2-40B4-BE49-F238E27FC236}">
+                <a16:creationId xmlns:a16="http://schemas.microsoft.com/office/drawing/2014/main" id="{78A84A2E-E05F-F862-FF0E-8A2CE8DBFC15}"/>
+              </a:ext>
+            </a:extLst>
+          </p:cNvPr>
+          <p:cNvSpPr txBox="1"/>
+          <p:nvPr/>
+        </p:nvSpPr>
+        <p:spPr>
+          <a:xfrm>
+            <a:off x="6325973" y="5611175"/>
+            <a:ext cx="5393331" cy="369332"/>
+          </a:xfrm>
+          <a:prstGeom prst="rect">
+            <a:avLst/>
+          </a:prstGeom>
+          <a:noFill/>
+        </p:spPr>
+        <p:txBody>
+          <a:bodyPr wrap="square" rtlCol="0">
+            <a:spAutoFit/>
+          </a:bodyPr>
+          <a:lstStyle/>
+          <a:p>
+            <a:pPr marL="285750" indent="-285750">
+              <a:buFont typeface="Arial" panose="020B0604020202020204" pitchFamily="34" charset="0"/>
+              <a:buChar char="•"/>
+            </a:pPr>
+            <a:r>
+              <a:rPr lang="de-DE" dirty="0"/>
+              <a:t>Harvest: takes very long</a:t>
+            </a:r>
+            <a:endParaRPr lang="en-US" dirty="0"/>
+          </a:p>
+        </p:txBody>
+      </p:sp>
+      <p:pic>
+        <p:nvPicPr>
+          <p:cNvPr id="13" name="Picture 12">
+            <a:extLst>
+              <a:ext uri="{FF2B5EF4-FFF2-40B4-BE49-F238E27FC236}">
+                <a16:creationId xmlns:a16="http://schemas.microsoft.com/office/drawing/2014/main" id="{F2ECB1A2-4A24-9985-FFF4-0F8E85EACAFA}"/>
+              </a:ext>
+            </a:extLst>
+          </p:cNvPr>
+          <p:cNvPicPr>
+            <a:picLocks noChangeAspect="1"/>
+          </p:cNvPicPr>
+          <p:nvPr/>
+        </p:nvPicPr>
+        <p:blipFill>
+          <a:blip r:embed="rId3"/>
+          <a:srcRect t="2879" b="48817"/>
+          <a:stretch>
+            <a:fillRect/>
+          </a:stretch>
+        </p:blipFill>
+        <p:spPr>
+          <a:xfrm>
+            <a:off x="472695" y="1544123"/>
+            <a:ext cx="5498391" cy="3541190"/>
+          </a:xfrm>
+          <a:prstGeom prst="rect">
+            <a:avLst/>
+          </a:prstGeom>
+        </p:spPr>
+      </p:pic>
+      <p:pic>
+        <p:nvPicPr>
+          <p:cNvPr id="15" name="Picture 14">
+            <a:extLst>
+              <a:ext uri="{FF2B5EF4-FFF2-40B4-BE49-F238E27FC236}">
+                <a16:creationId xmlns:a16="http://schemas.microsoft.com/office/drawing/2014/main" id="{654D3C05-643F-4054-17C3-9FB919956688}"/>
+              </a:ext>
+            </a:extLst>
+          </p:cNvPr>
+          <p:cNvPicPr>
+            <a:picLocks noChangeAspect="1"/>
+          </p:cNvPicPr>
+          <p:nvPr/>
+        </p:nvPicPr>
+        <p:blipFill>
+          <a:blip r:embed="rId3"/>
+          <a:srcRect t="51183"/>
+          <a:stretch>
+            <a:fillRect/>
+          </a:stretch>
+        </p:blipFill>
+        <p:spPr>
+          <a:xfrm>
+            <a:off x="5971086" y="1544123"/>
+            <a:ext cx="5440484" cy="3541190"/>
+          </a:xfrm>
+          <a:prstGeom prst="rect">
+            <a:avLst/>
+          </a:prstGeom>
+        </p:spPr>
+      </p:pic>
+    </p:spTree>
+    <p:extLst>
+      <p:ext uri="{BB962C8B-B14F-4D97-AF65-F5344CB8AC3E}">
+        <p14:creationId xmlns:p14="http://schemas.microsoft.com/office/powerpoint/2010/main" val="2695803713"/>
+      </p:ext>
+    </p:extLst>
+  </p:cSld>
+  <p:clrMapOvr>
+    <a:masterClrMapping/>
+  </p:clrMapOvr>
+</p:sld>
+</file>
+
+<file path=ppt/slides/slide9.xml><?xml version="1.0" encoding="utf-8"?>
+<p:sld xmlns:a="http://schemas.openxmlformats.org/drawingml/2006/main" xmlns:r="http://schemas.openxmlformats.org/officeDocument/2006/relationships" xmlns:p="http://schemas.openxmlformats.org/presentationml/2006/main">
+  <p:cSld>
+    <p:spTree>
+      <p:nvGrpSpPr>
+        <p:cNvPr id="1" name="">
+          <a:extLst>
+            <a:ext uri="{FF2B5EF4-FFF2-40B4-BE49-F238E27FC236}">
+              <a16:creationId xmlns:a16="http://schemas.microsoft.com/office/drawing/2014/main" id="{2196F5D6-D23D-11A0-EDC5-E18D9DB3E9A7}"/>
+            </a:ext>
+          </a:extLst>
+        </p:cNvPr>
+        <p:cNvGrpSpPr/>
+        <p:nvPr/>
+      </p:nvGrpSpPr>
+      <p:grpSpPr>
+        <a:xfrm>
+          <a:off x="0" y="0"/>
+          <a:ext cx="0" cy="0"/>
+          <a:chOff x="0" y="0"/>
+          <a:chExt cx="0" cy="0"/>
+        </a:xfrm>
+      </p:grpSpPr>
+      <p:sp>
+        <p:nvSpPr>
+          <p:cNvPr id="6" name="Title 1">
+            <a:extLst>
+              <a:ext uri="{FF2B5EF4-FFF2-40B4-BE49-F238E27FC236}">
+                <a16:creationId xmlns:a16="http://schemas.microsoft.com/office/drawing/2014/main" id="{5D825907-CE6B-1159-9140-A70005AE6FBE}"/>
+              </a:ext>
+            </a:extLst>
+          </p:cNvPr>
+          <p:cNvSpPr txBox="1">
+            <a:spLocks/>
+          </p:cNvSpPr>
+          <p:nvPr/>
+        </p:nvSpPr>
+        <p:spPr>
+          <a:xfrm>
+            <a:off x="472696" y="266915"/>
+            <a:ext cx="10515600" cy="535803"/>
+          </a:xfrm>
+          <a:prstGeom prst="rect">
+            <a:avLst/>
+          </a:prstGeom>
+        </p:spPr>
+        <p:txBody>
+          <a:bodyPr/>
+          <a:lstStyle>
+            <a:lvl1pPr algn="l" defTabSz="914400" rtl="0" eaLnBrk="1" latinLnBrk="0" hangingPunct="1">
+              <a:lnSpc>
+                <a:spcPct val="90000"/>
+              </a:lnSpc>
+              <a:spcBef>
+                <a:spcPct val="0"/>
+              </a:spcBef>
+              <a:buNone/>
+              <a:defRPr sz="4400" kern="1200">
+                <a:solidFill>
+                  <a:schemeClr val="tx1"/>
+                </a:solidFill>
+                <a:latin typeface="+mj-lt"/>
+                <a:ea typeface="+mj-ea"/>
+                <a:cs typeface="+mj-cs"/>
+              </a:defRPr>
+            </a:lvl1pPr>
+          </a:lstStyle>
+          <a:p>
+            <a:r>
+              <a:rPr lang="de-DE" sz="3200" dirty="0"/>
+              <a:t>Response Misreporting</a:t>
+            </a:r>
+            <a:endParaRPr lang="LID4096" sz="3200" dirty="0"/>
+          </a:p>
+        </p:txBody>
+      </p:sp>
+      <mc:AlternateContent xmlns:mc="http://schemas.openxmlformats.org/markup-compatibility/2006">
+        <mc:Choice xmlns:a14="http://schemas.microsoft.com/office/drawing/2010/main" Requires="a14">
+          <p:sp>
+            <p:nvSpPr>
+              <p:cNvPr id="7" name="TextBox 6">
+                <a:extLst>
+                  <a:ext uri="{FF2B5EF4-FFF2-40B4-BE49-F238E27FC236}">
+                    <a16:creationId xmlns:a16="http://schemas.microsoft.com/office/drawing/2014/main" id="{DDB26B69-5D83-B646-9B3D-3A00871B10D7}"/>
+                  </a:ext>
+                </a:extLst>
+              </p:cNvPr>
+              <p:cNvSpPr txBox="1"/>
+              <p:nvPr/>
+            </p:nvSpPr>
+            <p:spPr>
+              <a:xfrm>
+                <a:off x="472696" y="1159223"/>
+                <a:ext cx="11099872" cy="1713354"/>
+              </a:xfrm>
+              <a:prstGeom prst="rect">
+                <a:avLst/>
+              </a:prstGeom>
+              <a:noFill/>
+            </p:spPr>
+            <p:txBody>
+              <a:bodyPr wrap="square" rtlCol="0">
+                <a:spAutoFit/>
+              </a:bodyPr>
+              <a:lstStyle/>
+              <a:p>
+                <a:pPr marL="285750" indent="-285750">
+                  <a:lnSpc>
+                    <a:spcPct val="150000"/>
+                  </a:lnSpc>
+                  <a:buFont typeface="Arial" panose="020B0604020202020204" pitchFamily="34" charset="0"/>
+                  <a:buChar char="•"/>
+                </a:pPr>
+                <a:r>
+                  <a:rPr lang="de-DE" b="1" dirty="0"/>
+                  <a:t>parameters</a:t>
+                </a:r>
+                <a:r>
+                  <a:rPr lang="de-DE" dirty="0"/>
+                  <a:t>: </a:t>
+                </a:r>
+                <a:r>
+                  <a:rPr lang="en-US" dirty="0" err="1">
+                    <a:latin typeface="Consolas" panose="020B0609020204030204" pitchFamily="49" charset="0"/>
+                  </a:rPr>
+                  <a:t>misreporting_agents_ratio</a:t>
+                </a:r>
+                <a:r>
+                  <a:rPr lang="en-US" dirty="0">
+                    <a:latin typeface="Consolas" panose="020B0609020204030204" pitchFamily="49" charset="0"/>
+                  </a:rPr>
+                  <a:t>, </a:t>
+                </a:r>
+                <a:r>
+                  <a:rPr lang="en-US" dirty="0" err="1">
+                    <a:latin typeface="Consolas" panose="020B0609020204030204" pitchFamily="49" charset="0"/>
+                  </a:rPr>
+                  <a:t>misreporting_agents_estimate_relative</a:t>
+                </a:r>
+                <a:endParaRPr lang="de-DE" dirty="0">
+                  <a:latin typeface="Consolas" panose="020B0609020204030204" pitchFamily="49" charset="0"/>
+                </a:endParaRPr>
+              </a:p>
+              <a:p>
+                <a:pPr marL="285750" indent="-285750">
+                  <a:lnSpc>
+                    <a:spcPct val="150000"/>
+                  </a:lnSpc>
+                  <a:buFont typeface="Arial" panose="020B0604020202020204" pitchFamily="34" charset="0"/>
+                  <a:buChar char="•"/>
+                </a:pPr>
+                <a:r>
+                  <a:rPr lang="en-US" b="1" dirty="0"/>
+                  <a:t>Idea</a:t>
+                </a:r>
+                <a:r>
+                  <a:rPr lang="en-US" dirty="0"/>
+                  <a:t>: each agent reports an untruthfully low value as </a:t>
+                </a:r>
+                <a14:m>
+                  <m:oMath xmlns:m="http://schemas.openxmlformats.org/officeDocument/2006/math">
+                    <m:r>
+                      <m:rPr>
+                        <m:sty m:val="p"/>
+                      </m:rPr>
+                      <a:rPr lang="de-DE" b="0" i="1" smtClean="0">
+                        <a:latin typeface="Cambria Math" panose="02040503050406030204" pitchFamily="18" charset="0"/>
+                      </a:rPr>
+                      <m:t>Δ</m:t>
+                    </m:r>
+                  </m:oMath>
+                </a14:m>
+                <a:endParaRPr lang="en-US" dirty="0"/>
+              </a:p>
+              <a:p>
+                <a:pPr marL="285750" indent="-285750">
+                  <a:lnSpc>
+                    <a:spcPct val="150000"/>
+                  </a:lnSpc>
+                  <a:buFont typeface="Arial" panose="020B0604020202020204" pitchFamily="34" charset="0"/>
+                  <a:buChar char="•"/>
+                </a:pPr>
+                <a:r>
+                  <a:rPr lang="en-US" b="1" dirty="0"/>
+                  <a:t>Implementation</a:t>
+                </a:r>
+                <a:r>
+                  <a:rPr lang="en-US" dirty="0"/>
+                  <a:t>: set the own estimate (epoch-average of rewards) to </a:t>
+                </a:r>
+                <a:r>
+                  <a:rPr lang="en-US" dirty="0" err="1">
+                    <a:latin typeface="Consolas" panose="020B0609020204030204" pitchFamily="49" charset="0"/>
+                  </a:rPr>
+                  <a:t>misreporting_agents_estimate_relative</a:t>
+                </a:r>
+                <a:r>
+                  <a:rPr lang="en-US" dirty="0"/>
+                  <a:t> times the lowest reward sent as a request to said agent</a:t>
+                </a:r>
+              </a:p>
+            </p:txBody>
+          </p:sp>
+        </mc:Choice>
+        <mc:Fallback>
+          <p:sp>
+            <p:nvSpPr>
+              <p:cNvPr id="7" name="TextBox 6">
+                <a:extLst>
+                  <a:ext uri="{FF2B5EF4-FFF2-40B4-BE49-F238E27FC236}">
+                    <a16:creationId xmlns:a16="http://schemas.microsoft.com/office/drawing/2014/main" id="{DDB26B69-5D83-B646-9B3D-3A00871B10D7}"/>
+                  </a:ext>
+                </a:extLst>
+              </p:cNvPr>
+              <p:cNvSpPr txBox="1">
+                <a:spLocks noRot="1" noChangeAspect="1" noMove="1" noResize="1" noEditPoints="1" noAdjustHandles="1" noChangeArrowheads="1" noChangeShapeType="1" noTextEdit="1"/>
+              </p:cNvSpPr>
+              <p:nvPr/>
+            </p:nvSpPr>
+            <p:spPr>
+              <a:xfrm>
+                <a:off x="472696" y="1159223"/>
+                <a:ext cx="11099872" cy="1713354"/>
+              </a:xfrm>
+              <a:prstGeom prst="rect">
+                <a:avLst/>
+              </a:prstGeom>
+              <a:blipFill>
+                <a:blip r:embed="rId3"/>
+                <a:stretch>
+                  <a:fillRect l="-385" b="-4982"/>
+                </a:stretch>
+              </a:blipFill>
+            </p:spPr>
+            <p:txBody>
+              <a:bodyPr/>
+              <a:lstStyle/>
+              <a:p>
+                <a:r>
+                  <a:rPr lang="en-US">
+                    <a:noFill/>
+                  </a:rPr>
+                  <a:t> </a:t>
+                </a:r>
+              </a:p>
+            </p:txBody>
+          </p:sp>
+        </mc:Fallback>
+      </mc:AlternateContent>
+      <p:pic>
+        <p:nvPicPr>
+          <p:cNvPr id="3" name="Picture 2">
+            <a:extLst>
+              <a:ext uri="{FF2B5EF4-FFF2-40B4-BE49-F238E27FC236}">
+                <a16:creationId xmlns:a16="http://schemas.microsoft.com/office/drawing/2014/main" id="{27532968-35AB-43C0-8A54-DE8C2305614D}"/>
+              </a:ext>
+            </a:extLst>
+          </p:cNvPr>
+          <p:cNvPicPr>
+            <a:picLocks noChangeAspect="1"/>
+          </p:cNvPicPr>
+          <p:nvPr/>
+        </p:nvPicPr>
+        <p:blipFill>
+          <a:blip r:embed="rId4"/>
+          <a:stretch>
+            <a:fillRect/>
+          </a:stretch>
+        </p:blipFill>
+        <p:spPr>
+          <a:xfrm>
+            <a:off x="472696" y="2961067"/>
+            <a:ext cx="8551640" cy="3498726"/>
+          </a:xfrm>
+          <a:prstGeom prst="rect">
+            <a:avLst/>
+          </a:prstGeom>
+        </p:spPr>
+      </p:pic>
+    </p:spTree>
+    <p:extLst>
+      <p:ext uri="{BB962C8B-B14F-4D97-AF65-F5344CB8AC3E}">
+        <p14:creationId xmlns:p14="http://schemas.microsoft.com/office/powerpoint/2010/main" val="894993152"/>
       </p:ext>
     </p:extLst>
   </p:cSld>

--- a/Master Thesis Updates.pptx
+++ b/Master Thesis Updates.pptx
@@ -5349,7 +5349,7 @@
             </a:r>
           </a:p>
           <a:p>
-            <a:pPr marL="285750" indent="-285750">
+            <a:pPr marL="742950" lvl="1" indent="-285750">
               <a:lnSpc>
                 <a:spcPct val="150000"/>
               </a:lnSpc>
@@ -5357,12 +5357,16 @@
               <a:buChar char="•"/>
             </a:pPr>
             <a:r>
+              <a:rPr lang="de-DE" b="1" dirty="0"/>
+              <a:t>MATE</a:t>
+            </a:r>
+            <a:r>
               <a:rPr lang="de-DE" dirty="0"/>
-              <a:t>MATE: fixed Token</a:t>
-            </a:r>
-          </a:p>
-          <a:p>
-            <a:pPr marL="285750" indent="-285750">
+              <a:t>: fixed Token</a:t>
+            </a:r>
+          </a:p>
+          <a:p>
+            <a:pPr marL="742950" lvl="1" indent="-285750">
               <a:lnSpc>
                 <a:spcPct val="150000"/>
               </a:lnSpc>
@@ -5370,8 +5374,12 @@
               <a:buChar char="•"/>
             </a:pPr>
             <a:r>
+              <a:rPr lang="de-DE" b="1" dirty="0"/>
+              <a:t>DRIVE</a:t>
+            </a:r>
+            <a:r>
               <a:rPr lang="de-DE" dirty="0"/>
-              <a:t>DRIVE: Token dependent on Epoch-Average Rewards</a:t>
+              <a:t>: Token dependent on Epoch-Average Rewards</a:t>
             </a:r>
             <a:endParaRPr lang="en-US" dirty="0"/>
           </a:p>
@@ -5542,42 +5550,6 @@
           </p:spPr>
         </p:pic>
       </p:grpSp>
-      <p:pic>
-        <p:nvPicPr>
-          <p:cNvPr id="31" name="Graphic 30" descr="User with solid fill">
-            <a:extLst>
-              <a:ext uri="{FF2B5EF4-FFF2-40B4-BE49-F238E27FC236}">
-                <a16:creationId xmlns:a16="http://schemas.microsoft.com/office/drawing/2014/main" id="{9FF722CB-568D-01C6-C492-95B7FDAE03CB}"/>
-              </a:ext>
-            </a:extLst>
-          </p:cNvPr>
-          <p:cNvPicPr>
-            <a:picLocks noChangeAspect="1"/>
-          </p:cNvPicPr>
-          <p:nvPr/>
-        </p:nvPicPr>
-        <p:blipFill>
-          <a:blip r:embed="rId3">
-            <a:extLst>
-              <a:ext uri="{96DAC541-7B7A-43D3-8B79-37D633B846F1}">
-                <asvg:svgBlip xmlns:asvg="http://schemas.microsoft.com/office/drawing/2016/SVG/main" r:embed="rId4"/>
-              </a:ext>
-            </a:extLst>
-          </a:blip>
-          <a:stretch>
-            <a:fillRect/>
-          </a:stretch>
-        </p:blipFill>
-        <p:spPr>
-          <a:xfrm>
-            <a:off x="6705600" y="5241577"/>
-            <a:ext cx="914400" cy="914400"/>
-          </a:xfrm>
-          <a:prstGeom prst="rect">
-            <a:avLst/>
-          </a:prstGeom>
-        </p:spPr>
-      </p:pic>
       <mc:AlternateContent xmlns:mc="http://schemas.openxmlformats.org/markup-compatibility/2006">
         <mc:Choice xmlns:a14="http://schemas.microsoft.com/office/drawing/2010/main" Requires="a14">
           <p:sp>
@@ -5831,732 +5803,789 @@
           </a:fontRef>
         </p:style>
       </p:cxnSp>
-      <p:pic>
-        <p:nvPicPr>
-          <p:cNvPr id="41" name="Graphic 40" descr="User with solid fill">
-            <a:extLst>
-              <a:ext uri="{FF2B5EF4-FFF2-40B4-BE49-F238E27FC236}">
-                <a16:creationId xmlns:a16="http://schemas.microsoft.com/office/drawing/2014/main" id="{7F664D65-E4B8-88D9-C726-B496D078FB82}"/>
-              </a:ext>
-            </a:extLst>
-          </p:cNvPr>
-          <p:cNvPicPr>
-            <a:picLocks noChangeAspect="1"/>
-          </p:cNvPicPr>
+      <p:grpSp>
+        <p:nvGrpSpPr>
+          <p:cNvPr id="97" name="Group 96">
+            <a:extLst>
+              <a:ext uri="{FF2B5EF4-FFF2-40B4-BE49-F238E27FC236}">
+                <a16:creationId xmlns:a16="http://schemas.microsoft.com/office/drawing/2014/main" id="{F936398D-03F1-CBA6-5455-F915720A24B7}"/>
+              </a:ext>
+            </a:extLst>
+          </p:cNvPr>
+          <p:cNvGrpSpPr/>
           <p:nvPr/>
-        </p:nvPicPr>
-        <p:blipFill>
-          <a:blip r:embed="rId3">
-            <a:extLst>
-              <a:ext uri="{96DAC541-7B7A-43D3-8B79-37D633B846F1}">
-                <asvg:svgBlip xmlns:asvg="http://schemas.microsoft.com/office/drawing/2016/SVG/main" r:embed="rId4"/>
-              </a:ext>
-            </a:extLst>
-          </a:blip>
-          <a:stretch>
-            <a:fillRect/>
-          </a:stretch>
-        </p:blipFill>
-        <p:spPr>
+        </p:nvGrpSpPr>
+        <p:grpSpPr>
           <a:xfrm>
-            <a:off x="8255000" y="5241577"/>
-            <a:ext cx="914400" cy="914400"/>
+            <a:off x="6551234" y="3211491"/>
+            <a:ext cx="3782430" cy="2930108"/>
+            <a:chOff x="6096000" y="3225869"/>
+            <a:chExt cx="3782430" cy="2930108"/>
           </a:xfrm>
-          <a:prstGeom prst="rect">
-            <a:avLst/>
-          </a:prstGeom>
-        </p:spPr>
-      </p:pic>
-      <p:pic>
-        <p:nvPicPr>
-          <p:cNvPr id="42" name="Graphic 41" descr="User with solid fill">
-            <a:extLst>
-              <a:ext uri="{FF2B5EF4-FFF2-40B4-BE49-F238E27FC236}">
-                <a16:creationId xmlns:a16="http://schemas.microsoft.com/office/drawing/2014/main" id="{D8FFB9B9-D58B-D44C-2A3F-F7EC6C898DD3}"/>
-              </a:ext>
-            </a:extLst>
-          </p:cNvPr>
-          <p:cNvPicPr>
-            <a:picLocks noChangeAspect="1"/>
-          </p:cNvPicPr>
-          <p:nvPr/>
-        </p:nvPicPr>
-        <p:blipFill>
-          <a:blip r:embed="rId3">
-            <a:extLst>
-              <a:ext uri="{96DAC541-7B7A-43D3-8B79-37D633B846F1}">
-                <asvg:svgBlip xmlns:asvg="http://schemas.microsoft.com/office/drawing/2016/SVG/main" r:embed="rId4"/>
-              </a:ext>
-            </a:extLst>
-          </a:blip>
-          <a:stretch>
-            <a:fillRect/>
-          </a:stretch>
-        </p:blipFill>
-        <p:spPr>
-          <a:xfrm>
-            <a:off x="8964030" y="4178300"/>
-            <a:ext cx="914400" cy="914400"/>
-          </a:xfrm>
-          <a:prstGeom prst="rect">
-            <a:avLst/>
-          </a:prstGeom>
-        </p:spPr>
-      </p:pic>
-      <p:pic>
-        <p:nvPicPr>
-          <p:cNvPr id="43" name="Graphic 42" descr="User with solid fill">
-            <a:extLst>
-              <a:ext uri="{FF2B5EF4-FFF2-40B4-BE49-F238E27FC236}">
-                <a16:creationId xmlns:a16="http://schemas.microsoft.com/office/drawing/2014/main" id="{0B8D36BD-5170-0B8C-08C8-17F8B3F8F12A}"/>
-              </a:ext>
-            </a:extLst>
-          </p:cNvPr>
-          <p:cNvPicPr>
-            <a:picLocks noChangeAspect="1"/>
-          </p:cNvPicPr>
-          <p:nvPr/>
-        </p:nvPicPr>
-        <p:blipFill>
-          <a:blip r:embed="rId3">
-            <a:extLst>
-              <a:ext uri="{96DAC541-7B7A-43D3-8B79-37D633B846F1}">
-                <asvg:svgBlip xmlns:asvg="http://schemas.microsoft.com/office/drawing/2016/SVG/main" r:embed="rId4"/>
-              </a:ext>
-            </a:extLst>
-          </a:blip>
-          <a:stretch>
-            <a:fillRect/>
-          </a:stretch>
-        </p:blipFill>
-        <p:spPr>
-          <a:xfrm>
-            <a:off x="6096000" y="4163000"/>
-            <a:ext cx="914400" cy="914400"/>
-          </a:xfrm>
-          <a:prstGeom prst="rect">
-            <a:avLst/>
-          </a:prstGeom>
-        </p:spPr>
-      </p:pic>
-      <p:pic>
-        <p:nvPicPr>
-          <p:cNvPr id="44" name="Graphic 43" descr="User with solid fill">
-            <a:extLst>
-              <a:ext uri="{FF2B5EF4-FFF2-40B4-BE49-F238E27FC236}">
-                <a16:creationId xmlns:a16="http://schemas.microsoft.com/office/drawing/2014/main" id="{D8D61594-BFEA-094C-230A-0E289CE6CF42}"/>
-              </a:ext>
-            </a:extLst>
-          </p:cNvPr>
-          <p:cNvPicPr>
-            <a:picLocks noChangeAspect="1"/>
-          </p:cNvPicPr>
-          <p:nvPr/>
-        </p:nvPicPr>
-        <p:blipFill>
-          <a:blip r:embed="rId3">
-            <a:extLst>
-              <a:ext uri="{96DAC541-7B7A-43D3-8B79-37D633B846F1}">
-                <asvg:svgBlip xmlns:asvg="http://schemas.microsoft.com/office/drawing/2016/SVG/main" r:embed="rId4"/>
-              </a:ext>
-            </a:extLst>
-          </a:blip>
-          <a:stretch>
-            <a:fillRect/>
-          </a:stretch>
-        </p:blipFill>
-        <p:spPr>
-          <a:xfrm>
-            <a:off x="6896100" y="3225869"/>
-            <a:ext cx="914400" cy="914400"/>
-          </a:xfrm>
-          <a:prstGeom prst="rect">
-            <a:avLst/>
-          </a:prstGeom>
-        </p:spPr>
-      </p:pic>
-      <p:pic>
-        <p:nvPicPr>
-          <p:cNvPr id="45" name="Graphic 44" descr="User with solid fill">
-            <a:extLst>
-              <a:ext uri="{FF2B5EF4-FFF2-40B4-BE49-F238E27FC236}">
-                <a16:creationId xmlns:a16="http://schemas.microsoft.com/office/drawing/2014/main" id="{62F1B484-6767-026B-823C-EA7466B2C209}"/>
-              </a:ext>
-            </a:extLst>
-          </p:cNvPr>
-          <p:cNvPicPr>
-            <a:picLocks noChangeAspect="1"/>
-          </p:cNvPicPr>
-          <p:nvPr/>
-        </p:nvPicPr>
-        <p:blipFill>
-          <a:blip r:embed="rId3">
-            <a:extLst>
-              <a:ext uri="{96DAC541-7B7A-43D3-8B79-37D633B846F1}">
-                <asvg:svgBlip xmlns:asvg="http://schemas.microsoft.com/office/drawing/2016/SVG/main" r:embed="rId4"/>
-              </a:ext>
-            </a:extLst>
-          </a:blip>
-          <a:stretch>
-            <a:fillRect/>
-          </a:stretch>
-        </p:blipFill>
-        <p:spPr>
-          <a:xfrm>
-            <a:off x="8056082" y="3225869"/>
-            <a:ext cx="914400" cy="914400"/>
-          </a:xfrm>
-          <a:prstGeom prst="rect">
-            <a:avLst/>
-          </a:prstGeom>
-        </p:spPr>
-      </p:pic>
-      <p:cxnSp>
-        <p:nvCxnSpPr>
-          <p:cNvPr id="47" name="Straight Connector 46">
-            <a:extLst>
-              <a:ext uri="{FF2B5EF4-FFF2-40B4-BE49-F238E27FC236}">
-                <a16:creationId xmlns:a16="http://schemas.microsoft.com/office/drawing/2014/main" id="{C4FCCFE0-6E57-4167-C640-71925AEEB1CF}"/>
-              </a:ext>
-            </a:extLst>
-          </p:cNvPr>
-          <p:cNvCxnSpPr/>
-          <p:nvPr/>
-        </p:nvCxnSpPr>
-        <p:spPr>
-          <a:xfrm>
-            <a:off x="6553200" y="5092700"/>
-            <a:ext cx="342900" cy="342900"/>
-          </a:xfrm>
-          <a:prstGeom prst="line">
-            <a:avLst/>
-          </a:prstGeom>
-        </p:spPr>
-        <p:style>
-          <a:lnRef idx="2">
-            <a:schemeClr val="accent1"/>
-          </a:lnRef>
-          <a:fillRef idx="0">
-            <a:schemeClr val="accent1"/>
-          </a:fillRef>
-          <a:effectRef idx="1">
-            <a:schemeClr val="accent1"/>
-          </a:effectRef>
-          <a:fontRef idx="minor">
-            <a:schemeClr val="tx1"/>
-          </a:fontRef>
-        </p:style>
-      </p:cxnSp>
-      <p:cxnSp>
-        <p:nvCxnSpPr>
-          <p:cNvPr id="49" name="Straight Connector 48">
-            <a:extLst>
-              <a:ext uri="{FF2B5EF4-FFF2-40B4-BE49-F238E27FC236}">
-                <a16:creationId xmlns:a16="http://schemas.microsoft.com/office/drawing/2014/main" id="{7004FB71-6676-B8EE-1E9C-C3780829E722}"/>
-              </a:ext>
-            </a:extLst>
-          </p:cNvPr>
-          <p:cNvCxnSpPr/>
-          <p:nvPr/>
-        </p:nvCxnSpPr>
-        <p:spPr>
-          <a:xfrm flipV="1">
-            <a:off x="6553200" y="3835400"/>
-            <a:ext cx="342900" cy="304869"/>
-          </a:xfrm>
-          <a:prstGeom prst="line">
-            <a:avLst/>
-          </a:prstGeom>
-        </p:spPr>
-        <p:style>
-          <a:lnRef idx="2">
-            <a:schemeClr val="accent1"/>
-          </a:lnRef>
-          <a:fillRef idx="0">
-            <a:schemeClr val="accent1"/>
-          </a:fillRef>
-          <a:effectRef idx="1">
-            <a:schemeClr val="accent1"/>
-          </a:effectRef>
-          <a:fontRef idx="minor">
-            <a:schemeClr val="tx1"/>
-          </a:fontRef>
-        </p:style>
-      </p:cxnSp>
-      <p:cxnSp>
-        <p:nvCxnSpPr>
-          <p:cNvPr id="51" name="Straight Connector 50">
-            <a:extLst>
-              <a:ext uri="{FF2B5EF4-FFF2-40B4-BE49-F238E27FC236}">
-                <a16:creationId xmlns:a16="http://schemas.microsoft.com/office/drawing/2014/main" id="{30C9B77F-658A-F104-D93D-409820D0192D}"/>
-              </a:ext>
-            </a:extLst>
-          </p:cNvPr>
-          <p:cNvCxnSpPr/>
-          <p:nvPr/>
-        </p:nvCxnSpPr>
-        <p:spPr>
-          <a:xfrm>
-            <a:off x="7620000" y="3683069"/>
-            <a:ext cx="546100" cy="0"/>
-          </a:xfrm>
-          <a:prstGeom prst="line">
-            <a:avLst/>
-          </a:prstGeom>
-        </p:spPr>
-        <p:style>
-          <a:lnRef idx="2">
-            <a:schemeClr val="accent1"/>
-          </a:lnRef>
-          <a:fillRef idx="0">
-            <a:schemeClr val="accent1"/>
-          </a:fillRef>
-          <a:effectRef idx="1">
-            <a:schemeClr val="accent1"/>
-          </a:effectRef>
-          <a:fontRef idx="minor">
-            <a:schemeClr val="tx1"/>
-          </a:fontRef>
-        </p:style>
-      </p:cxnSp>
-      <p:cxnSp>
-        <p:nvCxnSpPr>
-          <p:cNvPr id="53" name="Straight Connector 52">
-            <a:extLst>
-              <a:ext uri="{FF2B5EF4-FFF2-40B4-BE49-F238E27FC236}">
-                <a16:creationId xmlns:a16="http://schemas.microsoft.com/office/drawing/2014/main" id="{4E25B25B-6E20-61E0-9242-5B5D9858085D}"/>
-              </a:ext>
-            </a:extLst>
-          </p:cNvPr>
-          <p:cNvCxnSpPr>
-            <a:cxnSpLocks/>
-          </p:cNvCxnSpPr>
-          <p:nvPr/>
-        </p:nvCxnSpPr>
-        <p:spPr>
-          <a:xfrm>
-            <a:off x="8964030" y="4077037"/>
-            <a:ext cx="205370" cy="253663"/>
-          </a:xfrm>
-          <a:prstGeom prst="line">
-            <a:avLst/>
-          </a:prstGeom>
-        </p:spPr>
-        <p:style>
-          <a:lnRef idx="2">
-            <a:schemeClr val="accent1"/>
-          </a:lnRef>
-          <a:fillRef idx="0">
-            <a:schemeClr val="accent1"/>
-          </a:fillRef>
-          <a:effectRef idx="1">
-            <a:schemeClr val="accent1"/>
-          </a:effectRef>
-          <a:fontRef idx="minor">
-            <a:schemeClr val="tx1"/>
-          </a:fontRef>
-        </p:style>
-      </p:cxnSp>
-      <p:cxnSp>
-        <p:nvCxnSpPr>
-          <p:cNvPr id="57" name="Straight Connector 56">
-            <a:extLst>
-              <a:ext uri="{FF2B5EF4-FFF2-40B4-BE49-F238E27FC236}">
-                <a16:creationId xmlns:a16="http://schemas.microsoft.com/office/drawing/2014/main" id="{E5E9374E-4075-CA26-D092-2600596395C5}"/>
-              </a:ext>
-            </a:extLst>
-          </p:cNvPr>
-          <p:cNvCxnSpPr/>
-          <p:nvPr/>
-        </p:nvCxnSpPr>
-        <p:spPr>
-          <a:xfrm>
-            <a:off x="7620000" y="5698777"/>
-            <a:ext cx="635000" cy="0"/>
-          </a:xfrm>
-          <a:prstGeom prst="line">
-            <a:avLst/>
-          </a:prstGeom>
-        </p:spPr>
-        <p:style>
-          <a:lnRef idx="2">
-            <a:schemeClr val="accent1"/>
-          </a:lnRef>
-          <a:fillRef idx="0">
-            <a:schemeClr val="accent1"/>
-          </a:fillRef>
-          <a:effectRef idx="1">
-            <a:schemeClr val="accent1"/>
-          </a:effectRef>
-          <a:fontRef idx="minor">
-            <a:schemeClr val="tx1"/>
-          </a:fontRef>
-        </p:style>
-      </p:cxnSp>
-      <p:cxnSp>
-        <p:nvCxnSpPr>
-          <p:cNvPr id="59" name="Straight Connector 58">
-            <a:extLst>
-              <a:ext uri="{FF2B5EF4-FFF2-40B4-BE49-F238E27FC236}">
-                <a16:creationId xmlns:a16="http://schemas.microsoft.com/office/drawing/2014/main" id="{9919E3AD-FF38-2CD1-E313-E5F249217812}"/>
-              </a:ext>
-            </a:extLst>
-          </p:cNvPr>
-          <p:cNvCxnSpPr/>
-          <p:nvPr/>
-        </p:nvCxnSpPr>
-        <p:spPr>
-          <a:xfrm flipV="1">
-            <a:off x="8964030" y="5092700"/>
-            <a:ext cx="457200" cy="457200"/>
-          </a:xfrm>
-          <a:prstGeom prst="line">
-            <a:avLst/>
-          </a:prstGeom>
-        </p:spPr>
-        <p:style>
-          <a:lnRef idx="2">
-            <a:schemeClr val="accent1"/>
-          </a:lnRef>
-          <a:fillRef idx="0">
-            <a:schemeClr val="accent1"/>
-          </a:fillRef>
-          <a:effectRef idx="1">
-            <a:schemeClr val="accent1"/>
-          </a:effectRef>
-          <a:fontRef idx="minor">
-            <a:schemeClr val="tx1"/>
-          </a:fontRef>
-        </p:style>
-      </p:cxnSp>
-      <p:cxnSp>
-        <p:nvCxnSpPr>
-          <p:cNvPr id="61" name="Straight Connector 60">
-            <a:extLst>
-              <a:ext uri="{FF2B5EF4-FFF2-40B4-BE49-F238E27FC236}">
-                <a16:creationId xmlns:a16="http://schemas.microsoft.com/office/drawing/2014/main" id="{43BEA83A-2A8E-BE25-E4F3-09E9584E83DE}"/>
-              </a:ext>
-            </a:extLst>
-          </p:cNvPr>
-          <p:cNvCxnSpPr/>
-          <p:nvPr/>
-        </p:nvCxnSpPr>
-        <p:spPr>
-          <a:xfrm flipV="1">
-            <a:off x="7010400" y="4620200"/>
-            <a:ext cx="1960082" cy="15300"/>
-          </a:xfrm>
-          <a:prstGeom prst="line">
-            <a:avLst/>
-          </a:prstGeom>
-        </p:spPr>
-        <p:style>
-          <a:lnRef idx="2">
-            <a:schemeClr val="accent1"/>
-          </a:lnRef>
-          <a:fillRef idx="0">
-            <a:schemeClr val="accent1"/>
-          </a:fillRef>
-          <a:effectRef idx="1">
-            <a:schemeClr val="accent1"/>
-          </a:effectRef>
-          <a:fontRef idx="minor">
-            <a:schemeClr val="tx1"/>
-          </a:fontRef>
-        </p:style>
-      </p:cxnSp>
-      <p:cxnSp>
-        <p:nvCxnSpPr>
-          <p:cNvPr id="63" name="Straight Connector 62">
-            <a:extLst>
-              <a:ext uri="{FF2B5EF4-FFF2-40B4-BE49-F238E27FC236}">
-                <a16:creationId xmlns:a16="http://schemas.microsoft.com/office/drawing/2014/main" id="{4F6A3862-9618-78FF-E568-4B89D8344370}"/>
-              </a:ext>
-            </a:extLst>
-          </p:cNvPr>
-          <p:cNvCxnSpPr>
-            <a:endCxn id="31" idx="0"/>
-          </p:cNvCxnSpPr>
-          <p:nvPr/>
-        </p:nvCxnSpPr>
-        <p:spPr>
-          <a:xfrm flipH="1">
-            <a:off x="7162800" y="4140269"/>
-            <a:ext cx="190500" cy="1101308"/>
-          </a:xfrm>
-          <a:prstGeom prst="line">
-            <a:avLst/>
-          </a:prstGeom>
-        </p:spPr>
-        <p:style>
-          <a:lnRef idx="2">
-            <a:schemeClr val="accent1"/>
-          </a:lnRef>
-          <a:fillRef idx="0">
-            <a:schemeClr val="accent1"/>
-          </a:fillRef>
-          <a:effectRef idx="1">
-            <a:schemeClr val="accent1"/>
-          </a:effectRef>
-          <a:fontRef idx="minor">
-            <a:schemeClr val="tx1"/>
-          </a:fontRef>
-        </p:style>
-      </p:cxnSp>
-      <p:cxnSp>
-        <p:nvCxnSpPr>
-          <p:cNvPr id="65" name="Straight Connector 64">
-            <a:extLst>
-              <a:ext uri="{FF2B5EF4-FFF2-40B4-BE49-F238E27FC236}">
-                <a16:creationId xmlns:a16="http://schemas.microsoft.com/office/drawing/2014/main" id="{AF938ED8-D8B6-8183-C0F0-95BF4740B08A}"/>
-              </a:ext>
-            </a:extLst>
-          </p:cNvPr>
-          <p:cNvCxnSpPr>
-            <a:endCxn id="41" idx="0"/>
-          </p:cNvCxnSpPr>
-          <p:nvPr/>
-        </p:nvCxnSpPr>
-        <p:spPr>
-          <a:xfrm>
-            <a:off x="8513282" y="4163000"/>
-            <a:ext cx="198918" cy="1078577"/>
-          </a:xfrm>
-          <a:prstGeom prst="line">
-            <a:avLst/>
-          </a:prstGeom>
-        </p:spPr>
-        <p:style>
-          <a:lnRef idx="2">
-            <a:schemeClr val="accent1"/>
-          </a:lnRef>
-          <a:fillRef idx="0">
-            <a:schemeClr val="accent1"/>
-          </a:fillRef>
-          <a:effectRef idx="1">
-            <a:schemeClr val="accent1"/>
-          </a:effectRef>
-          <a:fontRef idx="minor">
-            <a:schemeClr val="tx1"/>
-          </a:fontRef>
-        </p:style>
-      </p:cxnSp>
-      <p:cxnSp>
-        <p:nvCxnSpPr>
-          <p:cNvPr id="67" name="Straight Connector 66">
-            <a:extLst>
-              <a:ext uri="{FF2B5EF4-FFF2-40B4-BE49-F238E27FC236}">
-                <a16:creationId xmlns:a16="http://schemas.microsoft.com/office/drawing/2014/main" id="{CE89F903-7A65-A880-3C60-706DE8CA61CE}"/>
-              </a:ext>
-            </a:extLst>
-          </p:cNvPr>
-          <p:cNvCxnSpPr/>
-          <p:nvPr/>
-        </p:nvCxnSpPr>
-        <p:spPr>
-          <a:xfrm flipV="1">
-            <a:off x="7162800" y="4203868"/>
-            <a:ext cx="1350482" cy="1037709"/>
-          </a:xfrm>
-          <a:prstGeom prst="line">
-            <a:avLst/>
-          </a:prstGeom>
-        </p:spPr>
-        <p:style>
-          <a:lnRef idx="2">
-            <a:schemeClr val="accent1"/>
-          </a:lnRef>
-          <a:fillRef idx="0">
-            <a:schemeClr val="accent1"/>
-          </a:fillRef>
-          <a:effectRef idx="1">
-            <a:schemeClr val="accent1"/>
-          </a:effectRef>
-          <a:fontRef idx="minor">
-            <a:schemeClr val="tx1"/>
-          </a:fontRef>
-        </p:style>
-      </p:cxnSp>
-      <p:cxnSp>
-        <p:nvCxnSpPr>
-          <p:cNvPr id="69" name="Straight Connector 68">
-            <a:extLst>
-              <a:ext uri="{FF2B5EF4-FFF2-40B4-BE49-F238E27FC236}">
-                <a16:creationId xmlns:a16="http://schemas.microsoft.com/office/drawing/2014/main" id="{991034F7-DB30-5AEA-5FF5-E1BDD1461654}"/>
-              </a:ext>
-            </a:extLst>
-          </p:cNvPr>
-          <p:cNvCxnSpPr/>
-          <p:nvPr/>
-        </p:nvCxnSpPr>
-        <p:spPr>
-          <a:xfrm>
-            <a:off x="7353300" y="4140269"/>
-            <a:ext cx="1358900" cy="1101308"/>
-          </a:xfrm>
-          <a:prstGeom prst="line">
-            <a:avLst/>
-          </a:prstGeom>
-        </p:spPr>
-        <p:style>
-          <a:lnRef idx="2">
-            <a:schemeClr val="accent1"/>
-          </a:lnRef>
-          <a:fillRef idx="0">
-            <a:schemeClr val="accent1"/>
-          </a:fillRef>
-          <a:effectRef idx="1">
-            <a:schemeClr val="accent1"/>
-          </a:effectRef>
-          <a:fontRef idx="minor">
-            <a:schemeClr val="tx1"/>
-          </a:fontRef>
-        </p:style>
-      </p:cxnSp>
-      <p:cxnSp>
-        <p:nvCxnSpPr>
-          <p:cNvPr id="71" name="Straight Connector 70">
-            <a:extLst>
-              <a:ext uri="{FF2B5EF4-FFF2-40B4-BE49-F238E27FC236}">
-                <a16:creationId xmlns:a16="http://schemas.microsoft.com/office/drawing/2014/main" id="{0537732D-EA39-4D07-91EF-7FF4BD7DA88C}"/>
-              </a:ext>
-            </a:extLst>
-          </p:cNvPr>
-          <p:cNvCxnSpPr/>
-          <p:nvPr/>
-        </p:nvCxnSpPr>
-        <p:spPr>
-          <a:xfrm flipV="1">
-            <a:off x="7010400" y="4178300"/>
-            <a:ext cx="1502882" cy="406568"/>
-          </a:xfrm>
-          <a:prstGeom prst="line">
-            <a:avLst/>
-          </a:prstGeom>
-        </p:spPr>
-        <p:style>
-          <a:lnRef idx="2">
-            <a:schemeClr val="accent1"/>
-          </a:lnRef>
-          <a:fillRef idx="0">
-            <a:schemeClr val="accent1"/>
-          </a:fillRef>
-          <a:effectRef idx="1">
-            <a:schemeClr val="accent1"/>
-          </a:effectRef>
-          <a:fontRef idx="minor">
-            <a:schemeClr val="tx1"/>
-          </a:fontRef>
-        </p:style>
-      </p:cxnSp>
-      <p:cxnSp>
-        <p:nvCxnSpPr>
-          <p:cNvPr id="73" name="Straight Connector 72">
-            <a:extLst>
-              <a:ext uri="{FF2B5EF4-FFF2-40B4-BE49-F238E27FC236}">
-                <a16:creationId xmlns:a16="http://schemas.microsoft.com/office/drawing/2014/main" id="{E1F25E61-6595-ACA3-37C1-9C909C316317}"/>
-              </a:ext>
-            </a:extLst>
-          </p:cNvPr>
-          <p:cNvCxnSpPr/>
-          <p:nvPr/>
-        </p:nvCxnSpPr>
-        <p:spPr>
-          <a:xfrm>
-            <a:off x="7353300" y="4140269"/>
-            <a:ext cx="1610730" cy="444599"/>
-          </a:xfrm>
-          <a:prstGeom prst="line">
-            <a:avLst/>
-          </a:prstGeom>
-        </p:spPr>
-        <p:style>
-          <a:lnRef idx="2">
-            <a:schemeClr val="accent1"/>
-          </a:lnRef>
-          <a:fillRef idx="0">
-            <a:schemeClr val="accent1"/>
-          </a:fillRef>
-          <a:effectRef idx="1">
-            <a:schemeClr val="accent1"/>
-          </a:effectRef>
-          <a:fontRef idx="minor">
-            <a:schemeClr val="tx1"/>
-          </a:fontRef>
-        </p:style>
-      </p:cxnSp>
-      <p:cxnSp>
-        <p:nvCxnSpPr>
-          <p:cNvPr id="75" name="Straight Connector 74">
-            <a:extLst>
-              <a:ext uri="{FF2B5EF4-FFF2-40B4-BE49-F238E27FC236}">
-                <a16:creationId xmlns:a16="http://schemas.microsoft.com/office/drawing/2014/main" id="{1511511D-A654-7107-50B0-810C9CFE7440}"/>
-              </a:ext>
-            </a:extLst>
-          </p:cNvPr>
-          <p:cNvCxnSpPr/>
-          <p:nvPr/>
-        </p:nvCxnSpPr>
-        <p:spPr>
-          <a:xfrm flipH="1">
-            <a:off x="7162800" y="4635500"/>
-            <a:ext cx="1801230" cy="606077"/>
-          </a:xfrm>
-          <a:prstGeom prst="line">
-            <a:avLst/>
-          </a:prstGeom>
-        </p:spPr>
-        <p:style>
-          <a:lnRef idx="2">
-            <a:schemeClr val="accent1"/>
-          </a:lnRef>
-          <a:fillRef idx="0">
-            <a:schemeClr val="accent1"/>
-          </a:fillRef>
-          <a:effectRef idx="1">
-            <a:schemeClr val="accent1"/>
-          </a:effectRef>
-          <a:fontRef idx="minor">
-            <a:schemeClr val="tx1"/>
-          </a:fontRef>
-        </p:style>
-      </p:cxnSp>
-      <p:cxnSp>
-        <p:nvCxnSpPr>
-          <p:cNvPr id="77" name="Straight Connector 76">
-            <a:extLst>
-              <a:ext uri="{FF2B5EF4-FFF2-40B4-BE49-F238E27FC236}">
-                <a16:creationId xmlns:a16="http://schemas.microsoft.com/office/drawing/2014/main" id="{25C2D446-BF70-EF84-BCE3-9BD21B8CD0D1}"/>
-              </a:ext>
-            </a:extLst>
-          </p:cNvPr>
-          <p:cNvCxnSpPr/>
-          <p:nvPr/>
-        </p:nvCxnSpPr>
-        <p:spPr>
-          <a:xfrm>
-            <a:off x="7010400" y="4620200"/>
-            <a:ext cx="1701800" cy="621377"/>
-          </a:xfrm>
-          <a:prstGeom prst="line">
-            <a:avLst/>
-          </a:prstGeom>
-        </p:spPr>
-        <p:style>
-          <a:lnRef idx="2">
-            <a:schemeClr val="accent1"/>
-          </a:lnRef>
-          <a:fillRef idx="0">
-            <a:schemeClr val="accent1"/>
-          </a:fillRef>
-          <a:effectRef idx="1">
-            <a:schemeClr val="accent1"/>
-          </a:effectRef>
-          <a:fontRef idx="minor">
-            <a:schemeClr val="tx1"/>
-          </a:fontRef>
-        </p:style>
-      </p:cxnSp>
+        </p:grpSpPr>
+        <p:pic>
+          <p:nvPicPr>
+            <p:cNvPr id="31" name="Graphic 30" descr="User with solid fill">
+              <a:extLst>
+                <a:ext uri="{FF2B5EF4-FFF2-40B4-BE49-F238E27FC236}">
+                  <a16:creationId xmlns:a16="http://schemas.microsoft.com/office/drawing/2014/main" id="{9FF722CB-568D-01C6-C492-95B7FDAE03CB}"/>
+                </a:ext>
+              </a:extLst>
+            </p:cNvPr>
+            <p:cNvPicPr>
+              <a:picLocks noChangeAspect="1"/>
+            </p:cNvPicPr>
+            <p:nvPr/>
+          </p:nvPicPr>
+          <p:blipFill>
+            <a:blip r:embed="rId3">
+              <a:extLst>
+                <a:ext uri="{96DAC541-7B7A-43D3-8B79-37D633B846F1}">
+                  <asvg:svgBlip xmlns:asvg="http://schemas.microsoft.com/office/drawing/2016/SVG/main" r:embed="rId4"/>
+                </a:ext>
+              </a:extLst>
+            </a:blip>
+            <a:stretch>
+              <a:fillRect/>
+            </a:stretch>
+          </p:blipFill>
+          <p:spPr>
+            <a:xfrm>
+              <a:off x="6705600" y="5241577"/>
+              <a:ext cx="914400" cy="914400"/>
+            </a:xfrm>
+            <a:prstGeom prst="rect">
+              <a:avLst/>
+            </a:prstGeom>
+          </p:spPr>
+        </p:pic>
+        <p:pic>
+          <p:nvPicPr>
+            <p:cNvPr id="41" name="Graphic 40" descr="User with solid fill">
+              <a:extLst>
+                <a:ext uri="{FF2B5EF4-FFF2-40B4-BE49-F238E27FC236}">
+                  <a16:creationId xmlns:a16="http://schemas.microsoft.com/office/drawing/2014/main" id="{7F664D65-E4B8-88D9-C726-B496D078FB82}"/>
+                </a:ext>
+              </a:extLst>
+            </p:cNvPr>
+            <p:cNvPicPr>
+              <a:picLocks noChangeAspect="1"/>
+            </p:cNvPicPr>
+            <p:nvPr/>
+          </p:nvPicPr>
+          <p:blipFill>
+            <a:blip r:embed="rId3">
+              <a:extLst>
+                <a:ext uri="{96DAC541-7B7A-43D3-8B79-37D633B846F1}">
+                  <asvg:svgBlip xmlns:asvg="http://schemas.microsoft.com/office/drawing/2016/SVG/main" r:embed="rId4"/>
+                </a:ext>
+              </a:extLst>
+            </a:blip>
+            <a:stretch>
+              <a:fillRect/>
+            </a:stretch>
+          </p:blipFill>
+          <p:spPr>
+            <a:xfrm>
+              <a:off x="8255000" y="5241577"/>
+              <a:ext cx="914400" cy="914400"/>
+            </a:xfrm>
+            <a:prstGeom prst="rect">
+              <a:avLst/>
+            </a:prstGeom>
+          </p:spPr>
+        </p:pic>
+        <p:pic>
+          <p:nvPicPr>
+            <p:cNvPr id="42" name="Graphic 41" descr="User with solid fill">
+              <a:extLst>
+                <a:ext uri="{FF2B5EF4-FFF2-40B4-BE49-F238E27FC236}">
+                  <a16:creationId xmlns:a16="http://schemas.microsoft.com/office/drawing/2014/main" id="{D8FFB9B9-D58B-D44C-2A3F-F7EC6C898DD3}"/>
+                </a:ext>
+              </a:extLst>
+            </p:cNvPr>
+            <p:cNvPicPr>
+              <a:picLocks noChangeAspect="1"/>
+            </p:cNvPicPr>
+            <p:nvPr/>
+          </p:nvPicPr>
+          <p:blipFill>
+            <a:blip r:embed="rId3">
+              <a:extLst>
+                <a:ext uri="{96DAC541-7B7A-43D3-8B79-37D633B846F1}">
+                  <asvg:svgBlip xmlns:asvg="http://schemas.microsoft.com/office/drawing/2016/SVG/main" r:embed="rId4"/>
+                </a:ext>
+              </a:extLst>
+            </a:blip>
+            <a:stretch>
+              <a:fillRect/>
+            </a:stretch>
+          </p:blipFill>
+          <p:spPr>
+            <a:xfrm>
+              <a:off x="8964030" y="4178300"/>
+              <a:ext cx="914400" cy="914400"/>
+            </a:xfrm>
+            <a:prstGeom prst="rect">
+              <a:avLst/>
+            </a:prstGeom>
+          </p:spPr>
+        </p:pic>
+        <p:pic>
+          <p:nvPicPr>
+            <p:cNvPr id="43" name="Graphic 42" descr="User with solid fill">
+              <a:extLst>
+                <a:ext uri="{FF2B5EF4-FFF2-40B4-BE49-F238E27FC236}">
+                  <a16:creationId xmlns:a16="http://schemas.microsoft.com/office/drawing/2014/main" id="{0B8D36BD-5170-0B8C-08C8-17F8B3F8F12A}"/>
+                </a:ext>
+              </a:extLst>
+            </p:cNvPr>
+            <p:cNvPicPr>
+              <a:picLocks noChangeAspect="1"/>
+            </p:cNvPicPr>
+            <p:nvPr/>
+          </p:nvPicPr>
+          <p:blipFill>
+            <a:blip r:embed="rId3">
+              <a:extLst>
+                <a:ext uri="{96DAC541-7B7A-43D3-8B79-37D633B846F1}">
+                  <asvg:svgBlip xmlns:asvg="http://schemas.microsoft.com/office/drawing/2016/SVG/main" r:embed="rId4"/>
+                </a:ext>
+              </a:extLst>
+            </a:blip>
+            <a:stretch>
+              <a:fillRect/>
+            </a:stretch>
+          </p:blipFill>
+          <p:spPr>
+            <a:xfrm>
+              <a:off x="6096000" y="4163000"/>
+              <a:ext cx="914400" cy="914400"/>
+            </a:xfrm>
+            <a:prstGeom prst="rect">
+              <a:avLst/>
+            </a:prstGeom>
+          </p:spPr>
+        </p:pic>
+        <p:pic>
+          <p:nvPicPr>
+            <p:cNvPr id="44" name="Graphic 43" descr="User with solid fill">
+              <a:extLst>
+                <a:ext uri="{FF2B5EF4-FFF2-40B4-BE49-F238E27FC236}">
+                  <a16:creationId xmlns:a16="http://schemas.microsoft.com/office/drawing/2014/main" id="{D8D61594-BFEA-094C-230A-0E289CE6CF42}"/>
+                </a:ext>
+              </a:extLst>
+            </p:cNvPr>
+            <p:cNvPicPr>
+              <a:picLocks noChangeAspect="1"/>
+            </p:cNvPicPr>
+            <p:nvPr/>
+          </p:nvPicPr>
+          <p:blipFill>
+            <a:blip r:embed="rId3">
+              <a:extLst>
+                <a:ext uri="{96DAC541-7B7A-43D3-8B79-37D633B846F1}">
+                  <asvg:svgBlip xmlns:asvg="http://schemas.microsoft.com/office/drawing/2016/SVG/main" r:embed="rId4"/>
+                </a:ext>
+              </a:extLst>
+            </a:blip>
+            <a:stretch>
+              <a:fillRect/>
+            </a:stretch>
+          </p:blipFill>
+          <p:spPr>
+            <a:xfrm>
+              <a:off x="6896100" y="3225869"/>
+              <a:ext cx="914400" cy="914400"/>
+            </a:xfrm>
+            <a:prstGeom prst="rect">
+              <a:avLst/>
+            </a:prstGeom>
+          </p:spPr>
+        </p:pic>
+        <p:pic>
+          <p:nvPicPr>
+            <p:cNvPr id="45" name="Graphic 44" descr="User with solid fill">
+              <a:extLst>
+                <a:ext uri="{FF2B5EF4-FFF2-40B4-BE49-F238E27FC236}">
+                  <a16:creationId xmlns:a16="http://schemas.microsoft.com/office/drawing/2014/main" id="{62F1B484-6767-026B-823C-EA7466B2C209}"/>
+                </a:ext>
+              </a:extLst>
+            </p:cNvPr>
+            <p:cNvPicPr>
+              <a:picLocks noChangeAspect="1"/>
+            </p:cNvPicPr>
+            <p:nvPr/>
+          </p:nvPicPr>
+          <p:blipFill>
+            <a:blip r:embed="rId3">
+              <a:extLst>
+                <a:ext uri="{96DAC541-7B7A-43D3-8B79-37D633B846F1}">
+                  <asvg:svgBlip xmlns:asvg="http://schemas.microsoft.com/office/drawing/2016/SVG/main" r:embed="rId4"/>
+                </a:ext>
+              </a:extLst>
+            </a:blip>
+            <a:stretch>
+              <a:fillRect/>
+            </a:stretch>
+          </p:blipFill>
+          <p:spPr>
+            <a:xfrm>
+              <a:off x="8056082" y="3225869"/>
+              <a:ext cx="914400" cy="914400"/>
+            </a:xfrm>
+            <a:prstGeom prst="rect">
+              <a:avLst/>
+            </a:prstGeom>
+          </p:spPr>
+        </p:pic>
+        <p:cxnSp>
+          <p:nvCxnSpPr>
+            <p:cNvPr id="47" name="Straight Connector 46">
+              <a:extLst>
+                <a:ext uri="{FF2B5EF4-FFF2-40B4-BE49-F238E27FC236}">
+                  <a16:creationId xmlns:a16="http://schemas.microsoft.com/office/drawing/2014/main" id="{C4FCCFE0-6E57-4167-C640-71925AEEB1CF}"/>
+                </a:ext>
+              </a:extLst>
+            </p:cNvPr>
+            <p:cNvCxnSpPr/>
+            <p:nvPr/>
+          </p:nvCxnSpPr>
+          <p:spPr>
+            <a:xfrm>
+              <a:off x="6553200" y="5092700"/>
+              <a:ext cx="342900" cy="342900"/>
+            </a:xfrm>
+            <a:prstGeom prst="line">
+              <a:avLst/>
+            </a:prstGeom>
+          </p:spPr>
+          <p:style>
+            <a:lnRef idx="2">
+              <a:schemeClr val="accent1"/>
+            </a:lnRef>
+            <a:fillRef idx="0">
+              <a:schemeClr val="accent1"/>
+            </a:fillRef>
+            <a:effectRef idx="1">
+              <a:schemeClr val="accent1"/>
+            </a:effectRef>
+            <a:fontRef idx="minor">
+              <a:schemeClr val="tx1"/>
+            </a:fontRef>
+          </p:style>
+        </p:cxnSp>
+        <p:cxnSp>
+          <p:nvCxnSpPr>
+            <p:cNvPr id="49" name="Straight Connector 48">
+              <a:extLst>
+                <a:ext uri="{FF2B5EF4-FFF2-40B4-BE49-F238E27FC236}">
+                  <a16:creationId xmlns:a16="http://schemas.microsoft.com/office/drawing/2014/main" id="{7004FB71-6676-B8EE-1E9C-C3780829E722}"/>
+                </a:ext>
+              </a:extLst>
+            </p:cNvPr>
+            <p:cNvCxnSpPr/>
+            <p:nvPr/>
+          </p:nvCxnSpPr>
+          <p:spPr>
+            <a:xfrm flipV="1">
+              <a:off x="6553200" y="3835400"/>
+              <a:ext cx="342900" cy="304869"/>
+            </a:xfrm>
+            <a:prstGeom prst="line">
+              <a:avLst/>
+            </a:prstGeom>
+          </p:spPr>
+          <p:style>
+            <a:lnRef idx="2">
+              <a:schemeClr val="accent1"/>
+            </a:lnRef>
+            <a:fillRef idx="0">
+              <a:schemeClr val="accent1"/>
+            </a:fillRef>
+            <a:effectRef idx="1">
+              <a:schemeClr val="accent1"/>
+            </a:effectRef>
+            <a:fontRef idx="minor">
+              <a:schemeClr val="tx1"/>
+            </a:fontRef>
+          </p:style>
+        </p:cxnSp>
+        <p:cxnSp>
+          <p:nvCxnSpPr>
+            <p:cNvPr id="51" name="Straight Connector 50">
+              <a:extLst>
+                <a:ext uri="{FF2B5EF4-FFF2-40B4-BE49-F238E27FC236}">
+                  <a16:creationId xmlns:a16="http://schemas.microsoft.com/office/drawing/2014/main" id="{30C9B77F-658A-F104-D93D-409820D0192D}"/>
+                </a:ext>
+              </a:extLst>
+            </p:cNvPr>
+            <p:cNvCxnSpPr/>
+            <p:nvPr/>
+          </p:nvCxnSpPr>
+          <p:spPr>
+            <a:xfrm>
+              <a:off x="7620000" y="3683069"/>
+              <a:ext cx="546100" cy="0"/>
+            </a:xfrm>
+            <a:prstGeom prst="line">
+              <a:avLst/>
+            </a:prstGeom>
+          </p:spPr>
+          <p:style>
+            <a:lnRef idx="2">
+              <a:schemeClr val="accent1"/>
+            </a:lnRef>
+            <a:fillRef idx="0">
+              <a:schemeClr val="accent1"/>
+            </a:fillRef>
+            <a:effectRef idx="1">
+              <a:schemeClr val="accent1"/>
+            </a:effectRef>
+            <a:fontRef idx="minor">
+              <a:schemeClr val="tx1"/>
+            </a:fontRef>
+          </p:style>
+        </p:cxnSp>
+        <p:cxnSp>
+          <p:nvCxnSpPr>
+            <p:cNvPr id="53" name="Straight Connector 52">
+              <a:extLst>
+                <a:ext uri="{FF2B5EF4-FFF2-40B4-BE49-F238E27FC236}">
+                  <a16:creationId xmlns:a16="http://schemas.microsoft.com/office/drawing/2014/main" id="{4E25B25B-6E20-61E0-9242-5B5D9858085D}"/>
+                </a:ext>
+              </a:extLst>
+            </p:cNvPr>
+            <p:cNvCxnSpPr>
+              <a:cxnSpLocks/>
+            </p:cNvCxnSpPr>
+            <p:nvPr/>
+          </p:nvCxnSpPr>
+          <p:spPr>
+            <a:xfrm>
+              <a:off x="8964030" y="4077037"/>
+              <a:ext cx="205370" cy="253663"/>
+            </a:xfrm>
+            <a:prstGeom prst="line">
+              <a:avLst/>
+            </a:prstGeom>
+          </p:spPr>
+          <p:style>
+            <a:lnRef idx="2">
+              <a:schemeClr val="accent1"/>
+            </a:lnRef>
+            <a:fillRef idx="0">
+              <a:schemeClr val="accent1"/>
+            </a:fillRef>
+            <a:effectRef idx="1">
+              <a:schemeClr val="accent1"/>
+            </a:effectRef>
+            <a:fontRef idx="minor">
+              <a:schemeClr val="tx1"/>
+            </a:fontRef>
+          </p:style>
+        </p:cxnSp>
+        <p:cxnSp>
+          <p:nvCxnSpPr>
+            <p:cNvPr id="57" name="Straight Connector 56">
+              <a:extLst>
+                <a:ext uri="{FF2B5EF4-FFF2-40B4-BE49-F238E27FC236}">
+                  <a16:creationId xmlns:a16="http://schemas.microsoft.com/office/drawing/2014/main" id="{E5E9374E-4075-CA26-D092-2600596395C5}"/>
+                </a:ext>
+              </a:extLst>
+            </p:cNvPr>
+            <p:cNvCxnSpPr/>
+            <p:nvPr/>
+          </p:nvCxnSpPr>
+          <p:spPr>
+            <a:xfrm>
+              <a:off x="7620000" y="5698777"/>
+              <a:ext cx="635000" cy="0"/>
+            </a:xfrm>
+            <a:prstGeom prst="line">
+              <a:avLst/>
+            </a:prstGeom>
+          </p:spPr>
+          <p:style>
+            <a:lnRef idx="2">
+              <a:schemeClr val="accent1"/>
+            </a:lnRef>
+            <a:fillRef idx="0">
+              <a:schemeClr val="accent1"/>
+            </a:fillRef>
+            <a:effectRef idx="1">
+              <a:schemeClr val="accent1"/>
+            </a:effectRef>
+            <a:fontRef idx="minor">
+              <a:schemeClr val="tx1"/>
+            </a:fontRef>
+          </p:style>
+        </p:cxnSp>
+        <p:cxnSp>
+          <p:nvCxnSpPr>
+            <p:cNvPr id="59" name="Straight Connector 58">
+              <a:extLst>
+                <a:ext uri="{FF2B5EF4-FFF2-40B4-BE49-F238E27FC236}">
+                  <a16:creationId xmlns:a16="http://schemas.microsoft.com/office/drawing/2014/main" id="{9919E3AD-FF38-2CD1-E313-E5F249217812}"/>
+                </a:ext>
+              </a:extLst>
+            </p:cNvPr>
+            <p:cNvCxnSpPr/>
+            <p:nvPr/>
+          </p:nvCxnSpPr>
+          <p:spPr>
+            <a:xfrm flipV="1">
+              <a:off x="8964030" y="5092700"/>
+              <a:ext cx="457200" cy="457200"/>
+            </a:xfrm>
+            <a:prstGeom prst="line">
+              <a:avLst/>
+            </a:prstGeom>
+          </p:spPr>
+          <p:style>
+            <a:lnRef idx="2">
+              <a:schemeClr val="accent1"/>
+            </a:lnRef>
+            <a:fillRef idx="0">
+              <a:schemeClr val="accent1"/>
+            </a:fillRef>
+            <a:effectRef idx="1">
+              <a:schemeClr val="accent1"/>
+            </a:effectRef>
+            <a:fontRef idx="minor">
+              <a:schemeClr val="tx1"/>
+            </a:fontRef>
+          </p:style>
+        </p:cxnSp>
+        <p:cxnSp>
+          <p:nvCxnSpPr>
+            <p:cNvPr id="61" name="Straight Connector 60">
+              <a:extLst>
+                <a:ext uri="{FF2B5EF4-FFF2-40B4-BE49-F238E27FC236}">
+                  <a16:creationId xmlns:a16="http://schemas.microsoft.com/office/drawing/2014/main" id="{43BEA83A-2A8E-BE25-E4F3-09E9584E83DE}"/>
+                </a:ext>
+              </a:extLst>
+            </p:cNvPr>
+            <p:cNvCxnSpPr/>
+            <p:nvPr/>
+          </p:nvCxnSpPr>
+          <p:spPr>
+            <a:xfrm flipV="1">
+              <a:off x="7010400" y="4620200"/>
+              <a:ext cx="1960082" cy="15300"/>
+            </a:xfrm>
+            <a:prstGeom prst="line">
+              <a:avLst/>
+            </a:prstGeom>
+          </p:spPr>
+          <p:style>
+            <a:lnRef idx="2">
+              <a:schemeClr val="accent1"/>
+            </a:lnRef>
+            <a:fillRef idx="0">
+              <a:schemeClr val="accent1"/>
+            </a:fillRef>
+            <a:effectRef idx="1">
+              <a:schemeClr val="accent1"/>
+            </a:effectRef>
+            <a:fontRef idx="minor">
+              <a:schemeClr val="tx1"/>
+            </a:fontRef>
+          </p:style>
+        </p:cxnSp>
+        <p:cxnSp>
+          <p:nvCxnSpPr>
+            <p:cNvPr id="63" name="Straight Connector 62">
+              <a:extLst>
+                <a:ext uri="{FF2B5EF4-FFF2-40B4-BE49-F238E27FC236}">
+                  <a16:creationId xmlns:a16="http://schemas.microsoft.com/office/drawing/2014/main" id="{4F6A3862-9618-78FF-E568-4B89D8344370}"/>
+                </a:ext>
+              </a:extLst>
+            </p:cNvPr>
+            <p:cNvCxnSpPr>
+              <a:endCxn id="31" idx="0"/>
+            </p:cNvCxnSpPr>
+            <p:nvPr/>
+          </p:nvCxnSpPr>
+          <p:spPr>
+            <a:xfrm flipH="1">
+              <a:off x="7162800" y="4140269"/>
+              <a:ext cx="190500" cy="1101308"/>
+            </a:xfrm>
+            <a:prstGeom prst="line">
+              <a:avLst/>
+            </a:prstGeom>
+          </p:spPr>
+          <p:style>
+            <a:lnRef idx="2">
+              <a:schemeClr val="accent1"/>
+            </a:lnRef>
+            <a:fillRef idx="0">
+              <a:schemeClr val="accent1"/>
+            </a:fillRef>
+            <a:effectRef idx="1">
+              <a:schemeClr val="accent1"/>
+            </a:effectRef>
+            <a:fontRef idx="minor">
+              <a:schemeClr val="tx1"/>
+            </a:fontRef>
+          </p:style>
+        </p:cxnSp>
+        <p:cxnSp>
+          <p:nvCxnSpPr>
+            <p:cNvPr id="65" name="Straight Connector 64">
+              <a:extLst>
+                <a:ext uri="{FF2B5EF4-FFF2-40B4-BE49-F238E27FC236}">
+                  <a16:creationId xmlns:a16="http://schemas.microsoft.com/office/drawing/2014/main" id="{AF938ED8-D8B6-8183-C0F0-95BF4740B08A}"/>
+                </a:ext>
+              </a:extLst>
+            </p:cNvPr>
+            <p:cNvCxnSpPr>
+              <a:endCxn id="41" idx="0"/>
+            </p:cNvCxnSpPr>
+            <p:nvPr/>
+          </p:nvCxnSpPr>
+          <p:spPr>
+            <a:xfrm>
+              <a:off x="8513282" y="4163000"/>
+              <a:ext cx="198918" cy="1078577"/>
+            </a:xfrm>
+            <a:prstGeom prst="line">
+              <a:avLst/>
+            </a:prstGeom>
+          </p:spPr>
+          <p:style>
+            <a:lnRef idx="2">
+              <a:schemeClr val="accent1"/>
+            </a:lnRef>
+            <a:fillRef idx="0">
+              <a:schemeClr val="accent1"/>
+            </a:fillRef>
+            <a:effectRef idx="1">
+              <a:schemeClr val="accent1"/>
+            </a:effectRef>
+            <a:fontRef idx="minor">
+              <a:schemeClr val="tx1"/>
+            </a:fontRef>
+          </p:style>
+        </p:cxnSp>
+        <p:cxnSp>
+          <p:nvCxnSpPr>
+            <p:cNvPr id="67" name="Straight Connector 66">
+              <a:extLst>
+                <a:ext uri="{FF2B5EF4-FFF2-40B4-BE49-F238E27FC236}">
+                  <a16:creationId xmlns:a16="http://schemas.microsoft.com/office/drawing/2014/main" id="{CE89F903-7A65-A880-3C60-706DE8CA61CE}"/>
+                </a:ext>
+              </a:extLst>
+            </p:cNvPr>
+            <p:cNvCxnSpPr/>
+            <p:nvPr/>
+          </p:nvCxnSpPr>
+          <p:spPr>
+            <a:xfrm flipV="1">
+              <a:off x="7162800" y="4203868"/>
+              <a:ext cx="1350482" cy="1037709"/>
+            </a:xfrm>
+            <a:prstGeom prst="line">
+              <a:avLst/>
+            </a:prstGeom>
+          </p:spPr>
+          <p:style>
+            <a:lnRef idx="2">
+              <a:schemeClr val="accent1"/>
+            </a:lnRef>
+            <a:fillRef idx="0">
+              <a:schemeClr val="accent1"/>
+            </a:fillRef>
+            <a:effectRef idx="1">
+              <a:schemeClr val="accent1"/>
+            </a:effectRef>
+            <a:fontRef idx="minor">
+              <a:schemeClr val="tx1"/>
+            </a:fontRef>
+          </p:style>
+        </p:cxnSp>
+        <p:cxnSp>
+          <p:nvCxnSpPr>
+            <p:cNvPr id="69" name="Straight Connector 68">
+              <a:extLst>
+                <a:ext uri="{FF2B5EF4-FFF2-40B4-BE49-F238E27FC236}">
+                  <a16:creationId xmlns:a16="http://schemas.microsoft.com/office/drawing/2014/main" id="{991034F7-DB30-5AEA-5FF5-E1BDD1461654}"/>
+                </a:ext>
+              </a:extLst>
+            </p:cNvPr>
+            <p:cNvCxnSpPr/>
+            <p:nvPr/>
+          </p:nvCxnSpPr>
+          <p:spPr>
+            <a:xfrm>
+              <a:off x="7353300" y="4140269"/>
+              <a:ext cx="1358900" cy="1101308"/>
+            </a:xfrm>
+            <a:prstGeom prst="line">
+              <a:avLst/>
+            </a:prstGeom>
+          </p:spPr>
+          <p:style>
+            <a:lnRef idx="2">
+              <a:schemeClr val="accent1"/>
+            </a:lnRef>
+            <a:fillRef idx="0">
+              <a:schemeClr val="accent1"/>
+            </a:fillRef>
+            <a:effectRef idx="1">
+              <a:schemeClr val="accent1"/>
+            </a:effectRef>
+            <a:fontRef idx="minor">
+              <a:schemeClr val="tx1"/>
+            </a:fontRef>
+          </p:style>
+        </p:cxnSp>
+        <p:cxnSp>
+          <p:nvCxnSpPr>
+            <p:cNvPr id="71" name="Straight Connector 70">
+              <a:extLst>
+                <a:ext uri="{FF2B5EF4-FFF2-40B4-BE49-F238E27FC236}">
+                  <a16:creationId xmlns:a16="http://schemas.microsoft.com/office/drawing/2014/main" id="{0537732D-EA39-4D07-91EF-7FF4BD7DA88C}"/>
+                </a:ext>
+              </a:extLst>
+            </p:cNvPr>
+            <p:cNvCxnSpPr/>
+            <p:nvPr/>
+          </p:nvCxnSpPr>
+          <p:spPr>
+            <a:xfrm flipV="1">
+              <a:off x="7010400" y="4178300"/>
+              <a:ext cx="1502882" cy="406568"/>
+            </a:xfrm>
+            <a:prstGeom prst="line">
+              <a:avLst/>
+            </a:prstGeom>
+          </p:spPr>
+          <p:style>
+            <a:lnRef idx="2">
+              <a:schemeClr val="accent1"/>
+            </a:lnRef>
+            <a:fillRef idx="0">
+              <a:schemeClr val="accent1"/>
+            </a:fillRef>
+            <a:effectRef idx="1">
+              <a:schemeClr val="accent1"/>
+            </a:effectRef>
+            <a:fontRef idx="minor">
+              <a:schemeClr val="tx1"/>
+            </a:fontRef>
+          </p:style>
+        </p:cxnSp>
+        <p:cxnSp>
+          <p:nvCxnSpPr>
+            <p:cNvPr id="73" name="Straight Connector 72">
+              <a:extLst>
+                <a:ext uri="{FF2B5EF4-FFF2-40B4-BE49-F238E27FC236}">
+                  <a16:creationId xmlns:a16="http://schemas.microsoft.com/office/drawing/2014/main" id="{E1F25E61-6595-ACA3-37C1-9C909C316317}"/>
+                </a:ext>
+              </a:extLst>
+            </p:cNvPr>
+            <p:cNvCxnSpPr/>
+            <p:nvPr/>
+          </p:nvCxnSpPr>
+          <p:spPr>
+            <a:xfrm>
+              <a:off x="7353300" y="4140269"/>
+              <a:ext cx="1610730" cy="444599"/>
+            </a:xfrm>
+            <a:prstGeom prst="line">
+              <a:avLst/>
+            </a:prstGeom>
+          </p:spPr>
+          <p:style>
+            <a:lnRef idx="2">
+              <a:schemeClr val="accent1"/>
+            </a:lnRef>
+            <a:fillRef idx="0">
+              <a:schemeClr val="accent1"/>
+            </a:fillRef>
+            <a:effectRef idx="1">
+              <a:schemeClr val="accent1"/>
+            </a:effectRef>
+            <a:fontRef idx="minor">
+              <a:schemeClr val="tx1"/>
+            </a:fontRef>
+          </p:style>
+        </p:cxnSp>
+        <p:cxnSp>
+          <p:nvCxnSpPr>
+            <p:cNvPr id="75" name="Straight Connector 74">
+              <a:extLst>
+                <a:ext uri="{FF2B5EF4-FFF2-40B4-BE49-F238E27FC236}">
+                  <a16:creationId xmlns:a16="http://schemas.microsoft.com/office/drawing/2014/main" id="{1511511D-A654-7107-50B0-810C9CFE7440}"/>
+                </a:ext>
+              </a:extLst>
+            </p:cNvPr>
+            <p:cNvCxnSpPr/>
+            <p:nvPr/>
+          </p:nvCxnSpPr>
+          <p:spPr>
+            <a:xfrm flipH="1">
+              <a:off x="7162800" y="4635500"/>
+              <a:ext cx="1801230" cy="606077"/>
+            </a:xfrm>
+            <a:prstGeom prst="line">
+              <a:avLst/>
+            </a:prstGeom>
+          </p:spPr>
+          <p:style>
+            <a:lnRef idx="2">
+              <a:schemeClr val="accent1"/>
+            </a:lnRef>
+            <a:fillRef idx="0">
+              <a:schemeClr val="accent1"/>
+            </a:fillRef>
+            <a:effectRef idx="1">
+              <a:schemeClr val="accent1"/>
+            </a:effectRef>
+            <a:fontRef idx="minor">
+              <a:schemeClr val="tx1"/>
+            </a:fontRef>
+          </p:style>
+        </p:cxnSp>
+        <p:cxnSp>
+          <p:nvCxnSpPr>
+            <p:cNvPr id="77" name="Straight Connector 76">
+              <a:extLst>
+                <a:ext uri="{FF2B5EF4-FFF2-40B4-BE49-F238E27FC236}">
+                  <a16:creationId xmlns:a16="http://schemas.microsoft.com/office/drawing/2014/main" id="{25C2D446-BF70-EF84-BCE3-9BD21B8CD0D1}"/>
+                </a:ext>
+              </a:extLst>
+            </p:cNvPr>
+            <p:cNvCxnSpPr/>
+            <p:nvPr/>
+          </p:nvCxnSpPr>
+          <p:spPr>
+            <a:xfrm>
+              <a:off x="7010400" y="4620200"/>
+              <a:ext cx="1701800" cy="621377"/>
+            </a:xfrm>
+            <a:prstGeom prst="line">
+              <a:avLst/>
+            </a:prstGeom>
+          </p:spPr>
+          <p:style>
+            <a:lnRef idx="2">
+              <a:schemeClr val="accent1"/>
+            </a:lnRef>
+            <a:fillRef idx="0">
+              <a:schemeClr val="accent1"/>
+            </a:fillRef>
+            <a:effectRef idx="1">
+              <a:schemeClr val="accent1"/>
+            </a:effectRef>
+            <a:fontRef idx="minor">
+              <a:schemeClr val="tx1"/>
+            </a:fontRef>
+          </p:style>
+        </p:cxnSp>
+      </p:grpSp>
     </p:spTree>
     <p:extLst>
       <p:ext uri="{BB962C8B-B14F-4D97-AF65-F5344CB8AC3E}">
@@ -6764,8 +6793,38 @@
         </p:blipFill>
         <p:spPr>
           <a:xfrm>
-            <a:off x="472696" y="2489867"/>
-            <a:ext cx="8249801" cy="3820058"/>
+            <a:off x="2035895" y="2229235"/>
+            <a:ext cx="7253595" cy="3358766"/>
+          </a:xfrm>
+          <a:prstGeom prst="rect">
+            <a:avLst/>
+          </a:prstGeom>
+        </p:spPr>
+      </p:pic>
+      <p:pic>
+        <p:nvPicPr>
+          <p:cNvPr id="11" name="Picture 10">
+            <a:extLst>
+              <a:ext uri="{FF2B5EF4-FFF2-40B4-BE49-F238E27FC236}">
+                <a16:creationId xmlns:a16="http://schemas.microsoft.com/office/drawing/2014/main" id="{EF1F71DA-FCB2-D8B6-950D-7EEB738B5EE7}"/>
+              </a:ext>
+            </a:extLst>
+          </p:cNvPr>
+          <p:cNvPicPr>
+            <a:picLocks noChangeAspect="1"/>
+          </p:cNvPicPr>
+          <p:nvPr/>
+        </p:nvPicPr>
+        <p:blipFill>
+          <a:blip r:embed="rId4"/>
+          <a:stretch>
+            <a:fillRect/>
+          </a:stretch>
+        </p:blipFill>
+        <p:spPr>
+          <a:xfrm>
+            <a:off x="2035894" y="5698777"/>
+            <a:ext cx="7253595" cy="731512"/>
           </a:xfrm>
           <a:prstGeom prst="rect">
             <a:avLst/>

--- a/Master Thesis Updates.pptx
+++ b/Master Thesis Updates.pptx
@@ -5,7 +5,7 @@
     <p:sldMasterId id="2147483648" r:id="rId1"/>
   </p:sldMasterIdLst>
   <p:notesMasterIdLst>
-    <p:notesMasterId r:id="rId13"/>
+    <p:notesMasterId r:id="rId18"/>
   </p:notesMasterIdLst>
   <p:sldIdLst>
     <p:sldId id="256" r:id="rId2"/>
@@ -19,6 +19,11 @@
     <p:sldId id="261" r:id="rId10"/>
     <p:sldId id="262" r:id="rId11"/>
     <p:sldId id="258" r:id="rId12"/>
+    <p:sldId id="267" r:id="rId13"/>
+    <p:sldId id="268" r:id="rId14"/>
+    <p:sldId id="269" r:id="rId15"/>
+    <p:sldId id="270" r:id="rId16"/>
+    <p:sldId id="271" r:id="rId17"/>
   </p:sldIdLst>
   <p:sldSz cx="12192000" cy="6858000"/>
   <p:notesSz cx="6858000" cy="9144000"/>
@@ -207,7 +212,7 @@
           <a:p>
             <a:fld id="{1CFC2C6B-1EC2-486B-91A4-909D1FEE0276}" type="datetimeFigureOut">
               <a:rPr lang="LID4096" smtClean="0"/>
-              <a:t>04/16/2026</a:t>
+              <a:t>04/22/2026</a:t>
             </a:fld>
             <a:endParaRPr lang="LID4096"/>
           </a:p>
@@ -559,6 +564,330 @@
 </p:notes>
 </file>
 
+<file path=ppt/notesSlides/notesSlide10.xml><?xml version="1.0" encoding="utf-8"?>
+<p:notes xmlns:a="http://schemas.openxmlformats.org/drawingml/2006/main" xmlns:r="http://schemas.openxmlformats.org/officeDocument/2006/relationships" xmlns:p="http://schemas.openxmlformats.org/presentationml/2006/main">
+  <p:cSld>
+    <p:spTree>
+      <p:nvGrpSpPr>
+        <p:cNvPr id="1" name="">
+          <a:extLst>
+            <a:ext uri="{FF2B5EF4-FFF2-40B4-BE49-F238E27FC236}">
+              <a16:creationId xmlns:a16="http://schemas.microsoft.com/office/drawing/2014/main" id="{7B1038F6-D591-9403-AD49-3BEB5F63DDD8}"/>
+            </a:ext>
+          </a:extLst>
+        </p:cNvPr>
+        <p:cNvGrpSpPr/>
+        <p:nvPr/>
+      </p:nvGrpSpPr>
+      <p:grpSpPr>
+        <a:xfrm>
+          <a:off x="0" y="0"/>
+          <a:ext cx="0" cy="0"/>
+          <a:chOff x="0" y="0"/>
+          <a:chExt cx="0" cy="0"/>
+        </a:xfrm>
+      </p:grpSpPr>
+      <p:sp>
+        <p:nvSpPr>
+          <p:cNvPr id="2" name="Slide Image Placeholder 1">
+            <a:extLst>
+              <a:ext uri="{FF2B5EF4-FFF2-40B4-BE49-F238E27FC236}">
+                <a16:creationId xmlns:a16="http://schemas.microsoft.com/office/drawing/2014/main" id="{19E7B245-FC20-1E37-BA9C-6D60742352D8}"/>
+              </a:ext>
+            </a:extLst>
+          </p:cNvPr>
+          <p:cNvSpPr>
+            <a:spLocks noGrp="1" noRot="1" noChangeAspect="1"/>
+          </p:cNvSpPr>
+          <p:nvPr>
+            <p:ph type="sldImg"/>
+          </p:nvPr>
+        </p:nvSpPr>
+        <p:spPr/>
+      </p:sp>
+      <p:sp>
+        <p:nvSpPr>
+          <p:cNvPr id="3" name="Notes Placeholder 2">
+            <a:extLst>
+              <a:ext uri="{FF2B5EF4-FFF2-40B4-BE49-F238E27FC236}">
+                <a16:creationId xmlns:a16="http://schemas.microsoft.com/office/drawing/2014/main" id="{C93C543F-2F5A-3CFF-84DD-2DA232DA1A1A}"/>
+              </a:ext>
+            </a:extLst>
+          </p:cNvPr>
+          <p:cNvSpPr>
+            <a:spLocks noGrp="1"/>
+          </p:cNvSpPr>
+          <p:nvPr>
+            <p:ph type="body" idx="1"/>
+          </p:nvPr>
+        </p:nvSpPr>
+        <p:spPr/>
+        <p:txBody>
+          <a:bodyPr/>
+          <a:lstStyle/>
+          <a:p>
+            <a:endParaRPr lang="LID4096" dirty="0"/>
+          </a:p>
+        </p:txBody>
+      </p:sp>
+      <p:sp>
+        <p:nvSpPr>
+          <p:cNvPr id="4" name="Slide Number Placeholder 3">
+            <a:extLst>
+              <a:ext uri="{FF2B5EF4-FFF2-40B4-BE49-F238E27FC236}">
+                <a16:creationId xmlns:a16="http://schemas.microsoft.com/office/drawing/2014/main" id="{7484B593-62A3-1900-33F8-BFFF732FE927}"/>
+              </a:ext>
+            </a:extLst>
+          </p:cNvPr>
+          <p:cNvSpPr>
+            <a:spLocks noGrp="1"/>
+          </p:cNvSpPr>
+          <p:nvPr>
+            <p:ph type="sldNum" sz="quarter" idx="5"/>
+          </p:nvPr>
+        </p:nvSpPr>
+        <p:spPr/>
+        <p:txBody>
+          <a:bodyPr/>
+          <a:lstStyle/>
+          <a:p>
+            <a:fld id="{8BFF5565-A286-40EC-9626-D8188B2D2F64}" type="slidenum">
+              <a:rPr lang="LID4096" smtClean="0"/>
+              <a:t>14</a:t>
+            </a:fld>
+            <a:endParaRPr lang="LID4096"/>
+          </a:p>
+        </p:txBody>
+      </p:sp>
+    </p:spTree>
+    <p:extLst>
+      <p:ext uri="{BB962C8B-B14F-4D97-AF65-F5344CB8AC3E}">
+        <p14:creationId xmlns:p14="http://schemas.microsoft.com/office/powerpoint/2010/main" val="1369937025"/>
+      </p:ext>
+    </p:extLst>
+  </p:cSld>
+  <p:clrMapOvr>
+    <a:masterClrMapping/>
+  </p:clrMapOvr>
+</p:notes>
+</file>
+
+<file path=ppt/notesSlides/notesSlide11.xml><?xml version="1.0" encoding="utf-8"?>
+<p:notes xmlns:a="http://schemas.openxmlformats.org/drawingml/2006/main" xmlns:r="http://schemas.openxmlformats.org/officeDocument/2006/relationships" xmlns:p="http://schemas.openxmlformats.org/presentationml/2006/main">
+  <p:cSld>
+    <p:spTree>
+      <p:nvGrpSpPr>
+        <p:cNvPr id="1" name="">
+          <a:extLst>
+            <a:ext uri="{FF2B5EF4-FFF2-40B4-BE49-F238E27FC236}">
+              <a16:creationId xmlns:a16="http://schemas.microsoft.com/office/drawing/2014/main" id="{EA06DCFE-82CF-27AF-AAB9-695BD22F23E0}"/>
+            </a:ext>
+          </a:extLst>
+        </p:cNvPr>
+        <p:cNvGrpSpPr/>
+        <p:nvPr/>
+      </p:nvGrpSpPr>
+      <p:grpSpPr>
+        <a:xfrm>
+          <a:off x="0" y="0"/>
+          <a:ext cx="0" cy="0"/>
+          <a:chOff x="0" y="0"/>
+          <a:chExt cx="0" cy="0"/>
+        </a:xfrm>
+      </p:grpSpPr>
+      <p:sp>
+        <p:nvSpPr>
+          <p:cNvPr id="2" name="Slide Image Placeholder 1">
+            <a:extLst>
+              <a:ext uri="{FF2B5EF4-FFF2-40B4-BE49-F238E27FC236}">
+                <a16:creationId xmlns:a16="http://schemas.microsoft.com/office/drawing/2014/main" id="{7C786B6C-4C56-985E-0D79-5B0E5CB65FC3}"/>
+              </a:ext>
+            </a:extLst>
+          </p:cNvPr>
+          <p:cNvSpPr>
+            <a:spLocks noGrp="1" noRot="1" noChangeAspect="1"/>
+          </p:cNvSpPr>
+          <p:nvPr>
+            <p:ph type="sldImg"/>
+          </p:nvPr>
+        </p:nvSpPr>
+        <p:spPr/>
+      </p:sp>
+      <p:sp>
+        <p:nvSpPr>
+          <p:cNvPr id="3" name="Notes Placeholder 2">
+            <a:extLst>
+              <a:ext uri="{FF2B5EF4-FFF2-40B4-BE49-F238E27FC236}">
+                <a16:creationId xmlns:a16="http://schemas.microsoft.com/office/drawing/2014/main" id="{8425B2DC-CD8D-F25B-D27C-4CC5288A7D0B}"/>
+              </a:ext>
+            </a:extLst>
+          </p:cNvPr>
+          <p:cNvSpPr>
+            <a:spLocks noGrp="1"/>
+          </p:cNvSpPr>
+          <p:nvPr>
+            <p:ph type="body" idx="1"/>
+          </p:nvPr>
+        </p:nvSpPr>
+        <p:spPr/>
+        <p:txBody>
+          <a:bodyPr/>
+          <a:lstStyle/>
+          <a:p>
+            <a:endParaRPr lang="LID4096" dirty="0"/>
+          </a:p>
+        </p:txBody>
+      </p:sp>
+      <p:sp>
+        <p:nvSpPr>
+          <p:cNvPr id="4" name="Slide Number Placeholder 3">
+            <a:extLst>
+              <a:ext uri="{FF2B5EF4-FFF2-40B4-BE49-F238E27FC236}">
+                <a16:creationId xmlns:a16="http://schemas.microsoft.com/office/drawing/2014/main" id="{7C0401FC-D7FC-F70F-8C51-AC5EF5AD9BE2}"/>
+              </a:ext>
+            </a:extLst>
+          </p:cNvPr>
+          <p:cNvSpPr>
+            <a:spLocks noGrp="1"/>
+          </p:cNvSpPr>
+          <p:nvPr>
+            <p:ph type="sldNum" sz="quarter" idx="5"/>
+          </p:nvPr>
+        </p:nvSpPr>
+        <p:spPr/>
+        <p:txBody>
+          <a:bodyPr/>
+          <a:lstStyle/>
+          <a:p>
+            <a:fld id="{8BFF5565-A286-40EC-9626-D8188B2D2F64}" type="slidenum">
+              <a:rPr lang="LID4096" smtClean="0"/>
+              <a:t>15</a:t>
+            </a:fld>
+            <a:endParaRPr lang="LID4096"/>
+          </a:p>
+        </p:txBody>
+      </p:sp>
+    </p:spTree>
+    <p:extLst>
+      <p:ext uri="{BB962C8B-B14F-4D97-AF65-F5344CB8AC3E}">
+        <p14:creationId xmlns:p14="http://schemas.microsoft.com/office/powerpoint/2010/main" val="231429639"/>
+      </p:ext>
+    </p:extLst>
+  </p:cSld>
+  <p:clrMapOvr>
+    <a:masterClrMapping/>
+  </p:clrMapOvr>
+</p:notes>
+</file>
+
+<file path=ppt/notesSlides/notesSlide12.xml><?xml version="1.0" encoding="utf-8"?>
+<p:notes xmlns:a="http://schemas.openxmlformats.org/drawingml/2006/main" xmlns:r="http://schemas.openxmlformats.org/officeDocument/2006/relationships" xmlns:p="http://schemas.openxmlformats.org/presentationml/2006/main">
+  <p:cSld>
+    <p:spTree>
+      <p:nvGrpSpPr>
+        <p:cNvPr id="1" name="">
+          <a:extLst>
+            <a:ext uri="{FF2B5EF4-FFF2-40B4-BE49-F238E27FC236}">
+              <a16:creationId xmlns:a16="http://schemas.microsoft.com/office/drawing/2014/main" id="{0D5F4FD0-DACA-F8E5-9A78-C64C7E87B0F4}"/>
+            </a:ext>
+          </a:extLst>
+        </p:cNvPr>
+        <p:cNvGrpSpPr/>
+        <p:nvPr/>
+      </p:nvGrpSpPr>
+      <p:grpSpPr>
+        <a:xfrm>
+          <a:off x="0" y="0"/>
+          <a:ext cx="0" cy="0"/>
+          <a:chOff x="0" y="0"/>
+          <a:chExt cx="0" cy="0"/>
+        </a:xfrm>
+      </p:grpSpPr>
+      <p:sp>
+        <p:nvSpPr>
+          <p:cNvPr id="2" name="Slide Image Placeholder 1">
+            <a:extLst>
+              <a:ext uri="{FF2B5EF4-FFF2-40B4-BE49-F238E27FC236}">
+                <a16:creationId xmlns:a16="http://schemas.microsoft.com/office/drawing/2014/main" id="{21532BA5-09AF-C398-5FF3-0A0853967151}"/>
+              </a:ext>
+            </a:extLst>
+          </p:cNvPr>
+          <p:cNvSpPr>
+            <a:spLocks noGrp="1" noRot="1" noChangeAspect="1"/>
+          </p:cNvSpPr>
+          <p:nvPr>
+            <p:ph type="sldImg"/>
+          </p:nvPr>
+        </p:nvSpPr>
+        <p:spPr/>
+      </p:sp>
+      <p:sp>
+        <p:nvSpPr>
+          <p:cNvPr id="3" name="Notes Placeholder 2">
+            <a:extLst>
+              <a:ext uri="{FF2B5EF4-FFF2-40B4-BE49-F238E27FC236}">
+                <a16:creationId xmlns:a16="http://schemas.microsoft.com/office/drawing/2014/main" id="{6C17B34D-58EC-BE49-0AD1-A6E37495B4F4}"/>
+              </a:ext>
+            </a:extLst>
+          </p:cNvPr>
+          <p:cNvSpPr>
+            <a:spLocks noGrp="1"/>
+          </p:cNvSpPr>
+          <p:nvPr>
+            <p:ph type="body" idx="1"/>
+          </p:nvPr>
+        </p:nvSpPr>
+        <p:spPr/>
+        <p:txBody>
+          <a:bodyPr/>
+          <a:lstStyle/>
+          <a:p>
+            <a:endParaRPr lang="LID4096" dirty="0"/>
+          </a:p>
+        </p:txBody>
+      </p:sp>
+      <p:sp>
+        <p:nvSpPr>
+          <p:cNvPr id="4" name="Slide Number Placeholder 3">
+            <a:extLst>
+              <a:ext uri="{FF2B5EF4-FFF2-40B4-BE49-F238E27FC236}">
+                <a16:creationId xmlns:a16="http://schemas.microsoft.com/office/drawing/2014/main" id="{FD0B93BF-E21D-0871-E6C6-932205DAA282}"/>
+              </a:ext>
+            </a:extLst>
+          </p:cNvPr>
+          <p:cNvSpPr>
+            <a:spLocks noGrp="1"/>
+          </p:cNvSpPr>
+          <p:nvPr>
+            <p:ph type="sldNum" sz="quarter" idx="5"/>
+          </p:nvPr>
+        </p:nvSpPr>
+        <p:spPr/>
+        <p:txBody>
+          <a:bodyPr/>
+          <a:lstStyle/>
+          <a:p>
+            <a:fld id="{8BFF5565-A286-40EC-9626-D8188B2D2F64}" type="slidenum">
+              <a:rPr lang="LID4096" smtClean="0"/>
+              <a:t>16</a:t>
+            </a:fld>
+            <a:endParaRPr lang="LID4096"/>
+          </a:p>
+        </p:txBody>
+      </p:sp>
+    </p:spTree>
+    <p:extLst>
+      <p:ext uri="{BB962C8B-B14F-4D97-AF65-F5344CB8AC3E}">
+        <p14:creationId xmlns:p14="http://schemas.microsoft.com/office/powerpoint/2010/main" val="2155910027"/>
+      </p:ext>
+    </p:extLst>
+  </p:cSld>
+  <p:clrMapOvr>
+    <a:masterClrMapping/>
+  </p:clrMapOvr>
+</p:notes>
+</file>
+
 <file path=ppt/notesSlides/notesSlide2.xml><?xml version="1.0" encoding="utf-8"?>
 <p:notes xmlns:a="http://schemas.openxmlformats.org/drawingml/2006/main" xmlns:r="http://schemas.openxmlformats.org/officeDocument/2006/relationships" xmlns:p="http://schemas.openxmlformats.org/presentationml/2006/main">
   <p:cSld>
@@ -1306,6 +1635,114 @@
     <p:extLst>
       <p:ext uri="{BB962C8B-B14F-4D97-AF65-F5344CB8AC3E}">
         <p14:creationId xmlns:p14="http://schemas.microsoft.com/office/powerpoint/2010/main" val="4128246927"/>
+      </p:ext>
+    </p:extLst>
+  </p:cSld>
+  <p:clrMapOvr>
+    <a:masterClrMapping/>
+  </p:clrMapOvr>
+</p:notes>
+</file>
+
+<file path=ppt/notesSlides/notesSlide9.xml><?xml version="1.0" encoding="utf-8"?>
+<p:notes xmlns:a="http://schemas.openxmlformats.org/drawingml/2006/main" xmlns:r="http://schemas.openxmlformats.org/officeDocument/2006/relationships" xmlns:p="http://schemas.openxmlformats.org/presentationml/2006/main">
+  <p:cSld>
+    <p:spTree>
+      <p:nvGrpSpPr>
+        <p:cNvPr id="1" name="">
+          <a:extLst>
+            <a:ext uri="{FF2B5EF4-FFF2-40B4-BE49-F238E27FC236}">
+              <a16:creationId xmlns:a16="http://schemas.microsoft.com/office/drawing/2014/main" id="{E0C7BA4E-6E89-564C-EE4D-A2404360F69A}"/>
+            </a:ext>
+          </a:extLst>
+        </p:cNvPr>
+        <p:cNvGrpSpPr/>
+        <p:nvPr/>
+      </p:nvGrpSpPr>
+      <p:grpSpPr>
+        <a:xfrm>
+          <a:off x="0" y="0"/>
+          <a:ext cx="0" cy="0"/>
+          <a:chOff x="0" y="0"/>
+          <a:chExt cx="0" cy="0"/>
+        </a:xfrm>
+      </p:grpSpPr>
+      <p:sp>
+        <p:nvSpPr>
+          <p:cNvPr id="2" name="Slide Image Placeholder 1">
+            <a:extLst>
+              <a:ext uri="{FF2B5EF4-FFF2-40B4-BE49-F238E27FC236}">
+                <a16:creationId xmlns:a16="http://schemas.microsoft.com/office/drawing/2014/main" id="{202F2EE6-A429-1F27-B494-3C0D26668E66}"/>
+              </a:ext>
+            </a:extLst>
+          </p:cNvPr>
+          <p:cNvSpPr>
+            <a:spLocks noGrp="1" noRot="1" noChangeAspect="1"/>
+          </p:cNvSpPr>
+          <p:nvPr>
+            <p:ph type="sldImg"/>
+          </p:nvPr>
+        </p:nvSpPr>
+        <p:spPr/>
+      </p:sp>
+      <p:sp>
+        <p:nvSpPr>
+          <p:cNvPr id="3" name="Notes Placeholder 2">
+            <a:extLst>
+              <a:ext uri="{FF2B5EF4-FFF2-40B4-BE49-F238E27FC236}">
+                <a16:creationId xmlns:a16="http://schemas.microsoft.com/office/drawing/2014/main" id="{B5B4BAD5-21DF-DB75-13BE-72EDF1D51FA9}"/>
+              </a:ext>
+            </a:extLst>
+          </p:cNvPr>
+          <p:cNvSpPr>
+            <a:spLocks noGrp="1"/>
+          </p:cNvSpPr>
+          <p:nvPr>
+            <p:ph type="body" idx="1"/>
+          </p:nvPr>
+        </p:nvSpPr>
+        <p:spPr/>
+        <p:txBody>
+          <a:bodyPr/>
+          <a:lstStyle/>
+          <a:p>
+            <a:endParaRPr lang="LID4096" dirty="0"/>
+          </a:p>
+        </p:txBody>
+      </p:sp>
+      <p:sp>
+        <p:nvSpPr>
+          <p:cNvPr id="4" name="Slide Number Placeholder 3">
+            <a:extLst>
+              <a:ext uri="{FF2B5EF4-FFF2-40B4-BE49-F238E27FC236}">
+                <a16:creationId xmlns:a16="http://schemas.microsoft.com/office/drawing/2014/main" id="{7710D6B8-02A9-0C6A-9E52-2340F39CCDEB}"/>
+              </a:ext>
+            </a:extLst>
+          </p:cNvPr>
+          <p:cNvSpPr>
+            <a:spLocks noGrp="1"/>
+          </p:cNvSpPr>
+          <p:nvPr>
+            <p:ph type="sldNum" sz="quarter" idx="5"/>
+          </p:nvPr>
+        </p:nvSpPr>
+        <p:spPr/>
+        <p:txBody>
+          <a:bodyPr/>
+          <a:lstStyle/>
+          <a:p>
+            <a:fld id="{8BFF5565-A286-40EC-9626-D8188B2D2F64}" type="slidenum">
+              <a:rPr lang="LID4096" smtClean="0"/>
+              <a:t>13</a:t>
+            </a:fld>
+            <a:endParaRPr lang="LID4096"/>
+          </a:p>
+        </p:txBody>
+      </p:sp>
+    </p:spTree>
+    <p:extLst>
+      <p:ext uri="{BB962C8B-B14F-4D97-AF65-F5344CB8AC3E}">
+        <p14:creationId xmlns:p14="http://schemas.microsoft.com/office/powerpoint/2010/main" val="1250977328"/>
       </p:ext>
     </p:extLst>
   </p:cSld>
@@ -1464,7 +1901,7 @@
           <a:p>
             <a:fld id="{DB0DE9BD-4944-43A0-B7B5-5426B3256249}" type="datetimeFigureOut">
               <a:rPr lang="LID4096" smtClean="0"/>
-              <a:t>04/16/2026</a:t>
+              <a:t>04/22/2026</a:t>
             </a:fld>
             <a:endParaRPr lang="LID4096"/>
           </a:p>
@@ -1664,7 +2101,7 @@
           <a:p>
             <a:fld id="{DB0DE9BD-4944-43A0-B7B5-5426B3256249}" type="datetimeFigureOut">
               <a:rPr lang="LID4096" smtClean="0"/>
-              <a:t>04/16/2026</a:t>
+              <a:t>04/22/2026</a:t>
             </a:fld>
             <a:endParaRPr lang="LID4096"/>
           </a:p>
@@ -1874,7 +2311,7 @@
           <a:p>
             <a:fld id="{DB0DE9BD-4944-43A0-B7B5-5426B3256249}" type="datetimeFigureOut">
               <a:rPr lang="LID4096" smtClean="0"/>
-              <a:t>04/16/2026</a:t>
+              <a:t>04/22/2026</a:t>
             </a:fld>
             <a:endParaRPr lang="LID4096"/>
           </a:p>
@@ -2074,7 +2511,7 @@
           <a:p>
             <a:fld id="{DB0DE9BD-4944-43A0-B7B5-5426B3256249}" type="datetimeFigureOut">
               <a:rPr lang="LID4096" smtClean="0"/>
-              <a:t>04/16/2026</a:t>
+              <a:t>04/22/2026</a:t>
             </a:fld>
             <a:endParaRPr lang="LID4096"/>
           </a:p>
@@ -2350,7 +2787,7 @@
           <a:p>
             <a:fld id="{DB0DE9BD-4944-43A0-B7B5-5426B3256249}" type="datetimeFigureOut">
               <a:rPr lang="LID4096" smtClean="0"/>
-              <a:t>04/16/2026</a:t>
+              <a:t>04/22/2026</a:t>
             </a:fld>
             <a:endParaRPr lang="LID4096"/>
           </a:p>
@@ -2618,7 +3055,7 @@
           <a:p>
             <a:fld id="{DB0DE9BD-4944-43A0-B7B5-5426B3256249}" type="datetimeFigureOut">
               <a:rPr lang="LID4096" smtClean="0"/>
-              <a:t>04/16/2026</a:t>
+              <a:t>04/22/2026</a:t>
             </a:fld>
             <a:endParaRPr lang="LID4096"/>
           </a:p>
@@ -3033,7 +3470,7 @@
           <a:p>
             <a:fld id="{DB0DE9BD-4944-43A0-B7B5-5426B3256249}" type="datetimeFigureOut">
               <a:rPr lang="LID4096" smtClean="0"/>
-              <a:t>04/16/2026</a:t>
+              <a:t>04/22/2026</a:t>
             </a:fld>
             <a:endParaRPr lang="LID4096"/>
           </a:p>
@@ -3175,7 +3612,7 @@
           <a:p>
             <a:fld id="{DB0DE9BD-4944-43A0-B7B5-5426B3256249}" type="datetimeFigureOut">
               <a:rPr lang="LID4096" smtClean="0"/>
-              <a:t>04/16/2026</a:t>
+              <a:t>04/22/2026</a:t>
             </a:fld>
             <a:endParaRPr lang="LID4096"/>
           </a:p>
@@ -3288,7 +3725,7 @@
           <a:p>
             <a:fld id="{DB0DE9BD-4944-43A0-B7B5-5426B3256249}" type="datetimeFigureOut">
               <a:rPr lang="LID4096" smtClean="0"/>
-              <a:t>04/16/2026</a:t>
+              <a:t>04/22/2026</a:t>
             </a:fld>
             <a:endParaRPr lang="LID4096"/>
           </a:p>
@@ -3601,7 +4038,7 @@
           <a:p>
             <a:fld id="{DB0DE9BD-4944-43A0-B7B5-5426B3256249}" type="datetimeFigureOut">
               <a:rPr lang="LID4096" smtClean="0"/>
-              <a:t>04/16/2026</a:t>
+              <a:t>04/22/2026</a:t>
             </a:fld>
             <a:endParaRPr lang="LID4096"/>
           </a:p>
@@ -3890,7 +4327,7 @@
           <a:p>
             <a:fld id="{DB0DE9BD-4944-43A0-B7B5-5426B3256249}" type="datetimeFigureOut">
               <a:rPr lang="LID4096" smtClean="0"/>
-              <a:t>04/16/2026</a:t>
+              <a:t>04/22/2026</a:t>
             </a:fld>
             <a:endParaRPr lang="LID4096"/>
           </a:p>
@@ -4133,7 +4570,7 @@
           <a:p>
             <a:fld id="{DB0DE9BD-4944-43A0-B7B5-5426B3256249}" type="datetimeFigureOut">
               <a:rPr lang="LID4096" smtClean="0"/>
-              <a:t>04/16/2026</a:t>
+              <a:t>04/22/2026</a:t>
             </a:fld>
             <a:endParaRPr lang="LID4096"/>
           </a:p>
@@ -5097,6 +5534,1246 @@
 </p:sld>
 </file>
 
+<file path=ppt/slides/slide12.xml><?xml version="1.0" encoding="utf-8"?>
+<p:sld xmlns:a="http://schemas.openxmlformats.org/drawingml/2006/main" xmlns:r="http://schemas.openxmlformats.org/officeDocument/2006/relationships" xmlns:p="http://schemas.openxmlformats.org/presentationml/2006/main">
+  <p:cSld>
+    <p:spTree>
+      <p:nvGrpSpPr>
+        <p:cNvPr id="1" name="">
+          <a:extLst>
+            <a:ext uri="{FF2B5EF4-FFF2-40B4-BE49-F238E27FC236}">
+              <a16:creationId xmlns:a16="http://schemas.microsoft.com/office/drawing/2014/main" id="{2E58255A-5530-AA09-0593-A2DB17C17BCB}"/>
+            </a:ext>
+          </a:extLst>
+        </p:cNvPr>
+        <p:cNvGrpSpPr/>
+        <p:nvPr/>
+      </p:nvGrpSpPr>
+      <p:grpSpPr>
+        <a:xfrm>
+          <a:off x="0" y="0"/>
+          <a:ext cx="0" cy="0"/>
+          <a:chOff x="0" y="0"/>
+          <a:chExt cx="0" cy="0"/>
+        </a:xfrm>
+      </p:grpSpPr>
+      <p:sp>
+        <p:nvSpPr>
+          <p:cNvPr id="3" name="Subtitle 2">
+            <a:extLst>
+              <a:ext uri="{FF2B5EF4-FFF2-40B4-BE49-F238E27FC236}">
+                <a16:creationId xmlns:a16="http://schemas.microsoft.com/office/drawing/2014/main" id="{703421FC-1A65-E94D-E984-BE414F387AE7}"/>
+              </a:ext>
+            </a:extLst>
+          </p:cNvPr>
+          <p:cNvSpPr>
+            <a:spLocks noGrp="1"/>
+          </p:cNvSpPr>
+          <p:nvPr>
+            <p:ph type="subTitle" idx="1"/>
+          </p:nvPr>
+        </p:nvSpPr>
+        <p:spPr>
+          <a:xfrm>
+            <a:off x="0" y="3741738"/>
+            <a:ext cx="9144000" cy="446214"/>
+          </a:xfrm>
+        </p:spPr>
+        <p:txBody>
+          <a:bodyPr/>
+          <a:lstStyle/>
+          <a:p>
+            <a:pPr algn="l"/>
+            <a:r>
+              <a:rPr lang="de-DE" dirty="0"/>
+              <a:t>23.04.2026</a:t>
+            </a:r>
+            <a:endParaRPr lang="LID4096" dirty="0"/>
+          </a:p>
+        </p:txBody>
+      </p:sp>
+      <p:sp>
+        <p:nvSpPr>
+          <p:cNvPr id="4" name="Rectangle 3">
+            <a:extLst>
+              <a:ext uri="{FF2B5EF4-FFF2-40B4-BE49-F238E27FC236}">
+                <a16:creationId xmlns:a16="http://schemas.microsoft.com/office/drawing/2014/main" id="{E2761A6D-D92E-2F00-26EF-6CDA79E51701}"/>
+              </a:ext>
+            </a:extLst>
+          </p:cNvPr>
+          <p:cNvSpPr/>
+          <p:nvPr/>
+        </p:nvSpPr>
+        <p:spPr>
+          <a:xfrm>
+            <a:off x="-292608" y="4187952"/>
+            <a:ext cx="12691872" cy="2852928"/>
+          </a:xfrm>
+          <a:prstGeom prst="rect">
+            <a:avLst/>
+          </a:prstGeom>
+        </p:spPr>
+        <p:style>
+          <a:lnRef idx="3">
+            <a:schemeClr val="lt1"/>
+          </a:lnRef>
+          <a:fillRef idx="1">
+            <a:schemeClr val="accent4"/>
+          </a:fillRef>
+          <a:effectRef idx="1">
+            <a:schemeClr val="accent4"/>
+          </a:effectRef>
+          <a:fontRef idx="minor">
+            <a:schemeClr val="lt1"/>
+          </a:fontRef>
+        </p:style>
+        <p:txBody>
+          <a:bodyPr rtlCol="0" anchor="ctr"/>
+          <a:lstStyle/>
+          <a:p>
+            <a:pPr algn="ctr"/>
+            <a:endParaRPr lang="en-US"/>
+          </a:p>
+        </p:txBody>
+      </p:sp>
+    </p:spTree>
+    <p:extLst>
+      <p:ext uri="{BB962C8B-B14F-4D97-AF65-F5344CB8AC3E}">
+        <p14:creationId xmlns:p14="http://schemas.microsoft.com/office/powerpoint/2010/main" val="2307764348"/>
+      </p:ext>
+    </p:extLst>
+  </p:cSld>
+  <p:clrMapOvr>
+    <a:masterClrMapping/>
+  </p:clrMapOvr>
+</p:sld>
+</file>
+
+<file path=ppt/slides/slide13.xml><?xml version="1.0" encoding="utf-8"?>
+<p:sld xmlns:a="http://schemas.openxmlformats.org/drawingml/2006/main" xmlns:r="http://schemas.openxmlformats.org/officeDocument/2006/relationships" xmlns:p="http://schemas.openxmlformats.org/presentationml/2006/main">
+  <p:cSld>
+    <p:spTree>
+      <p:nvGrpSpPr>
+        <p:cNvPr id="1" name="">
+          <a:extLst>
+            <a:ext uri="{FF2B5EF4-FFF2-40B4-BE49-F238E27FC236}">
+              <a16:creationId xmlns:a16="http://schemas.microsoft.com/office/drawing/2014/main" id="{D7173144-B4A7-E1A8-978E-18A26CA20927}"/>
+            </a:ext>
+          </a:extLst>
+        </p:cNvPr>
+        <p:cNvGrpSpPr/>
+        <p:nvPr/>
+      </p:nvGrpSpPr>
+      <p:grpSpPr>
+        <a:xfrm>
+          <a:off x="0" y="0"/>
+          <a:ext cx="0" cy="0"/>
+          <a:chOff x="0" y="0"/>
+          <a:chExt cx="0" cy="0"/>
+        </a:xfrm>
+      </p:grpSpPr>
+      <p:sp>
+        <p:nvSpPr>
+          <p:cNvPr id="9" name="Title 1">
+            <a:extLst>
+              <a:ext uri="{FF2B5EF4-FFF2-40B4-BE49-F238E27FC236}">
+                <a16:creationId xmlns:a16="http://schemas.microsoft.com/office/drawing/2014/main" id="{4CB46B86-E392-93DC-EE36-0D29B3FFAF0A}"/>
+              </a:ext>
+            </a:extLst>
+          </p:cNvPr>
+          <p:cNvSpPr txBox="1">
+            <a:spLocks/>
+          </p:cNvSpPr>
+          <p:nvPr/>
+        </p:nvSpPr>
+        <p:spPr>
+          <a:xfrm>
+            <a:off x="472696" y="266915"/>
+            <a:ext cx="10515600" cy="535803"/>
+          </a:xfrm>
+          <a:prstGeom prst="rect">
+            <a:avLst/>
+          </a:prstGeom>
+        </p:spPr>
+        <p:txBody>
+          <a:bodyPr/>
+          <a:lstStyle>
+            <a:lvl1pPr algn="l" defTabSz="914400" rtl="0" eaLnBrk="1" latinLnBrk="0" hangingPunct="1">
+              <a:lnSpc>
+                <a:spcPct val="90000"/>
+              </a:lnSpc>
+              <a:spcBef>
+                <a:spcPct val="0"/>
+              </a:spcBef>
+              <a:buNone/>
+              <a:defRPr sz="4400" kern="1200">
+                <a:solidFill>
+                  <a:schemeClr val="tx1"/>
+                </a:solidFill>
+                <a:latin typeface="+mj-lt"/>
+                <a:ea typeface="+mj-ea"/>
+                <a:cs typeface="+mj-cs"/>
+              </a:defRPr>
+            </a:lvl1pPr>
+          </a:lstStyle>
+          <a:p>
+            <a:r>
+              <a:rPr lang="de-DE" sz="3200" dirty="0"/>
+              <a:t>Debugging DRIVE-Repository</a:t>
+            </a:r>
+            <a:endParaRPr lang="LID4096" sz="3200" dirty="0"/>
+          </a:p>
+        </p:txBody>
+      </p:sp>
+      <p:sp>
+        <p:nvSpPr>
+          <p:cNvPr id="10" name="TextBox 9">
+            <a:extLst>
+              <a:ext uri="{FF2B5EF4-FFF2-40B4-BE49-F238E27FC236}">
+                <a16:creationId xmlns:a16="http://schemas.microsoft.com/office/drawing/2014/main" id="{D4D8F1D2-5D8A-F553-3445-3DC93CA04CC4}"/>
+              </a:ext>
+            </a:extLst>
+          </p:cNvPr>
+          <p:cNvSpPr txBox="1"/>
+          <p:nvPr/>
+        </p:nvSpPr>
+        <p:spPr>
+          <a:xfrm>
+            <a:off x="536704" y="1340927"/>
+            <a:ext cx="9201656" cy="646331"/>
+          </a:xfrm>
+          <a:prstGeom prst="rect">
+            <a:avLst/>
+          </a:prstGeom>
+          <a:noFill/>
+        </p:spPr>
+        <p:txBody>
+          <a:bodyPr wrap="square" rtlCol="0">
+            <a:spAutoFit/>
+          </a:bodyPr>
+          <a:lstStyle/>
+          <a:p>
+            <a:pPr marL="285750" indent="-285750">
+              <a:buFont typeface="Arial" panose="020B0604020202020204" pitchFamily="34" charset="0"/>
+              <a:buChar char="•"/>
+            </a:pPr>
+            <a:r>
+              <a:rPr lang="de-DE" b="1" dirty="0"/>
+              <a:t>First Idea: </a:t>
+            </a:r>
+            <a:r>
+              <a:rPr lang="de-DE" dirty="0"/>
+              <a:t>search for bugs in code </a:t>
+            </a:r>
+            <a:r>
+              <a:rPr lang="de-DE" dirty="0">
+                <a:sym typeface="Wingdings" panose="05000000000000000000" pitchFamily="2" charset="2"/>
+              </a:rPr>
+              <a:t> unfortunately not succesful</a:t>
+            </a:r>
+          </a:p>
+          <a:p>
+            <a:pPr marL="285750" indent="-285750">
+              <a:buFont typeface="Arial" panose="020B0604020202020204" pitchFamily="34" charset="0"/>
+              <a:buChar char="•"/>
+            </a:pPr>
+            <a:r>
+              <a:rPr lang="de-DE" b="1" dirty="0">
+                <a:sym typeface="Wingdings" panose="05000000000000000000" pitchFamily="2" charset="2"/>
+              </a:rPr>
+              <a:t>Second Idea:</a:t>
+            </a:r>
+            <a:r>
+              <a:rPr lang="de-DE" dirty="0">
+                <a:sym typeface="Wingdings" panose="05000000000000000000" pitchFamily="2" charset="2"/>
+              </a:rPr>
+              <a:t> set seeds for reproducibility; different runs, different results?</a:t>
+            </a:r>
+            <a:endParaRPr lang="en-US" dirty="0"/>
+          </a:p>
+        </p:txBody>
+      </p:sp>
+      <p:pic>
+        <p:nvPicPr>
+          <p:cNvPr id="7" name="Picture 6">
+            <a:extLst>
+              <a:ext uri="{FF2B5EF4-FFF2-40B4-BE49-F238E27FC236}">
+                <a16:creationId xmlns:a16="http://schemas.microsoft.com/office/drawing/2014/main" id="{B97E826B-CB22-8703-ECD9-715A3E53AA4C}"/>
+              </a:ext>
+            </a:extLst>
+          </p:cNvPr>
+          <p:cNvPicPr>
+            <a:picLocks noChangeAspect="1"/>
+          </p:cNvPicPr>
+          <p:nvPr/>
+        </p:nvPicPr>
+        <p:blipFill>
+          <a:blip r:embed="rId3"/>
+          <a:stretch>
+            <a:fillRect/>
+          </a:stretch>
+        </p:blipFill>
+        <p:spPr>
+          <a:xfrm>
+            <a:off x="2496312" y="1987258"/>
+            <a:ext cx="4247535" cy="3185651"/>
+          </a:xfrm>
+          <a:prstGeom prst="rect">
+            <a:avLst/>
+          </a:prstGeom>
+        </p:spPr>
+      </p:pic>
+      <p:sp>
+        <p:nvSpPr>
+          <p:cNvPr id="8" name="TextBox 7">
+            <a:extLst>
+              <a:ext uri="{FF2B5EF4-FFF2-40B4-BE49-F238E27FC236}">
+                <a16:creationId xmlns:a16="http://schemas.microsoft.com/office/drawing/2014/main" id="{15BD5CA6-8539-9123-8B0C-AAC68A6A8B6B}"/>
+              </a:ext>
+            </a:extLst>
+          </p:cNvPr>
+          <p:cNvSpPr txBox="1"/>
+          <p:nvPr/>
+        </p:nvSpPr>
+        <p:spPr>
+          <a:xfrm>
+            <a:off x="6743847" y="3942850"/>
+            <a:ext cx="3547872" cy="369332"/>
+          </a:xfrm>
+          <a:prstGeom prst="rect">
+            <a:avLst/>
+          </a:prstGeom>
+          <a:noFill/>
+        </p:spPr>
+        <p:txBody>
+          <a:bodyPr wrap="square" rtlCol="0">
+            <a:spAutoFit/>
+          </a:bodyPr>
+          <a:lstStyle/>
+          <a:p>
+            <a:r>
+              <a:rPr lang="de-DE" b="1" dirty="0"/>
+              <a:t>Cooperation Rate rises on avg!</a:t>
+            </a:r>
+            <a:endParaRPr lang="en-US" b="1" dirty="0"/>
+          </a:p>
+        </p:txBody>
+      </p:sp>
+      <p:sp>
+        <p:nvSpPr>
+          <p:cNvPr id="12" name="TextBox 11">
+            <a:extLst>
+              <a:ext uri="{FF2B5EF4-FFF2-40B4-BE49-F238E27FC236}">
+                <a16:creationId xmlns:a16="http://schemas.microsoft.com/office/drawing/2014/main" id="{545085E1-0BC1-F11A-892B-E1EBF13D7063}"/>
+              </a:ext>
+            </a:extLst>
+          </p:cNvPr>
+          <p:cNvSpPr txBox="1"/>
+          <p:nvPr/>
+        </p:nvSpPr>
+        <p:spPr>
+          <a:xfrm>
+            <a:off x="6743847" y="2469492"/>
+            <a:ext cx="3547872" cy="646331"/>
+          </a:xfrm>
+          <a:prstGeom prst="rect">
+            <a:avLst/>
+          </a:prstGeom>
+          <a:noFill/>
+        </p:spPr>
+        <p:txBody>
+          <a:bodyPr wrap="square" rtlCol="0">
+            <a:spAutoFit/>
+          </a:bodyPr>
+          <a:lstStyle/>
+          <a:p>
+            <a:r>
+              <a:rPr lang="de-DE" dirty="0"/>
+              <a:t>Some seeds perform well, some very bad...</a:t>
+            </a:r>
+            <a:endParaRPr lang="en-US" dirty="0"/>
+          </a:p>
+        </p:txBody>
+      </p:sp>
+      <p:sp>
+        <p:nvSpPr>
+          <p:cNvPr id="14" name="TextBox 13">
+            <a:extLst>
+              <a:ext uri="{FF2B5EF4-FFF2-40B4-BE49-F238E27FC236}">
+                <a16:creationId xmlns:a16="http://schemas.microsoft.com/office/drawing/2014/main" id="{1963E21C-0FC7-1839-CA5C-B132B7AAA5EC}"/>
+              </a:ext>
+            </a:extLst>
+          </p:cNvPr>
+          <p:cNvSpPr txBox="1"/>
+          <p:nvPr/>
+        </p:nvSpPr>
+        <p:spPr>
+          <a:xfrm>
+            <a:off x="536704" y="5419267"/>
+            <a:ext cx="8424416" cy="646331"/>
+          </a:xfrm>
+          <a:prstGeom prst="rect">
+            <a:avLst/>
+          </a:prstGeom>
+          <a:noFill/>
+        </p:spPr>
+        <p:txBody>
+          <a:bodyPr wrap="square">
+            <a:spAutoFit/>
+          </a:bodyPr>
+          <a:lstStyle/>
+          <a:p>
+            <a:pPr marL="285750" indent="-285750">
+              <a:buFont typeface="Arial" panose="020B0604020202020204" pitchFamily="34" charset="0"/>
+              <a:buChar char="•"/>
+            </a:pPr>
+            <a:r>
+              <a:rPr lang="de-DE" b="1" dirty="0">
+                <a:sym typeface="Wingdings" panose="05000000000000000000" pitchFamily="2" charset="2"/>
+              </a:rPr>
+              <a:t>Third Idea:</a:t>
+            </a:r>
+            <a:r>
+              <a:rPr lang="de-DE" dirty="0">
+                <a:sym typeface="Wingdings" panose="05000000000000000000" pitchFamily="2" charset="2"/>
+              </a:rPr>
+              <a:t> DRIVE seems to do its job, the random numbers mess it up  Neural Network Initialization?</a:t>
+            </a:r>
+            <a:endParaRPr lang="en-US" dirty="0"/>
+          </a:p>
+        </p:txBody>
+      </p:sp>
+    </p:spTree>
+    <p:extLst>
+      <p:ext uri="{BB962C8B-B14F-4D97-AF65-F5344CB8AC3E}">
+        <p14:creationId xmlns:p14="http://schemas.microsoft.com/office/powerpoint/2010/main" val="1055047107"/>
+      </p:ext>
+    </p:extLst>
+  </p:cSld>
+  <p:clrMapOvr>
+    <a:masterClrMapping/>
+  </p:clrMapOvr>
+</p:sld>
+</file>
+
+<file path=ppt/slides/slide14.xml><?xml version="1.0" encoding="utf-8"?>
+<p:sld xmlns:a="http://schemas.openxmlformats.org/drawingml/2006/main" xmlns:r="http://schemas.openxmlformats.org/officeDocument/2006/relationships" xmlns:p="http://schemas.openxmlformats.org/presentationml/2006/main">
+  <p:cSld>
+    <p:spTree>
+      <p:nvGrpSpPr>
+        <p:cNvPr id="1" name="">
+          <a:extLst>
+            <a:ext uri="{FF2B5EF4-FFF2-40B4-BE49-F238E27FC236}">
+              <a16:creationId xmlns:a16="http://schemas.microsoft.com/office/drawing/2014/main" id="{30036B97-8AED-362D-77C0-B2A057530C0D}"/>
+            </a:ext>
+          </a:extLst>
+        </p:cNvPr>
+        <p:cNvGrpSpPr/>
+        <p:nvPr/>
+      </p:nvGrpSpPr>
+      <p:grpSpPr>
+        <a:xfrm>
+          <a:off x="0" y="0"/>
+          <a:ext cx="0" cy="0"/>
+          <a:chOff x="0" y="0"/>
+          <a:chExt cx="0" cy="0"/>
+        </a:xfrm>
+      </p:grpSpPr>
+      <p:sp>
+        <p:nvSpPr>
+          <p:cNvPr id="9" name="Title 1">
+            <a:extLst>
+              <a:ext uri="{FF2B5EF4-FFF2-40B4-BE49-F238E27FC236}">
+                <a16:creationId xmlns:a16="http://schemas.microsoft.com/office/drawing/2014/main" id="{554D6D10-5E27-7DE4-108C-C22F05C3BBAA}"/>
+              </a:ext>
+            </a:extLst>
+          </p:cNvPr>
+          <p:cNvSpPr txBox="1">
+            <a:spLocks/>
+          </p:cNvSpPr>
+          <p:nvPr/>
+        </p:nvSpPr>
+        <p:spPr>
+          <a:xfrm>
+            <a:off x="472696" y="266915"/>
+            <a:ext cx="10515600" cy="535803"/>
+          </a:xfrm>
+          <a:prstGeom prst="rect">
+            <a:avLst/>
+          </a:prstGeom>
+        </p:spPr>
+        <p:txBody>
+          <a:bodyPr/>
+          <a:lstStyle>
+            <a:lvl1pPr algn="l" defTabSz="914400" rtl="0" eaLnBrk="1" latinLnBrk="0" hangingPunct="1">
+              <a:lnSpc>
+                <a:spcPct val="90000"/>
+              </a:lnSpc>
+              <a:spcBef>
+                <a:spcPct val="0"/>
+              </a:spcBef>
+              <a:buNone/>
+              <a:defRPr sz="4400" kern="1200">
+                <a:solidFill>
+                  <a:schemeClr val="tx1"/>
+                </a:solidFill>
+                <a:latin typeface="+mj-lt"/>
+                <a:ea typeface="+mj-ea"/>
+                <a:cs typeface="+mj-cs"/>
+              </a:defRPr>
+            </a:lvl1pPr>
+          </a:lstStyle>
+          <a:p>
+            <a:r>
+              <a:rPr lang="de-DE" sz="3200" dirty="0"/>
+              <a:t>Debugging DRIVE-Repository</a:t>
+            </a:r>
+            <a:endParaRPr lang="LID4096" sz="3200" dirty="0"/>
+          </a:p>
+        </p:txBody>
+      </p:sp>
+      <p:sp>
+        <p:nvSpPr>
+          <p:cNvPr id="10" name="TextBox 9">
+            <a:extLst>
+              <a:ext uri="{FF2B5EF4-FFF2-40B4-BE49-F238E27FC236}">
+                <a16:creationId xmlns:a16="http://schemas.microsoft.com/office/drawing/2014/main" id="{8DC33C7C-74D6-0C68-CD62-A63C550B6C8B}"/>
+              </a:ext>
+            </a:extLst>
+          </p:cNvPr>
+          <p:cNvSpPr txBox="1"/>
+          <p:nvPr/>
+        </p:nvSpPr>
+        <p:spPr>
+          <a:xfrm>
+            <a:off x="536704" y="1340927"/>
+            <a:ext cx="9201656" cy="369332"/>
+          </a:xfrm>
+          <a:prstGeom prst="rect">
+            <a:avLst/>
+          </a:prstGeom>
+          <a:noFill/>
+        </p:spPr>
+        <p:txBody>
+          <a:bodyPr wrap="square" rtlCol="0">
+            <a:spAutoFit/>
+          </a:bodyPr>
+          <a:lstStyle/>
+          <a:p>
+            <a:pPr marL="285750" indent="-285750">
+              <a:buFont typeface="Arial" panose="020B0604020202020204" pitchFamily="34" charset="0"/>
+              <a:buChar char="•"/>
+            </a:pPr>
+            <a:r>
+              <a:rPr lang="de-DE" dirty="0"/>
+              <a:t>Xavier and Kaiming Initialization</a:t>
+            </a:r>
+            <a:endParaRPr lang="en-US" dirty="0"/>
+          </a:p>
+        </p:txBody>
+      </p:sp>
+      <p:pic>
+        <p:nvPicPr>
+          <p:cNvPr id="5" name="Picture 4">
+            <a:extLst>
+              <a:ext uri="{FF2B5EF4-FFF2-40B4-BE49-F238E27FC236}">
+                <a16:creationId xmlns:a16="http://schemas.microsoft.com/office/drawing/2014/main" id="{4C9AC76A-F080-3F6E-63CF-F625DB00C39A}"/>
+              </a:ext>
+            </a:extLst>
+          </p:cNvPr>
+          <p:cNvPicPr>
+            <a:picLocks noChangeAspect="1"/>
+          </p:cNvPicPr>
+          <p:nvPr/>
+        </p:nvPicPr>
+        <p:blipFill>
+          <a:blip r:embed="rId3">
+            <a:extLst>
+              <a:ext uri="{28A0092B-C50C-407E-A947-70E740481C1C}">
+                <a14:useLocalDpi xmlns:a14="http://schemas.microsoft.com/office/drawing/2010/main" val="0"/>
+              </a:ext>
+            </a:extLst>
+          </a:blip>
+          <a:srcRect/>
+          <a:stretch/>
+        </p:blipFill>
+        <p:spPr>
+          <a:xfrm>
+            <a:off x="738304" y="1892463"/>
+            <a:ext cx="5143909" cy="3857931"/>
+          </a:xfrm>
+          <a:prstGeom prst="rect">
+            <a:avLst/>
+          </a:prstGeom>
+        </p:spPr>
+      </p:pic>
+      <p:pic>
+        <p:nvPicPr>
+          <p:cNvPr id="11" name="Picture 10">
+            <a:extLst>
+              <a:ext uri="{FF2B5EF4-FFF2-40B4-BE49-F238E27FC236}">
+                <a16:creationId xmlns:a16="http://schemas.microsoft.com/office/drawing/2014/main" id="{9D4B3B1B-7EEF-E363-8BFC-25DD84C7CEC7}"/>
+              </a:ext>
+            </a:extLst>
+          </p:cNvPr>
+          <p:cNvPicPr>
+            <a:picLocks noChangeAspect="1"/>
+          </p:cNvPicPr>
+          <p:nvPr/>
+        </p:nvPicPr>
+        <p:blipFill>
+          <a:blip r:embed="rId4">
+            <a:extLst>
+              <a:ext uri="{28A0092B-C50C-407E-A947-70E740481C1C}">
+                <a14:useLocalDpi xmlns:a14="http://schemas.microsoft.com/office/drawing/2010/main" val="0"/>
+              </a:ext>
+            </a:extLst>
+          </a:blip>
+          <a:srcRect/>
+          <a:stretch/>
+        </p:blipFill>
+        <p:spPr>
+          <a:xfrm>
+            <a:off x="6096000" y="1892463"/>
+            <a:ext cx="5143909" cy="3857931"/>
+          </a:xfrm>
+          <a:prstGeom prst="rect">
+            <a:avLst/>
+          </a:prstGeom>
+        </p:spPr>
+      </p:pic>
+      <p:sp>
+        <p:nvSpPr>
+          <p:cNvPr id="13" name="TextBox 12">
+            <a:extLst>
+              <a:ext uri="{FF2B5EF4-FFF2-40B4-BE49-F238E27FC236}">
+                <a16:creationId xmlns:a16="http://schemas.microsoft.com/office/drawing/2014/main" id="{E1B8297D-A54D-3627-C03C-D25B5F131669}"/>
+              </a:ext>
+            </a:extLst>
+          </p:cNvPr>
+          <p:cNvSpPr txBox="1"/>
+          <p:nvPr/>
+        </p:nvSpPr>
+        <p:spPr>
+          <a:xfrm>
+            <a:off x="536704" y="5932600"/>
+            <a:ext cx="9201656" cy="369332"/>
+          </a:xfrm>
+          <a:prstGeom prst="rect">
+            <a:avLst/>
+          </a:prstGeom>
+          <a:noFill/>
+        </p:spPr>
+        <p:txBody>
+          <a:bodyPr wrap="square" rtlCol="0">
+            <a:spAutoFit/>
+          </a:bodyPr>
+          <a:lstStyle/>
+          <a:p>
+            <a:pPr marL="285750" indent="-285750">
+              <a:buFont typeface="Arial" panose="020B0604020202020204" pitchFamily="34" charset="0"/>
+              <a:buChar char="•"/>
+            </a:pPr>
+            <a:r>
+              <a:rPr lang="de-DE" dirty="0"/>
+              <a:t>No clear pattern, no improvement</a:t>
+            </a:r>
+            <a:endParaRPr lang="en-US" dirty="0"/>
+          </a:p>
+        </p:txBody>
+      </p:sp>
+    </p:spTree>
+    <p:extLst>
+      <p:ext uri="{BB962C8B-B14F-4D97-AF65-F5344CB8AC3E}">
+        <p14:creationId xmlns:p14="http://schemas.microsoft.com/office/powerpoint/2010/main" val="2089953502"/>
+      </p:ext>
+    </p:extLst>
+  </p:cSld>
+  <p:clrMapOvr>
+    <a:masterClrMapping/>
+  </p:clrMapOvr>
+</p:sld>
+</file>
+
+<file path=ppt/slides/slide15.xml><?xml version="1.0" encoding="utf-8"?>
+<p:sld xmlns:a="http://schemas.openxmlformats.org/drawingml/2006/main" xmlns:r="http://schemas.openxmlformats.org/officeDocument/2006/relationships" xmlns:p="http://schemas.openxmlformats.org/presentationml/2006/main">
+  <p:cSld>
+    <p:spTree>
+      <p:nvGrpSpPr>
+        <p:cNvPr id="1" name="">
+          <a:extLst>
+            <a:ext uri="{FF2B5EF4-FFF2-40B4-BE49-F238E27FC236}">
+              <a16:creationId xmlns:a16="http://schemas.microsoft.com/office/drawing/2014/main" id="{5780524F-10B8-2C53-4130-E9BC197830EF}"/>
+            </a:ext>
+          </a:extLst>
+        </p:cNvPr>
+        <p:cNvGrpSpPr/>
+        <p:nvPr/>
+      </p:nvGrpSpPr>
+      <p:grpSpPr>
+        <a:xfrm>
+          <a:off x="0" y="0"/>
+          <a:ext cx="0" cy="0"/>
+          <a:chOff x="0" y="0"/>
+          <a:chExt cx="0" cy="0"/>
+        </a:xfrm>
+      </p:grpSpPr>
+      <p:sp>
+        <p:nvSpPr>
+          <p:cNvPr id="9" name="Title 1">
+            <a:extLst>
+              <a:ext uri="{FF2B5EF4-FFF2-40B4-BE49-F238E27FC236}">
+                <a16:creationId xmlns:a16="http://schemas.microsoft.com/office/drawing/2014/main" id="{D08E1FBD-1AFE-887D-9989-4897C87D5202}"/>
+              </a:ext>
+            </a:extLst>
+          </p:cNvPr>
+          <p:cNvSpPr txBox="1">
+            <a:spLocks/>
+          </p:cNvSpPr>
+          <p:nvPr/>
+        </p:nvSpPr>
+        <p:spPr>
+          <a:xfrm>
+            <a:off x="472696" y="266915"/>
+            <a:ext cx="10515600" cy="535803"/>
+          </a:xfrm>
+          <a:prstGeom prst="rect">
+            <a:avLst/>
+          </a:prstGeom>
+        </p:spPr>
+        <p:txBody>
+          <a:bodyPr/>
+          <a:lstStyle>
+            <a:lvl1pPr algn="l" defTabSz="914400" rtl="0" eaLnBrk="1" latinLnBrk="0" hangingPunct="1">
+              <a:lnSpc>
+                <a:spcPct val="90000"/>
+              </a:lnSpc>
+              <a:spcBef>
+                <a:spcPct val="0"/>
+              </a:spcBef>
+              <a:buNone/>
+              <a:defRPr sz="4400" kern="1200">
+                <a:solidFill>
+                  <a:schemeClr val="tx1"/>
+                </a:solidFill>
+                <a:latin typeface="+mj-lt"/>
+                <a:ea typeface="+mj-ea"/>
+                <a:cs typeface="+mj-cs"/>
+              </a:defRPr>
+            </a:lvl1pPr>
+          </a:lstStyle>
+          <a:p>
+            <a:r>
+              <a:rPr lang="de-DE" sz="3200" dirty="0"/>
+              <a:t>Debugging DRIVE-Repository</a:t>
+            </a:r>
+            <a:endParaRPr lang="LID4096" sz="3200" dirty="0"/>
+          </a:p>
+        </p:txBody>
+      </p:sp>
+      <p:sp>
+        <p:nvSpPr>
+          <p:cNvPr id="10" name="TextBox 9">
+            <a:extLst>
+              <a:ext uri="{FF2B5EF4-FFF2-40B4-BE49-F238E27FC236}">
+                <a16:creationId xmlns:a16="http://schemas.microsoft.com/office/drawing/2014/main" id="{8EC70187-D54B-3A52-0D6A-613E7F08650A}"/>
+              </a:ext>
+            </a:extLst>
+          </p:cNvPr>
+          <p:cNvSpPr txBox="1"/>
+          <p:nvPr/>
+        </p:nvSpPr>
+        <p:spPr>
+          <a:xfrm>
+            <a:off x="536704" y="1340927"/>
+            <a:ext cx="10515600" cy="2862322"/>
+          </a:xfrm>
+          <a:prstGeom prst="rect">
+            <a:avLst/>
+          </a:prstGeom>
+          <a:noFill/>
+        </p:spPr>
+        <p:txBody>
+          <a:bodyPr wrap="square" rtlCol="0">
+            <a:spAutoFit/>
+          </a:bodyPr>
+          <a:lstStyle/>
+          <a:p>
+            <a:pPr marL="285750" indent="-285750">
+              <a:buFont typeface="Arial" panose="020B0604020202020204" pitchFamily="34" charset="0"/>
+              <a:buChar char="•"/>
+            </a:pPr>
+            <a:r>
+              <a:rPr lang="de-DE" dirty="0"/>
+              <a:t>Thoughts:</a:t>
+            </a:r>
+          </a:p>
+          <a:p>
+            <a:pPr marL="742950" lvl="1" indent="-285750">
+              <a:buFont typeface="Arial" panose="020B0604020202020204" pitchFamily="34" charset="0"/>
+              <a:buChar char="•"/>
+            </a:pPr>
+            <a:r>
+              <a:rPr lang="de-DE" dirty="0"/>
+              <a:t>There seems to be no other influence of random numbers</a:t>
+            </a:r>
+          </a:p>
+          <a:p>
+            <a:pPr marL="742950" lvl="1" indent="-285750">
+              <a:buFont typeface="Arial" panose="020B0604020202020204" pitchFamily="34" charset="0"/>
+              <a:buChar char="•"/>
+            </a:pPr>
+            <a:r>
+              <a:rPr lang="de-DE" dirty="0"/>
+              <a:t>DRIVE is a deterministic protocol </a:t>
+            </a:r>
+            <a:r>
+              <a:rPr lang="de-DE" dirty="0">
+                <a:sym typeface="Wingdings" panose="05000000000000000000" pitchFamily="2" charset="2"/>
+              </a:rPr>
+              <a:t> its performance should not be dependent on randomness</a:t>
+            </a:r>
+          </a:p>
+          <a:p>
+            <a:pPr marL="742950" lvl="1" indent="-285750">
+              <a:buFont typeface="Arial" panose="020B0604020202020204" pitchFamily="34" charset="0"/>
+              <a:buChar char="•"/>
+            </a:pPr>
+            <a:r>
+              <a:rPr lang="de-DE" dirty="0">
+                <a:sym typeface="Wingdings" panose="05000000000000000000" pitchFamily="2" charset="2"/>
+              </a:rPr>
+              <a:t>Especially hill-like graphs (e.g. seed = 4 or 7) indicate that information is shared, yet not used</a:t>
+            </a:r>
+          </a:p>
+          <a:p>
+            <a:pPr marL="742950" lvl="1" indent="-285750">
+              <a:buFont typeface="Arial" panose="020B0604020202020204" pitchFamily="34" charset="0"/>
+              <a:buChar char="•"/>
+            </a:pPr>
+            <a:r>
+              <a:rPr lang="de-DE" dirty="0">
+                <a:sym typeface="Wingdings" panose="05000000000000000000" pitchFamily="2" charset="2"/>
+              </a:rPr>
+              <a:t>Averaged collaboration rate (over all seeds) rises</a:t>
+            </a:r>
+          </a:p>
+          <a:p>
+            <a:pPr marL="285750" indent="-285750">
+              <a:buFont typeface="Arial" panose="020B0604020202020204" pitchFamily="34" charset="0"/>
+              <a:buChar char="•"/>
+            </a:pPr>
+            <a:endParaRPr lang="de-DE" dirty="0">
+              <a:sym typeface="Wingdings" panose="05000000000000000000" pitchFamily="2" charset="2"/>
+            </a:endParaRPr>
+          </a:p>
+          <a:p>
+            <a:pPr marL="285750" indent="-285750">
+              <a:buFont typeface="Arial" panose="020B0604020202020204" pitchFamily="34" charset="0"/>
+              <a:buChar char="•"/>
+            </a:pPr>
+            <a:r>
+              <a:rPr lang="de-DE" dirty="0">
+                <a:sym typeface="Wingdings" panose="05000000000000000000" pitchFamily="2" charset="2"/>
+              </a:rPr>
+              <a:t>Best Guesses (for now): </a:t>
+            </a:r>
+          </a:p>
+          <a:p>
+            <a:pPr marL="742950" lvl="1" indent="-285750">
+              <a:buFont typeface="Arial" panose="020B0604020202020204" pitchFamily="34" charset="0"/>
+              <a:buChar char="•"/>
+            </a:pPr>
+            <a:r>
+              <a:rPr lang="de-DE" dirty="0">
+                <a:sym typeface="Wingdings" panose="05000000000000000000" pitchFamily="2" charset="2"/>
+              </a:rPr>
+              <a:t>optimizer gets stuck in local minimum</a:t>
+            </a:r>
+            <a:br>
+              <a:rPr lang="de-DE" dirty="0">
+                <a:sym typeface="Wingdings" panose="05000000000000000000" pitchFamily="2" charset="2"/>
+              </a:rPr>
+            </a:br>
+            <a:r>
+              <a:rPr lang="de-DE" dirty="0">
+                <a:sym typeface="Wingdings" panose="05000000000000000000" pitchFamily="2" charset="2"/>
+              </a:rPr>
+              <a:t>and/or</a:t>
+            </a:r>
+          </a:p>
+          <a:p>
+            <a:pPr marL="742950" lvl="1" indent="-285750">
+              <a:buFont typeface="Arial" panose="020B0604020202020204" pitchFamily="34" charset="0"/>
+              <a:buChar char="•"/>
+            </a:pPr>
+            <a:r>
+              <a:rPr lang="de-DE" dirty="0">
+                <a:sym typeface="Wingdings" panose="05000000000000000000" pitchFamily="2" charset="2"/>
+              </a:rPr>
+              <a:t>actor critic collapses to single action</a:t>
+            </a:r>
+            <a:endParaRPr lang="en-US" dirty="0"/>
+          </a:p>
+        </p:txBody>
+      </p:sp>
+      <p:sp>
+        <p:nvSpPr>
+          <p:cNvPr id="13" name="TextBox 12">
+            <a:extLst>
+              <a:ext uri="{FF2B5EF4-FFF2-40B4-BE49-F238E27FC236}">
+                <a16:creationId xmlns:a16="http://schemas.microsoft.com/office/drawing/2014/main" id="{E147D958-77E4-9880-9C68-7CCD11E2B828}"/>
+              </a:ext>
+            </a:extLst>
+          </p:cNvPr>
+          <p:cNvSpPr txBox="1"/>
+          <p:nvPr/>
+        </p:nvSpPr>
+        <p:spPr>
+          <a:xfrm>
+            <a:off x="472696" y="4570144"/>
+            <a:ext cx="9201656" cy="369332"/>
+          </a:xfrm>
+          <a:prstGeom prst="rect">
+            <a:avLst/>
+          </a:prstGeom>
+          <a:noFill/>
+        </p:spPr>
+        <p:txBody>
+          <a:bodyPr wrap="square" rtlCol="0">
+            <a:spAutoFit/>
+          </a:bodyPr>
+          <a:lstStyle/>
+          <a:p>
+            <a:pPr marL="285750" indent="-285750">
+              <a:buFont typeface="Arial" panose="020B0604020202020204" pitchFamily="34" charset="0"/>
+              <a:buChar char="•"/>
+            </a:pPr>
+            <a:r>
+              <a:rPr lang="de-DE" dirty="0"/>
+              <a:t>So most likely a learning failure?</a:t>
+            </a:r>
+            <a:endParaRPr lang="en-US" dirty="0"/>
+          </a:p>
+        </p:txBody>
+      </p:sp>
+      <p:pic>
+        <p:nvPicPr>
+          <p:cNvPr id="6" name="Picture 5">
+            <a:extLst>
+              <a:ext uri="{FF2B5EF4-FFF2-40B4-BE49-F238E27FC236}">
+                <a16:creationId xmlns:a16="http://schemas.microsoft.com/office/drawing/2014/main" id="{D6B26BAA-37C3-5B16-32B5-E3161079E47C}"/>
+              </a:ext>
+            </a:extLst>
+          </p:cNvPr>
+          <p:cNvPicPr>
+            <a:picLocks noChangeAspect="1"/>
+          </p:cNvPicPr>
+          <p:nvPr/>
+        </p:nvPicPr>
+        <p:blipFill>
+          <a:blip r:embed="rId3">
+            <a:extLst>
+              <a:ext uri="{28A0092B-C50C-407E-A947-70E740481C1C}">
+                <a14:useLocalDpi xmlns:a14="http://schemas.microsoft.com/office/drawing/2010/main" val="0"/>
+              </a:ext>
+            </a:extLst>
+          </a:blip>
+          <a:srcRect/>
+          <a:stretch/>
+        </p:blipFill>
+        <p:spPr>
+          <a:xfrm>
+            <a:off x="6531864" y="2724623"/>
+            <a:ext cx="3998976" cy="2999232"/>
+          </a:xfrm>
+          <a:prstGeom prst="rect">
+            <a:avLst/>
+          </a:prstGeom>
+        </p:spPr>
+      </p:pic>
+    </p:spTree>
+    <p:extLst>
+      <p:ext uri="{BB962C8B-B14F-4D97-AF65-F5344CB8AC3E}">
+        <p14:creationId xmlns:p14="http://schemas.microsoft.com/office/powerpoint/2010/main" val="3136232629"/>
+      </p:ext>
+    </p:extLst>
+  </p:cSld>
+  <p:clrMapOvr>
+    <a:masterClrMapping/>
+  </p:clrMapOvr>
+</p:sld>
+</file>
+
+<file path=ppt/slides/slide16.xml><?xml version="1.0" encoding="utf-8"?>
+<p:sld xmlns:a="http://schemas.openxmlformats.org/drawingml/2006/main" xmlns:r="http://schemas.openxmlformats.org/officeDocument/2006/relationships" xmlns:p="http://schemas.openxmlformats.org/presentationml/2006/main">
+  <p:cSld>
+    <p:spTree>
+      <p:nvGrpSpPr>
+        <p:cNvPr id="1" name="">
+          <a:extLst>
+            <a:ext uri="{FF2B5EF4-FFF2-40B4-BE49-F238E27FC236}">
+              <a16:creationId xmlns:a16="http://schemas.microsoft.com/office/drawing/2014/main" id="{DFCD8A9B-951E-E68C-2B85-DC830931AF48}"/>
+            </a:ext>
+          </a:extLst>
+        </p:cNvPr>
+        <p:cNvGrpSpPr/>
+        <p:nvPr/>
+      </p:nvGrpSpPr>
+      <p:grpSpPr>
+        <a:xfrm>
+          <a:off x="0" y="0"/>
+          <a:ext cx="0" cy="0"/>
+          <a:chOff x="0" y="0"/>
+          <a:chExt cx="0" cy="0"/>
+        </a:xfrm>
+      </p:grpSpPr>
+      <p:sp>
+        <p:nvSpPr>
+          <p:cNvPr id="9" name="Title 1">
+            <a:extLst>
+              <a:ext uri="{FF2B5EF4-FFF2-40B4-BE49-F238E27FC236}">
+                <a16:creationId xmlns:a16="http://schemas.microsoft.com/office/drawing/2014/main" id="{A496237B-B65F-24FC-F643-3D9D819B0C61}"/>
+              </a:ext>
+            </a:extLst>
+          </p:cNvPr>
+          <p:cNvSpPr txBox="1">
+            <a:spLocks/>
+          </p:cNvSpPr>
+          <p:nvPr/>
+        </p:nvSpPr>
+        <p:spPr>
+          <a:xfrm>
+            <a:off x="472696" y="266915"/>
+            <a:ext cx="10515600" cy="535803"/>
+          </a:xfrm>
+          <a:prstGeom prst="rect">
+            <a:avLst/>
+          </a:prstGeom>
+        </p:spPr>
+        <p:txBody>
+          <a:bodyPr/>
+          <a:lstStyle>
+            <a:lvl1pPr algn="l" defTabSz="914400" rtl="0" eaLnBrk="1" latinLnBrk="0" hangingPunct="1">
+              <a:lnSpc>
+                <a:spcPct val="90000"/>
+              </a:lnSpc>
+              <a:spcBef>
+                <a:spcPct val="0"/>
+              </a:spcBef>
+              <a:buNone/>
+              <a:defRPr sz="4400" kern="1200">
+                <a:solidFill>
+                  <a:schemeClr val="tx1"/>
+                </a:solidFill>
+                <a:latin typeface="+mj-lt"/>
+                <a:ea typeface="+mj-ea"/>
+                <a:cs typeface="+mj-cs"/>
+              </a:defRPr>
+            </a:lvl1pPr>
+          </a:lstStyle>
+          <a:p>
+            <a:r>
+              <a:rPr lang="de-DE" sz="3200" dirty="0"/>
+              <a:t>Debugging DRIVE-Repository</a:t>
+            </a:r>
+            <a:endParaRPr lang="LID4096" sz="3200" dirty="0"/>
+          </a:p>
+        </p:txBody>
+      </p:sp>
+      <p:sp>
+        <p:nvSpPr>
+          <p:cNvPr id="10" name="TextBox 9">
+            <a:extLst>
+              <a:ext uri="{FF2B5EF4-FFF2-40B4-BE49-F238E27FC236}">
+                <a16:creationId xmlns:a16="http://schemas.microsoft.com/office/drawing/2014/main" id="{2E41BD70-6030-3173-7C7E-39F3A7F875C9}"/>
+              </a:ext>
+            </a:extLst>
+          </p:cNvPr>
+          <p:cNvSpPr txBox="1"/>
+          <p:nvPr/>
+        </p:nvSpPr>
+        <p:spPr>
+          <a:xfrm>
+            <a:off x="536704" y="1340927"/>
+            <a:ext cx="10515600" cy="369332"/>
+          </a:xfrm>
+          <a:prstGeom prst="rect">
+            <a:avLst/>
+          </a:prstGeom>
+          <a:noFill/>
+        </p:spPr>
+        <p:txBody>
+          <a:bodyPr wrap="square" rtlCol="0">
+            <a:spAutoFit/>
+          </a:bodyPr>
+          <a:lstStyle/>
+          <a:p>
+            <a:pPr marL="285750" indent="-285750">
+              <a:buFont typeface="Arial" panose="020B0604020202020204" pitchFamily="34" charset="0"/>
+              <a:buChar char="•"/>
+            </a:pPr>
+            <a:r>
+              <a:rPr lang="de-DE" dirty="0"/>
+              <a:t>However, Harvest-12 &amp; CoinGame-2 work fine for all seeds, and CoinGame-4 does not work at all</a:t>
+            </a:r>
+            <a:endParaRPr lang="en-US" dirty="0"/>
+          </a:p>
+        </p:txBody>
+      </p:sp>
+      <p:sp>
+        <p:nvSpPr>
+          <p:cNvPr id="13" name="TextBox 12">
+            <a:extLst>
+              <a:ext uri="{FF2B5EF4-FFF2-40B4-BE49-F238E27FC236}">
+                <a16:creationId xmlns:a16="http://schemas.microsoft.com/office/drawing/2014/main" id="{3340E684-C2FD-01CC-41C0-E942FD083FD2}"/>
+              </a:ext>
+            </a:extLst>
+          </p:cNvPr>
+          <p:cNvSpPr txBox="1"/>
+          <p:nvPr/>
+        </p:nvSpPr>
+        <p:spPr>
+          <a:xfrm>
+            <a:off x="472696" y="5423777"/>
+            <a:ext cx="9201656" cy="646331"/>
+          </a:xfrm>
+          <a:prstGeom prst="rect">
+            <a:avLst/>
+          </a:prstGeom>
+          <a:noFill/>
+        </p:spPr>
+        <p:txBody>
+          <a:bodyPr wrap="square" rtlCol="0">
+            <a:spAutoFit/>
+          </a:bodyPr>
+          <a:lstStyle/>
+          <a:p>
+            <a:pPr marL="285750" indent="-285750">
+              <a:buFont typeface="Arial" panose="020B0604020202020204" pitchFamily="34" charset="0"/>
+              <a:buChar char="•"/>
+            </a:pPr>
+            <a:r>
+              <a:rPr lang="de-DE" dirty="0"/>
+              <a:t>So maybe a bug in the IDP/CoinGame-4 Environments?</a:t>
+            </a:r>
+          </a:p>
+          <a:p>
+            <a:pPr marL="285750" indent="-285750">
+              <a:buFont typeface="Arial" panose="020B0604020202020204" pitchFamily="34" charset="0"/>
+              <a:buChar char="•"/>
+            </a:pPr>
+            <a:r>
+              <a:rPr lang="de-DE" dirty="0"/>
+              <a:t>The only difference between CoinGame-4 &amp; CoinGame-2 is nr. of agents &amp; size of board...</a:t>
+            </a:r>
+            <a:endParaRPr lang="en-US" dirty="0"/>
+          </a:p>
+        </p:txBody>
+      </p:sp>
+      <p:pic>
+        <p:nvPicPr>
+          <p:cNvPr id="3" name="Picture 2">
+            <a:extLst>
+              <a:ext uri="{FF2B5EF4-FFF2-40B4-BE49-F238E27FC236}">
+                <a16:creationId xmlns:a16="http://schemas.microsoft.com/office/drawing/2014/main" id="{244BB1DD-BF42-3314-42C4-769D27B52897}"/>
+              </a:ext>
+            </a:extLst>
+          </p:cNvPr>
+          <p:cNvPicPr>
+            <a:picLocks noChangeAspect="1"/>
+          </p:cNvPicPr>
+          <p:nvPr/>
+        </p:nvPicPr>
+        <p:blipFill>
+          <a:blip r:embed="rId3"/>
+          <a:stretch>
+            <a:fillRect/>
+          </a:stretch>
+        </p:blipFill>
+        <p:spPr>
+          <a:xfrm>
+            <a:off x="472696" y="2131410"/>
+            <a:ext cx="3828288" cy="2871216"/>
+          </a:xfrm>
+          <a:prstGeom prst="rect">
+            <a:avLst/>
+          </a:prstGeom>
+        </p:spPr>
+      </p:pic>
+      <p:pic>
+        <p:nvPicPr>
+          <p:cNvPr id="5" name="Picture 4">
+            <a:extLst>
+              <a:ext uri="{FF2B5EF4-FFF2-40B4-BE49-F238E27FC236}">
+                <a16:creationId xmlns:a16="http://schemas.microsoft.com/office/drawing/2014/main" id="{91C4DF98-AF57-90F3-7914-45F618BEC012}"/>
+              </a:ext>
+            </a:extLst>
+          </p:cNvPr>
+          <p:cNvPicPr>
+            <a:picLocks noChangeAspect="1"/>
+          </p:cNvPicPr>
+          <p:nvPr/>
+        </p:nvPicPr>
+        <p:blipFill>
+          <a:blip r:embed="rId4"/>
+          <a:stretch>
+            <a:fillRect/>
+          </a:stretch>
+        </p:blipFill>
+        <p:spPr>
+          <a:xfrm>
+            <a:off x="8013448" y="2131410"/>
+            <a:ext cx="3828288" cy="2871216"/>
+          </a:xfrm>
+          <a:prstGeom prst="rect">
+            <a:avLst/>
+          </a:prstGeom>
+        </p:spPr>
+      </p:pic>
+      <p:pic>
+        <p:nvPicPr>
+          <p:cNvPr id="8" name="Picture 7">
+            <a:extLst>
+              <a:ext uri="{FF2B5EF4-FFF2-40B4-BE49-F238E27FC236}">
+                <a16:creationId xmlns:a16="http://schemas.microsoft.com/office/drawing/2014/main" id="{E65EDDF7-89C5-0559-0F67-33572B442B23}"/>
+              </a:ext>
+            </a:extLst>
+          </p:cNvPr>
+          <p:cNvPicPr>
+            <a:picLocks noChangeAspect="1"/>
+          </p:cNvPicPr>
+          <p:nvPr/>
+        </p:nvPicPr>
+        <p:blipFill>
+          <a:blip r:embed="rId5"/>
+          <a:stretch>
+            <a:fillRect/>
+          </a:stretch>
+        </p:blipFill>
+        <p:spPr>
+          <a:xfrm>
+            <a:off x="4243072" y="2131410"/>
+            <a:ext cx="3828288" cy="2871216"/>
+          </a:xfrm>
+          <a:prstGeom prst="rect">
+            <a:avLst/>
+          </a:prstGeom>
+        </p:spPr>
+      </p:pic>
+    </p:spTree>
+    <p:extLst>
+      <p:ext uri="{BB962C8B-B14F-4D97-AF65-F5344CB8AC3E}">
+        <p14:creationId xmlns:p14="http://schemas.microsoft.com/office/powerpoint/2010/main" val="2364907028"/>
+      </p:ext>
+    </p:extLst>
+  </p:cSld>
+  <p:clrMapOvr>
+    <a:masterClrMapping/>
+  </p:clrMapOvr>
+</p:sld>
+</file>
+
 <file path=ppt/slides/slide2.xml><?xml version="1.0" encoding="utf-8"?>
 <p:sld xmlns:a="http://schemas.openxmlformats.org/drawingml/2006/main" xmlns:r="http://schemas.openxmlformats.org/officeDocument/2006/relationships" xmlns:p="http://schemas.openxmlformats.org/presentationml/2006/main">
   <p:cSld>
@@ -5420,10 +7097,10 @@
             <p:nvPr/>
           </p:nvPicPr>
           <p:blipFill>
-            <a:blip r:embed="rId3">
+            <a:blip>
               <a:extLst>
                 <a:ext uri="{96DAC541-7B7A-43D3-8B79-37D633B846F1}">
-                  <asvg:svgBlip xmlns:asvg="http://schemas.microsoft.com/office/drawing/2016/SVG/main" r:embed="rId4"/>
+                  <asvg:svgBlip xmlns:asvg="http://schemas.microsoft.com/office/drawing/2016/SVG/main" r:embed="rId3"/>
                 </a:ext>
               </a:extLst>
             </a:blip>
@@ -5456,10 +7133,10 @@
             <p:nvPr/>
           </p:nvPicPr>
           <p:blipFill>
-            <a:blip r:embed="rId3">
+            <a:blip>
               <a:extLst>
                 <a:ext uri="{96DAC541-7B7A-43D3-8B79-37D633B846F1}">
-                  <asvg:svgBlip xmlns:asvg="http://schemas.microsoft.com/office/drawing/2016/SVG/main" r:embed="rId4"/>
+                  <asvg:svgBlip xmlns:asvg="http://schemas.microsoft.com/office/drawing/2016/SVG/main" r:embed="rId3"/>
                 </a:ext>
               </a:extLst>
             </a:blip>
@@ -5492,10 +7169,10 @@
             <p:nvPr/>
           </p:nvPicPr>
           <p:blipFill>
-            <a:blip r:embed="rId3">
+            <a:blip>
               <a:extLst>
                 <a:ext uri="{96DAC541-7B7A-43D3-8B79-37D633B846F1}">
-                  <asvg:svgBlip xmlns:asvg="http://schemas.microsoft.com/office/drawing/2016/SVG/main" r:embed="rId4"/>
+                  <asvg:svgBlip xmlns:asvg="http://schemas.microsoft.com/office/drawing/2016/SVG/main" r:embed="rId3"/>
                 </a:ext>
               </a:extLst>
             </a:blip>
@@ -5528,10 +7205,10 @@
             <p:nvPr/>
           </p:nvPicPr>
           <p:blipFill>
-            <a:blip r:embed="rId3">
+            <a:blip>
               <a:extLst>
                 <a:ext uri="{96DAC541-7B7A-43D3-8B79-37D633B846F1}">
-                  <asvg:svgBlip xmlns:asvg="http://schemas.microsoft.com/office/drawing/2016/SVG/main" r:embed="rId4"/>
+                  <asvg:svgBlip xmlns:asvg="http://schemas.microsoft.com/office/drawing/2016/SVG/main" r:embed="rId3"/>
                 </a:ext>
               </a:extLst>
             </a:blip>
@@ -5550,8 +7227,8 @@
           </p:spPr>
         </p:pic>
       </p:grpSp>
-      <mc:AlternateContent xmlns:mc="http://schemas.openxmlformats.org/markup-compatibility/2006">
-        <mc:Choice xmlns:a14="http://schemas.microsoft.com/office/drawing/2010/main" Requires="a14">
+      <mc:AlternateContent xmlns:mc="http://schemas.openxmlformats.org/markup-compatibility/2006" xmlns:a14="http://schemas.microsoft.com/office/drawing/2010/main">
+        <mc:Choice Requires="a14">
           <p:sp>
             <p:nvSpPr>
               <p:cNvPr id="32" name="TextBox 31">
@@ -5580,6 +7257,7 @@
               </a:bodyPr>
               <a:lstStyle/>
               <a:p>
+                <a:pPr/>
                 <a14:m>
                   <m:oMathPara xmlns:m="http://schemas.openxmlformats.org/officeDocument/2006/math">
                     <m:oMathParaPr>
@@ -5600,7 +7278,7 @@
             </p:txBody>
           </p:sp>
         </mc:Choice>
-        <mc:Fallback>
+        <mc:Fallback xmlns="">
           <p:sp>
             <p:nvSpPr>
               <p:cNvPr id="32" name="TextBox 31">
@@ -5838,10 +7516,10 @@
             <p:nvPr/>
           </p:nvPicPr>
           <p:blipFill>
-            <a:blip r:embed="rId3">
+            <a:blip>
               <a:extLst>
                 <a:ext uri="{96DAC541-7B7A-43D3-8B79-37D633B846F1}">
-                  <asvg:svgBlip xmlns:asvg="http://schemas.microsoft.com/office/drawing/2016/SVG/main" r:embed="rId4"/>
+                  <asvg:svgBlip xmlns:asvg="http://schemas.microsoft.com/office/drawing/2016/SVG/main" r:embed="rId3"/>
                 </a:ext>
               </a:extLst>
             </a:blip>
@@ -5874,10 +7552,10 @@
             <p:nvPr/>
           </p:nvPicPr>
           <p:blipFill>
-            <a:blip r:embed="rId3">
+            <a:blip>
               <a:extLst>
                 <a:ext uri="{96DAC541-7B7A-43D3-8B79-37D633B846F1}">
-                  <asvg:svgBlip xmlns:asvg="http://schemas.microsoft.com/office/drawing/2016/SVG/main" r:embed="rId4"/>
+                  <asvg:svgBlip xmlns:asvg="http://schemas.microsoft.com/office/drawing/2016/SVG/main" r:embed="rId3"/>
                 </a:ext>
               </a:extLst>
             </a:blip>
@@ -5910,10 +7588,10 @@
             <p:nvPr/>
           </p:nvPicPr>
           <p:blipFill>
-            <a:blip r:embed="rId3">
+            <a:blip>
               <a:extLst>
                 <a:ext uri="{96DAC541-7B7A-43D3-8B79-37D633B846F1}">
-                  <asvg:svgBlip xmlns:asvg="http://schemas.microsoft.com/office/drawing/2016/SVG/main" r:embed="rId4"/>
+                  <asvg:svgBlip xmlns:asvg="http://schemas.microsoft.com/office/drawing/2016/SVG/main" r:embed="rId3"/>
                 </a:ext>
               </a:extLst>
             </a:blip>
@@ -5946,10 +7624,10 @@
             <p:nvPr/>
           </p:nvPicPr>
           <p:blipFill>
-            <a:blip r:embed="rId3">
+            <a:blip>
               <a:extLst>
                 <a:ext uri="{96DAC541-7B7A-43D3-8B79-37D633B846F1}">
-                  <asvg:svgBlip xmlns:asvg="http://schemas.microsoft.com/office/drawing/2016/SVG/main" r:embed="rId4"/>
+                  <asvg:svgBlip xmlns:asvg="http://schemas.microsoft.com/office/drawing/2016/SVG/main" r:embed="rId3"/>
                 </a:ext>
               </a:extLst>
             </a:blip>
@@ -5982,10 +7660,10 @@
             <p:nvPr/>
           </p:nvPicPr>
           <p:blipFill>
-            <a:blip r:embed="rId3">
+            <a:blip>
               <a:extLst>
                 <a:ext uri="{96DAC541-7B7A-43D3-8B79-37D633B846F1}">
-                  <asvg:svgBlip xmlns:asvg="http://schemas.microsoft.com/office/drawing/2016/SVG/main" r:embed="rId4"/>
+                  <asvg:svgBlip xmlns:asvg="http://schemas.microsoft.com/office/drawing/2016/SVG/main" r:embed="rId3"/>
                 </a:ext>
               </a:extLst>
             </a:blip>
@@ -6018,10 +7696,10 @@
             <p:nvPr/>
           </p:nvPicPr>
           <p:blipFill>
-            <a:blip r:embed="rId3">
+            <a:blip>
               <a:extLst>
                 <a:ext uri="{96DAC541-7B7A-43D3-8B79-37D633B846F1}">
-                  <asvg:svgBlip xmlns:asvg="http://schemas.microsoft.com/office/drawing/2016/SVG/main" r:embed="rId4"/>
+                  <asvg:svgBlip xmlns:asvg="http://schemas.microsoft.com/office/drawing/2016/SVG/main" r:embed="rId3"/>
                 </a:ext>
               </a:extLst>
             </a:blip>
@@ -8043,8 +9721,8 @@
           </a:p>
         </p:txBody>
       </p:sp>
-      <mc:AlternateContent xmlns:mc="http://schemas.openxmlformats.org/markup-compatibility/2006">
-        <mc:Choice xmlns:a14="http://schemas.microsoft.com/office/drawing/2010/main" Requires="a14">
+      <mc:AlternateContent xmlns:mc="http://schemas.openxmlformats.org/markup-compatibility/2006" xmlns:a14="http://schemas.microsoft.com/office/drawing/2010/main">
+        <mc:Choice Requires="a14">
           <p:sp>
             <p:nvSpPr>
               <p:cNvPr id="7" name="TextBox 6">
@@ -8171,7 +9849,7 @@
             </p:txBody>
           </p:sp>
         </mc:Choice>
-        <mc:Fallback>
+        <mc:Fallback xmlns="">
           <p:sp>
             <p:nvSpPr>
               <p:cNvPr id="7" name="TextBox 6">

--- a/Master Thesis Updates.pptx
+++ b/Master Thesis Updates.pptx
@@ -5,7 +5,7 @@
     <p:sldMasterId id="2147483648" r:id="rId1"/>
   </p:sldMasterIdLst>
   <p:notesMasterIdLst>
-    <p:notesMasterId r:id="rId18"/>
+    <p:notesMasterId r:id="rId19"/>
   </p:notesMasterIdLst>
   <p:sldIdLst>
     <p:sldId id="256" r:id="rId2"/>
@@ -24,6 +24,7 @@
     <p:sldId id="269" r:id="rId15"/>
     <p:sldId id="270" r:id="rId16"/>
     <p:sldId id="271" r:id="rId17"/>
+    <p:sldId id="272" r:id="rId18"/>
   </p:sldIdLst>
   <p:sldSz cx="12192000" cy="6858000"/>
   <p:notesSz cx="6858000" cy="9144000"/>
@@ -879,6 +880,114 @@
     <p:extLst>
       <p:ext uri="{BB962C8B-B14F-4D97-AF65-F5344CB8AC3E}">
         <p14:creationId xmlns:p14="http://schemas.microsoft.com/office/powerpoint/2010/main" val="2155910027"/>
+      </p:ext>
+    </p:extLst>
+  </p:cSld>
+  <p:clrMapOvr>
+    <a:masterClrMapping/>
+  </p:clrMapOvr>
+</p:notes>
+</file>
+
+<file path=ppt/notesSlides/notesSlide13.xml><?xml version="1.0" encoding="utf-8"?>
+<p:notes xmlns:a="http://schemas.openxmlformats.org/drawingml/2006/main" xmlns:r="http://schemas.openxmlformats.org/officeDocument/2006/relationships" xmlns:p="http://schemas.openxmlformats.org/presentationml/2006/main">
+  <p:cSld>
+    <p:spTree>
+      <p:nvGrpSpPr>
+        <p:cNvPr id="1" name="">
+          <a:extLst>
+            <a:ext uri="{FF2B5EF4-FFF2-40B4-BE49-F238E27FC236}">
+              <a16:creationId xmlns:a16="http://schemas.microsoft.com/office/drawing/2014/main" id="{953CDA21-D00E-F320-B576-77CCB53FB278}"/>
+            </a:ext>
+          </a:extLst>
+        </p:cNvPr>
+        <p:cNvGrpSpPr/>
+        <p:nvPr/>
+      </p:nvGrpSpPr>
+      <p:grpSpPr>
+        <a:xfrm>
+          <a:off x="0" y="0"/>
+          <a:ext cx="0" cy="0"/>
+          <a:chOff x="0" y="0"/>
+          <a:chExt cx="0" cy="0"/>
+        </a:xfrm>
+      </p:grpSpPr>
+      <p:sp>
+        <p:nvSpPr>
+          <p:cNvPr id="2" name="Slide Image Placeholder 1">
+            <a:extLst>
+              <a:ext uri="{FF2B5EF4-FFF2-40B4-BE49-F238E27FC236}">
+                <a16:creationId xmlns:a16="http://schemas.microsoft.com/office/drawing/2014/main" id="{C619C045-3CBF-1884-927C-B51B3CE6300B}"/>
+              </a:ext>
+            </a:extLst>
+          </p:cNvPr>
+          <p:cNvSpPr>
+            <a:spLocks noGrp="1" noRot="1" noChangeAspect="1"/>
+          </p:cNvSpPr>
+          <p:nvPr>
+            <p:ph type="sldImg"/>
+          </p:nvPr>
+        </p:nvSpPr>
+        <p:spPr/>
+      </p:sp>
+      <p:sp>
+        <p:nvSpPr>
+          <p:cNvPr id="3" name="Notes Placeholder 2">
+            <a:extLst>
+              <a:ext uri="{FF2B5EF4-FFF2-40B4-BE49-F238E27FC236}">
+                <a16:creationId xmlns:a16="http://schemas.microsoft.com/office/drawing/2014/main" id="{38FA38D6-B342-2BB4-ABAC-AF176C5D0EAA}"/>
+              </a:ext>
+            </a:extLst>
+          </p:cNvPr>
+          <p:cNvSpPr>
+            <a:spLocks noGrp="1"/>
+          </p:cNvSpPr>
+          <p:nvPr>
+            <p:ph type="body" idx="1"/>
+          </p:nvPr>
+        </p:nvSpPr>
+        <p:spPr/>
+        <p:txBody>
+          <a:bodyPr/>
+          <a:lstStyle/>
+          <a:p>
+            <a:endParaRPr lang="LID4096" dirty="0"/>
+          </a:p>
+        </p:txBody>
+      </p:sp>
+      <p:sp>
+        <p:nvSpPr>
+          <p:cNvPr id="4" name="Slide Number Placeholder 3">
+            <a:extLst>
+              <a:ext uri="{FF2B5EF4-FFF2-40B4-BE49-F238E27FC236}">
+                <a16:creationId xmlns:a16="http://schemas.microsoft.com/office/drawing/2014/main" id="{23A6C106-6F5F-B37C-7CE2-978055CF8423}"/>
+              </a:ext>
+            </a:extLst>
+          </p:cNvPr>
+          <p:cNvSpPr>
+            <a:spLocks noGrp="1"/>
+          </p:cNvSpPr>
+          <p:nvPr>
+            <p:ph type="sldNum" sz="quarter" idx="5"/>
+          </p:nvPr>
+        </p:nvSpPr>
+        <p:spPr/>
+        <p:txBody>
+          <a:bodyPr/>
+          <a:lstStyle/>
+          <a:p>
+            <a:fld id="{8BFF5565-A286-40EC-9626-D8188B2D2F64}" type="slidenum">
+              <a:rPr lang="LID4096" smtClean="0"/>
+              <a:t>17</a:t>
+            </a:fld>
+            <a:endParaRPr lang="LID4096"/>
+          </a:p>
+        </p:txBody>
+      </p:sp>
+    </p:spTree>
+    <p:extLst>
+      <p:ext uri="{BB962C8B-B14F-4D97-AF65-F5344CB8AC3E}">
+        <p14:creationId xmlns:p14="http://schemas.microsoft.com/office/powerpoint/2010/main" val="1713514717"/>
       </p:ext>
     </p:extLst>
   </p:cSld>
@@ -6765,6 +6874,229 @@
     <p:extLst>
       <p:ext uri="{BB962C8B-B14F-4D97-AF65-F5344CB8AC3E}">
         <p14:creationId xmlns:p14="http://schemas.microsoft.com/office/powerpoint/2010/main" val="2364907028"/>
+      </p:ext>
+    </p:extLst>
+  </p:cSld>
+  <p:clrMapOvr>
+    <a:masterClrMapping/>
+  </p:clrMapOvr>
+</p:sld>
+</file>
+
+<file path=ppt/slides/slide17.xml><?xml version="1.0" encoding="utf-8"?>
+<p:sld xmlns:a="http://schemas.openxmlformats.org/drawingml/2006/main" xmlns:r="http://schemas.openxmlformats.org/officeDocument/2006/relationships" xmlns:p="http://schemas.openxmlformats.org/presentationml/2006/main">
+  <p:cSld>
+    <p:spTree>
+      <p:nvGrpSpPr>
+        <p:cNvPr id="1" name="">
+          <a:extLst>
+            <a:ext uri="{FF2B5EF4-FFF2-40B4-BE49-F238E27FC236}">
+              <a16:creationId xmlns:a16="http://schemas.microsoft.com/office/drawing/2014/main" id="{B6C9987A-E35F-CA4A-95BA-E67AC89A8C0F}"/>
+            </a:ext>
+          </a:extLst>
+        </p:cNvPr>
+        <p:cNvGrpSpPr/>
+        <p:nvPr/>
+      </p:nvGrpSpPr>
+      <p:grpSpPr>
+        <a:xfrm>
+          <a:off x="0" y="0"/>
+          <a:ext cx="0" cy="0"/>
+          <a:chOff x="0" y="0"/>
+          <a:chExt cx="0" cy="0"/>
+        </a:xfrm>
+      </p:grpSpPr>
+      <p:sp>
+        <p:nvSpPr>
+          <p:cNvPr id="9" name="Title 1">
+            <a:extLst>
+              <a:ext uri="{FF2B5EF4-FFF2-40B4-BE49-F238E27FC236}">
+                <a16:creationId xmlns:a16="http://schemas.microsoft.com/office/drawing/2014/main" id="{3EA85F5C-37ED-1DE2-7F6B-6AF82D9FF347}"/>
+              </a:ext>
+            </a:extLst>
+          </p:cNvPr>
+          <p:cNvSpPr txBox="1">
+            <a:spLocks/>
+          </p:cNvSpPr>
+          <p:nvPr/>
+        </p:nvSpPr>
+        <p:spPr>
+          <a:xfrm>
+            <a:off x="472696" y="266915"/>
+            <a:ext cx="10515600" cy="535803"/>
+          </a:xfrm>
+          <a:prstGeom prst="rect">
+            <a:avLst/>
+          </a:prstGeom>
+        </p:spPr>
+        <p:txBody>
+          <a:bodyPr/>
+          <a:lstStyle>
+            <a:lvl1pPr algn="l" defTabSz="914400" rtl="0" eaLnBrk="1" latinLnBrk="0" hangingPunct="1">
+              <a:lnSpc>
+                <a:spcPct val="90000"/>
+              </a:lnSpc>
+              <a:spcBef>
+                <a:spcPct val="0"/>
+              </a:spcBef>
+              <a:buNone/>
+              <a:defRPr sz="4400" kern="1200">
+                <a:solidFill>
+                  <a:schemeClr val="tx1"/>
+                </a:solidFill>
+                <a:latin typeface="+mj-lt"/>
+                <a:ea typeface="+mj-ea"/>
+                <a:cs typeface="+mj-cs"/>
+              </a:defRPr>
+            </a:lvl1pPr>
+          </a:lstStyle>
+          <a:p>
+            <a:r>
+              <a:rPr lang="de-DE" sz="3200" dirty="0"/>
+              <a:t>Debugging DRIVE-Repository</a:t>
+            </a:r>
+            <a:endParaRPr lang="LID4096" sz="3200" dirty="0"/>
+          </a:p>
+        </p:txBody>
+      </p:sp>
+      <p:pic>
+        <p:nvPicPr>
+          <p:cNvPr id="4" name="Picture 3">
+            <a:extLst>
+              <a:ext uri="{FF2B5EF4-FFF2-40B4-BE49-F238E27FC236}">
+                <a16:creationId xmlns:a16="http://schemas.microsoft.com/office/drawing/2014/main" id="{859F0ACF-CB0E-82E7-30AA-25CD0B1D1B2B}"/>
+              </a:ext>
+            </a:extLst>
+          </p:cNvPr>
+          <p:cNvPicPr>
+            <a:picLocks noChangeAspect="1"/>
+          </p:cNvPicPr>
+          <p:nvPr/>
+        </p:nvPicPr>
+        <p:blipFill>
+          <a:blip r:embed="rId3"/>
+          <a:stretch>
+            <a:fillRect/>
+          </a:stretch>
+        </p:blipFill>
+        <p:spPr>
+          <a:xfrm>
+            <a:off x="912012" y="1843116"/>
+            <a:ext cx="4997176" cy="3479741"/>
+          </a:xfrm>
+          <a:prstGeom prst="rect">
+            <a:avLst/>
+          </a:prstGeom>
+        </p:spPr>
+      </p:pic>
+      <p:pic>
+        <p:nvPicPr>
+          <p:cNvPr id="7" name="Picture 6">
+            <a:extLst>
+              <a:ext uri="{FF2B5EF4-FFF2-40B4-BE49-F238E27FC236}">
+                <a16:creationId xmlns:a16="http://schemas.microsoft.com/office/drawing/2014/main" id="{7DA1FAEA-2DA2-CC73-A23F-C7CF16ACF38B}"/>
+              </a:ext>
+            </a:extLst>
+          </p:cNvPr>
+          <p:cNvPicPr>
+            <a:picLocks noChangeAspect="1"/>
+          </p:cNvPicPr>
+          <p:nvPr/>
+        </p:nvPicPr>
+        <p:blipFill>
+          <a:blip r:embed="rId4"/>
+          <a:stretch>
+            <a:fillRect/>
+          </a:stretch>
+        </p:blipFill>
+        <p:spPr>
+          <a:xfrm>
+            <a:off x="6282814" y="1843116"/>
+            <a:ext cx="4639655" cy="3479741"/>
+          </a:xfrm>
+          <a:prstGeom prst="rect">
+            <a:avLst/>
+          </a:prstGeom>
+        </p:spPr>
+      </p:pic>
+      <p:sp>
+        <p:nvSpPr>
+          <p:cNvPr id="11" name="TextBox 10">
+            <a:extLst>
+              <a:ext uri="{FF2B5EF4-FFF2-40B4-BE49-F238E27FC236}">
+                <a16:creationId xmlns:a16="http://schemas.microsoft.com/office/drawing/2014/main" id="{669D6043-4B34-B677-7C07-4AE8BD64F3FA}"/>
+              </a:ext>
+            </a:extLst>
+          </p:cNvPr>
+          <p:cNvSpPr txBox="1"/>
+          <p:nvPr/>
+        </p:nvSpPr>
+        <p:spPr>
+          <a:xfrm>
+            <a:off x="1655542" y="5633884"/>
+            <a:ext cx="3510116" cy="369332"/>
+          </a:xfrm>
+          <a:prstGeom prst="rect">
+            <a:avLst/>
+          </a:prstGeom>
+          <a:noFill/>
+        </p:spPr>
+        <p:txBody>
+          <a:bodyPr wrap="square" rtlCol="0">
+            <a:spAutoFit/>
+          </a:bodyPr>
+          <a:lstStyle/>
+          <a:p>
+            <a:pPr algn="ctr"/>
+            <a:r>
+              <a:rPr lang="de-DE" dirty="0"/>
+              <a:t>Results from Paper</a:t>
+            </a:r>
+            <a:endParaRPr lang="en-US" dirty="0"/>
+          </a:p>
+        </p:txBody>
+      </p:sp>
+      <p:sp>
+        <p:nvSpPr>
+          <p:cNvPr id="12" name="TextBox 11">
+            <a:extLst>
+              <a:ext uri="{FF2B5EF4-FFF2-40B4-BE49-F238E27FC236}">
+                <a16:creationId xmlns:a16="http://schemas.microsoft.com/office/drawing/2014/main" id="{826F16E5-E4A9-AFC8-C0E8-22BDD778C2E4}"/>
+              </a:ext>
+            </a:extLst>
+          </p:cNvPr>
+          <p:cNvSpPr txBox="1"/>
+          <p:nvPr/>
+        </p:nvSpPr>
+        <p:spPr>
+          <a:xfrm>
+            <a:off x="6847583" y="5633884"/>
+            <a:ext cx="3510116" cy="369332"/>
+          </a:xfrm>
+          <a:prstGeom prst="rect">
+            <a:avLst/>
+          </a:prstGeom>
+          <a:noFill/>
+        </p:spPr>
+        <p:txBody>
+          <a:bodyPr wrap="square" rtlCol="0">
+            <a:spAutoFit/>
+          </a:bodyPr>
+          <a:lstStyle/>
+          <a:p>
+            <a:pPr algn="ctr"/>
+            <a:r>
+              <a:rPr lang="de-DE" dirty="0"/>
+              <a:t>CoinGame-4 (300 Epochs)</a:t>
+            </a:r>
+            <a:endParaRPr lang="en-US" dirty="0"/>
+          </a:p>
+        </p:txBody>
+      </p:sp>
+    </p:spTree>
+    <p:extLst>
+      <p:ext uri="{BB962C8B-B14F-4D97-AF65-F5344CB8AC3E}">
+        <p14:creationId xmlns:p14="http://schemas.microsoft.com/office/powerpoint/2010/main" val="3218562249"/>
       </p:ext>
     </p:extLst>
   </p:cSld>
